--- a/public/Kavach_AI_Master_Pitch_Deck.pptx
+++ b/public/Kavach_AI_Master_Pitch_Deck.pptx
@@ -1514,8 +1514,8 @@
         </p:blipFill>
         <p:spPr>
           <a:xfrm>
-            <a:off x="548640" y="320040"/>
-            <a:ext cx="594360" cy="594360"/>
+            <a:off x="548640" y="256032"/>
+            <a:ext cx="475488" cy="475488"/>
           </a:xfrm>
           <a:prstGeom prst="rect">
             <a:avLst/>
@@ -1530,8 +1530,8 @@
         </p:nvSpPr>
         <p:spPr>
           <a:xfrm>
-            <a:off x="1280160" y="320040"/>
-            <a:ext cx="9601200" cy="228600"/>
+            <a:off x="1143000" y="256032"/>
+            <a:ext cx="10424160" cy="182880"/>
           </a:xfrm>
           <a:prstGeom prst="rect">
             <a:avLst/>
@@ -1547,7 +1547,7 @@
               <a:buNone/>
             </a:pPr>
             <a:r>
-              <a:rPr lang="en-US" sz="900" b="1" dirty="0">
+              <a:rPr lang="en-US" sz="850" b="1" dirty="0">
                 <a:solidFill>
                   <a:srgbClr val="D4AF37"/>
                 </a:solidFill>
@@ -1557,7 +1557,7 @@
               </a:rPr>
               <a:t>⚡ ELICIT ACM HACKATHON • TEAM NULL POINTERS • CYBERSECURITY TRACK</a:t>
             </a:r>
-            <a:endParaRPr lang="en-US" sz="900" dirty="0"/>
+            <a:endParaRPr lang="en-US" sz="850" dirty="0"/>
           </a:p>
         </p:txBody>
       </p:sp>
@@ -1569,8 +1569,8 @@
         </p:nvSpPr>
         <p:spPr>
           <a:xfrm>
-            <a:off x="1280160" y="594360"/>
-            <a:ext cx="10241280" cy="411480"/>
+            <a:off x="1143000" y="475488"/>
+            <a:ext cx="10424160" cy="365760"/>
           </a:xfrm>
           <a:prstGeom prst="rect">
             <a:avLst/>
@@ -1586,7 +1586,7 @@
               <a:buNone/>
             </a:pPr>
             <a:r>
-              <a:rPr lang="en-US" sz="1800" b="1" dirty="0">
+              <a:rPr lang="en-US" sz="1600" b="1" dirty="0">
                 <a:solidFill>
                   <a:srgbClr val="F8FAFC"/>
                 </a:solidFill>
@@ -1596,7 +1596,7 @@
               </a:rPr>
               <a:t>Kavach AI (कवच) — Vernacular SMS Phishing Defense</a:t>
             </a:r>
-            <a:endParaRPr lang="en-US" sz="1800" dirty="0"/>
+            <a:endParaRPr lang="en-US" sz="1600" dirty="0"/>
           </a:p>
         </p:txBody>
       </p:sp>
@@ -1608,7 +1608,7 @@
         </p:nvSpPr>
         <p:spPr>
           <a:xfrm>
-            <a:off x="548640" y="1097280"/>
+            <a:off x="548640" y="960120"/>
             <a:ext cx="11091672" cy="0"/>
           </a:xfrm>
           <a:prstGeom prst="line">
@@ -1617,7 +1617,7 @@
           <a:noFill/>
           <a:ln w="12700">
             <a:solidFill>
-              <a:srgbClr val="20202C"/>
+              <a:srgbClr val="1C1C28"/>
             </a:solidFill>
             <a:prstDash val="solid"/>
           </a:ln>
@@ -1631,12 +1631,12 @@
         </p:nvSpPr>
         <p:spPr>
           <a:xfrm>
-            <a:off x="548640" y="1280160"/>
-            <a:ext cx="6035040" cy="5120640"/>
+            <a:off x="548640" y="1115568"/>
+            <a:ext cx="6035040" cy="4937760"/>
           </a:xfrm>
           <a:prstGeom prst="rect">
             <a:avLst>
-              <a:gd name="adj" fmla="val 893"/>
+              <a:gd name="adj" fmla="val 741"/>
             </a:avLst>
           </a:prstGeom>
           <a:solidFill>
@@ -1644,7 +1644,7 @@
           </a:solidFill>
           <a:ln w="12700">
             <a:solidFill>
-              <a:srgbClr val="222230"/>
+              <a:srgbClr val="20202E"/>
             </a:solidFill>
             <a:prstDash val="solid"/>
           </a:ln>
@@ -1658,8 +1658,8 @@
         </p:nvSpPr>
         <p:spPr>
           <a:xfrm>
-            <a:off x="777240" y="1463040"/>
-            <a:ext cx="5577840" cy="320040"/>
+            <a:off x="777240" y="1261872"/>
+            <a:ext cx="5577840" cy="274320"/>
           </a:xfrm>
           <a:prstGeom prst="rect">
             <a:avLst/>
@@ -1675,7 +1675,7 @@
               <a:buNone/>
             </a:pPr>
             <a:r>
-              <a:rPr lang="en-US" sz="1400" b="1" dirty="0">
+              <a:rPr lang="en-US" sz="1300" b="1" dirty="0">
                 <a:solidFill>
                   <a:srgbClr val="F3DF8A"/>
                 </a:solidFill>
@@ -1685,7 +1685,7 @@
               </a:rPr>
               <a:t>Over ₹1,750+ Crore Lost to SMS Fraud in India</a:t>
             </a:r>
-            <a:endParaRPr lang="en-US" sz="1400" dirty="0"/>
+            <a:endParaRPr lang="en-US" sz="1300" dirty="0"/>
           </a:p>
         </p:txBody>
       </p:sp>
@@ -1697,8 +1697,8 @@
         </p:nvSpPr>
         <p:spPr>
           <a:xfrm>
-            <a:off x="777240" y="1828800"/>
-            <a:ext cx="5577840" cy="594360"/>
+            <a:off x="777240" y="1572768"/>
+            <a:ext cx="5577840" cy="411480"/>
           </a:xfrm>
           <a:prstGeom prst="rect">
             <a:avLst/>
@@ -1712,12 +1712,12 @@
           <a:p>
             <a:pPr indent="0" marL="0">
               <a:lnSpc>
-                <a:spcPts val="1400"/>
+                <a:spcPts val="1200"/>
               </a:lnSpc>
               <a:buNone/>
             </a:pPr>
             <a:r>
-              <a:rPr lang="en-US" sz="1000" dirty="0">
+              <a:rPr lang="en-US" sz="850" dirty="0">
                 <a:solidFill>
                   <a:srgbClr val="94A3B8"/>
                 </a:solidFill>
@@ -1725,9 +1725,9 @@
                 <a:ea typeface="Arial" pitchFamily="34" charset="-122"/>
                 <a:cs typeface="Arial" pitchFamily="34" charset="-120"/>
               </a:rPr>
-              <a:t>80%+ of smishing attacks in India now write Hindi in English letters ("bijli disconnect", "khata block"), completely bypassing standard telecom and English NLP firewalls.</a:t>
-            </a:r>
-            <a:endParaRPr lang="en-US" sz="1000" dirty="0"/>
+              <a:t>80%+ of smishing attacks in India now write Hindi in English letters ("bijli disconnect", "khata block"), bypassing standard telecom and English NLP firewalls.</a:t>
+            </a:r>
+            <a:endParaRPr lang="en-US" sz="850" dirty="0"/>
           </a:p>
         </p:txBody>
       </p:sp>
@@ -1739,8 +1739,8 @@
         </p:nvSpPr>
         <p:spPr>
           <a:xfrm>
-            <a:off x="777240" y="2468880"/>
-            <a:ext cx="5577840" cy="228600"/>
+            <a:off x="777240" y="2057400"/>
+            <a:ext cx="5577840" cy="201168"/>
           </a:xfrm>
           <a:prstGeom prst="rect">
             <a:avLst/>
@@ -1756,7 +1756,7 @@
               <a:buNone/>
             </a:pPr>
             <a:r>
-              <a:rPr lang="en-US" sz="1050" b="1" dirty="0">
+              <a:rPr lang="en-US" sz="900" b="1" dirty="0">
                 <a:solidFill>
                   <a:srgbClr val="38BDF8"/>
                 </a:solidFill>
@@ -1764,9 +1764,9 @@
                 <a:ea typeface="Consolas" pitchFamily="34" charset="-122"/>
                 <a:cs typeface="Consolas" pitchFamily="34" charset="-120"/>
               </a:rPr>
-              <a:t>🛡️ The Kavach Solution:</a:t>
-            </a:r>
-            <a:endParaRPr lang="en-US" sz="1050" dirty="0"/>
+              <a:t>🛡️ The Kavach Solution: Dual-Engine Vernacular Defense</a:t>
+            </a:r>
+            <a:endParaRPr lang="en-US" sz="900" dirty="0"/>
           </a:p>
         </p:txBody>
       </p:sp>
@@ -1778,8 +1778,8 @@
         </p:nvSpPr>
         <p:spPr>
           <a:xfrm>
-            <a:off x="777240" y="2697480"/>
-            <a:ext cx="5577840" cy="502920"/>
+            <a:off x="777240" y="2286000"/>
+            <a:ext cx="5577840" cy="320040"/>
           </a:xfrm>
           <a:prstGeom prst="rect">
             <a:avLst/>
@@ -1793,12 +1793,12 @@
           <a:p>
             <a:pPr indent="0" marL="0">
               <a:lnSpc>
-                <a:spcPts val="1300"/>
+                <a:spcPts val="1100"/>
               </a:lnSpc>
               <a:buNone/>
             </a:pPr>
             <a:r>
-              <a:rPr lang="en-US" sz="950" dirty="0">
+              <a:rPr lang="en-US" sz="850" dirty="0">
                 <a:solidFill>
                   <a:srgbClr val="94A3B8"/>
                 </a:solidFill>
@@ -1806,9 +1806,9 @@
                 <a:ea typeface="Arial" pitchFamily="34" charset="-122"/>
                 <a:cs typeface="Arial" pitchFamily="34" charset="-120"/>
               </a:rPr>
-              <a:t>India’s first dual-engine defense shield fusing deterministic Levenshtein deobfuscation (&lt;15ms) with Google Gemini Flash AI (60%) for real-time vernacular fraud interception in &lt;45ms.</a:t>
-            </a:r>
-            <a:endParaRPr lang="en-US" sz="950" dirty="0"/>
+              <a:t>Fuses deterministic Levenshtein deobfuscation (&lt;15ms) with Google Gemini Flash AI (60%) for real-time fraud interception in &lt;45ms.</a:t>
+            </a:r>
+            <a:endParaRPr lang="en-US" sz="850" dirty="0"/>
           </a:p>
         </p:txBody>
       </p:sp>
@@ -1820,8 +1820,8 @@
         </p:nvSpPr>
         <p:spPr>
           <a:xfrm>
-            <a:off x="777240" y="3337560"/>
-            <a:ext cx="5577840" cy="228600"/>
+            <a:off x="777240" y="2697480"/>
+            <a:ext cx="5577840" cy="182880"/>
           </a:xfrm>
           <a:prstGeom prst="rect">
             <a:avLst/>
@@ -1837,7 +1837,7 @@
               <a:buNone/>
             </a:pPr>
             <a:r>
-              <a:rPr lang="en-US" sz="900" b="1" dirty="0">
+              <a:rPr lang="en-US" sz="800" b="1" dirty="0">
                 <a:solidFill>
                   <a:srgbClr val="D4AF37"/>
                 </a:solidFill>
@@ -1847,7 +1847,7 @@
               </a:rPr>
               <a:t>👥 TEAM NULL POINTERS</a:t>
             </a:r>
-            <a:endParaRPr lang="en-US" sz="900" dirty="0"/>
+            <a:endParaRPr lang="en-US" sz="800" dirty="0"/>
           </a:p>
         </p:txBody>
       </p:sp>
@@ -1859,12 +1859,12 @@
         </p:nvSpPr>
         <p:spPr>
           <a:xfrm>
-            <a:off x="777240" y="3657600"/>
-            <a:ext cx="2697480" cy="1143000"/>
+            <a:off x="777240" y="2971800"/>
+            <a:ext cx="2697480" cy="1298448"/>
           </a:xfrm>
           <a:prstGeom prst="rect">
             <a:avLst>
-              <a:gd name="adj" fmla="val 4000"/>
+              <a:gd name="adj" fmla="val 2817"/>
             </a:avLst>
           </a:prstGeom>
           <a:solidFill>
@@ -1872,7 +1872,7 @@
           </a:solidFill>
           <a:ln w="12700">
             <a:solidFill>
-              <a:srgbClr val="28283C"/>
+              <a:srgbClr val="242436"/>
             </a:solidFill>
             <a:prstDash val="solid"/>
           </a:ln>
@@ -1886,8 +1886,8 @@
         </p:nvSpPr>
         <p:spPr>
           <a:xfrm>
-            <a:off x="868680" y="3749040"/>
-            <a:ext cx="2514600" cy="320040"/>
+            <a:off x="886968" y="3081528"/>
+            <a:ext cx="2468880" cy="292608"/>
           </a:xfrm>
           <a:prstGeom prst="rect">
             <a:avLst/>
@@ -1903,7 +1903,7 @@
               <a:buNone/>
             </a:pPr>
             <a:r>
-              <a:rPr lang="en-US" sz="950" b="1" dirty="0">
+              <a:rPr lang="en-US" sz="900" b="1" dirty="0">
                 <a:solidFill>
                   <a:srgbClr val="F8FAFC"/>
                 </a:solidFill>
@@ -1913,7 +1913,7 @@
               </a:rPr>
               <a:t>Gummadi Bharath Kumar Wesly</a:t>
             </a:r>
-            <a:endParaRPr lang="en-US" sz="950" dirty="0"/>
+            <a:endParaRPr lang="en-US" sz="900" dirty="0"/>
           </a:p>
         </p:txBody>
       </p:sp>
@@ -1925,8 +1925,8 @@
         </p:nvSpPr>
         <p:spPr>
           <a:xfrm>
-            <a:off x="868680" y="4069080"/>
-            <a:ext cx="2514600" cy="320040"/>
+            <a:off x="886968" y="3410712"/>
+            <a:ext cx="2468880" cy="320040"/>
           </a:xfrm>
           <a:prstGeom prst="rect">
             <a:avLst/>
@@ -1964,8 +1964,8 @@
         </p:nvSpPr>
         <p:spPr>
           <a:xfrm>
-            <a:off x="868680" y="4389120"/>
-            <a:ext cx="2514600" cy="320040"/>
+            <a:off x="886968" y="3776472"/>
+            <a:ext cx="2468880" cy="384048"/>
           </a:xfrm>
           <a:prstGeom prst="rect">
             <a:avLst/>
@@ -2003,12 +2003,12 @@
         </p:nvSpPr>
         <p:spPr>
           <a:xfrm>
-            <a:off x="3611880" y="3657600"/>
-            <a:ext cx="2697480" cy="1143000"/>
+            <a:off x="3611880" y="2971800"/>
+            <a:ext cx="2697480" cy="1298448"/>
           </a:xfrm>
           <a:prstGeom prst="rect">
             <a:avLst>
-              <a:gd name="adj" fmla="val 4000"/>
+              <a:gd name="adj" fmla="val 2817"/>
             </a:avLst>
           </a:prstGeom>
           <a:solidFill>
@@ -2016,7 +2016,7 @@
           </a:solidFill>
           <a:ln w="12700">
             <a:solidFill>
-              <a:srgbClr val="28283C"/>
+              <a:srgbClr val="242436"/>
             </a:solidFill>
             <a:prstDash val="solid"/>
           </a:ln>
@@ -2030,8 +2030,8 @@
         </p:nvSpPr>
         <p:spPr>
           <a:xfrm>
-            <a:off x="3703320" y="3749040"/>
-            <a:ext cx="2514600" cy="320040"/>
+            <a:off x="3721608" y="3081528"/>
+            <a:ext cx="2468880" cy="292608"/>
           </a:xfrm>
           <a:prstGeom prst="rect">
             <a:avLst/>
@@ -2047,7 +2047,7 @@
               <a:buNone/>
             </a:pPr>
             <a:r>
-              <a:rPr lang="en-US" sz="950" b="1" dirty="0">
+              <a:rPr lang="en-US" sz="900" b="1" dirty="0">
                 <a:solidFill>
                   <a:srgbClr val="F8FAFC"/>
                 </a:solidFill>
@@ -2057,7 +2057,7 @@
               </a:rPr>
               <a:t>Swarnim Sulekh</a:t>
             </a:r>
-            <a:endParaRPr lang="en-US" sz="950" dirty="0"/>
+            <a:endParaRPr lang="en-US" sz="900" dirty="0"/>
           </a:p>
         </p:txBody>
       </p:sp>
@@ -2069,8 +2069,8 @@
         </p:nvSpPr>
         <p:spPr>
           <a:xfrm>
-            <a:off x="3703320" y="4069080"/>
-            <a:ext cx="2514600" cy="320040"/>
+            <a:off x="3721608" y="3410712"/>
+            <a:ext cx="2468880" cy="320040"/>
           </a:xfrm>
           <a:prstGeom prst="rect">
             <a:avLst/>
@@ -2108,8 +2108,8 @@
         </p:nvSpPr>
         <p:spPr>
           <a:xfrm>
-            <a:off x="3703320" y="4389120"/>
-            <a:ext cx="2514600" cy="320040"/>
+            <a:off x="3721608" y="3776472"/>
+            <a:ext cx="2468880" cy="384048"/>
           </a:xfrm>
           <a:prstGeom prst="rect">
             <a:avLst/>
@@ -2147,12 +2147,12 @@
         </p:nvSpPr>
         <p:spPr>
           <a:xfrm>
-            <a:off x="777240" y="4892040"/>
-            <a:ext cx="2697480" cy="1143000"/>
+            <a:off x="777240" y="4389120"/>
+            <a:ext cx="2697480" cy="1298448"/>
           </a:xfrm>
           <a:prstGeom prst="rect">
             <a:avLst>
-              <a:gd name="adj" fmla="val 4000"/>
+              <a:gd name="adj" fmla="val 2817"/>
             </a:avLst>
           </a:prstGeom>
           <a:solidFill>
@@ -2160,7 +2160,7 @@
           </a:solidFill>
           <a:ln w="12700">
             <a:solidFill>
-              <a:srgbClr val="28283C"/>
+              <a:srgbClr val="242436"/>
             </a:solidFill>
             <a:prstDash val="solid"/>
           </a:ln>
@@ -2174,8 +2174,8 @@
         </p:nvSpPr>
         <p:spPr>
           <a:xfrm>
-            <a:off x="868680" y="4983480"/>
-            <a:ext cx="2514600" cy="320040"/>
+            <a:off x="886968" y="4498848"/>
+            <a:ext cx="2468880" cy="292608"/>
           </a:xfrm>
           <a:prstGeom prst="rect">
             <a:avLst/>
@@ -2191,7 +2191,7 @@
               <a:buNone/>
             </a:pPr>
             <a:r>
-              <a:rPr lang="en-US" sz="950" b="1" dirty="0">
+              <a:rPr lang="en-US" sz="900" b="1" dirty="0">
                 <a:solidFill>
                   <a:srgbClr val="F8FAFC"/>
                 </a:solidFill>
@@ -2201,7 +2201,7 @@
               </a:rPr>
               <a:t>Krrish</a:t>
             </a:r>
-            <a:endParaRPr lang="en-US" sz="950" dirty="0"/>
+            <a:endParaRPr lang="en-US" sz="900" dirty="0"/>
           </a:p>
         </p:txBody>
       </p:sp>
@@ -2213,8 +2213,8 @@
         </p:nvSpPr>
         <p:spPr>
           <a:xfrm>
-            <a:off x="868680" y="5303520"/>
-            <a:ext cx="2514600" cy="320040"/>
+            <a:off x="886968" y="4828032"/>
+            <a:ext cx="2468880" cy="320040"/>
           </a:xfrm>
           <a:prstGeom prst="rect">
             <a:avLst/>
@@ -2252,8 +2252,8 @@
         </p:nvSpPr>
         <p:spPr>
           <a:xfrm>
-            <a:off x="868680" y="5623560"/>
-            <a:ext cx="2514600" cy="320040"/>
+            <a:off x="886968" y="5193792"/>
+            <a:ext cx="2468880" cy="384048"/>
           </a:xfrm>
           <a:prstGeom prst="rect">
             <a:avLst/>
@@ -2291,12 +2291,12 @@
         </p:nvSpPr>
         <p:spPr>
           <a:xfrm>
-            <a:off x="3611880" y="4892040"/>
-            <a:ext cx="2697480" cy="1143000"/>
+            <a:off x="3611880" y="4389120"/>
+            <a:ext cx="2697480" cy="1298448"/>
           </a:xfrm>
           <a:prstGeom prst="rect">
             <a:avLst>
-              <a:gd name="adj" fmla="val 4000"/>
+              <a:gd name="adj" fmla="val 2817"/>
             </a:avLst>
           </a:prstGeom>
           <a:solidFill>
@@ -2304,7 +2304,7 @@
           </a:solidFill>
           <a:ln w="12700">
             <a:solidFill>
-              <a:srgbClr val="28283C"/>
+              <a:srgbClr val="242436"/>
             </a:solidFill>
             <a:prstDash val="solid"/>
           </a:ln>
@@ -2318,8 +2318,8 @@
         </p:nvSpPr>
         <p:spPr>
           <a:xfrm>
-            <a:off x="3703320" y="4983480"/>
-            <a:ext cx="2514600" cy="320040"/>
+            <a:off x="3721608" y="4498848"/>
+            <a:ext cx="2468880" cy="292608"/>
           </a:xfrm>
           <a:prstGeom prst="rect">
             <a:avLst/>
@@ -2335,7 +2335,7 @@
               <a:buNone/>
             </a:pPr>
             <a:r>
-              <a:rPr lang="en-US" sz="950" b="1" dirty="0">
+              <a:rPr lang="en-US" sz="900" b="1" dirty="0">
                 <a:solidFill>
                   <a:srgbClr val="F8FAFC"/>
                 </a:solidFill>
@@ -2345,7 +2345,7 @@
               </a:rPr>
               <a:t>Jayaditya De</a:t>
             </a:r>
-            <a:endParaRPr lang="en-US" sz="950" dirty="0"/>
+            <a:endParaRPr lang="en-US" sz="900" dirty="0"/>
           </a:p>
         </p:txBody>
       </p:sp>
@@ -2357,8 +2357,8 @@
         </p:nvSpPr>
         <p:spPr>
           <a:xfrm>
-            <a:off x="3703320" y="5303520"/>
-            <a:ext cx="2514600" cy="320040"/>
+            <a:off x="3721608" y="4828032"/>
+            <a:ext cx="2468880" cy="320040"/>
           </a:xfrm>
           <a:prstGeom prst="rect">
             <a:avLst/>
@@ -2396,8 +2396,8 @@
         </p:nvSpPr>
         <p:spPr>
           <a:xfrm>
-            <a:off x="3703320" y="5623560"/>
-            <a:ext cx="2514600" cy="320040"/>
+            <a:off x="3721608" y="5193792"/>
+            <a:ext cx="2468880" cy="384048"/>
           </a:xfrm>
           <a:prstGeom prst="rect">
             <a:avLst/>
@@ -2435,12 +2435,12 @@
         </p:nvSpPr>
         <p:spPr>
           <a:xfrm>
-            <a:off x="6766560" y="1280160"/>
-            <a:ext cx="4873752" cy="5120640"/>
+            <a:off x="6766560" y="1115568"/>
+            <a:ext cx="4873752" cy="4937760"/>
           </a:xfrm>
           <a:prstGeom prst="rect">
             <a:avLst>
-              <a:gd name="adj" fmla="val 938"/>
+              <a:gd name="adj" fmla="val 750"/>
             </a:avLst>
           </a:prstGeom>
           <a:solidFill>
@@ -2448,7 +2448,7 @@
           </a:solidFill>
           <a:ln w="12700">
             <a:solidFill>
-              <a:srgbClr val="222230"/>
+              <a:srgbClr val="20202E"/>
             </a:solidFill>
             <a:prstDash val="solid"/>
           </a:ln>
@@ -2469,8 +2469,8 @@
         </p:blipFill>
         <p:spPr>
           <a:xfrm>
-            <a:off x="6903720" y="1417320"/>
-            <a:ext cx="4599432" cy="2560320"/>
+            <a:off x="6903720" y="1261872"/>
+            <a:ext cx="4599432" cy="2377440"/>
           </a:xfrm>
           <a:prstGeom prst="rect">
             <a:avLst/>
@@ -2485,8 +2485,8 @@
         </p:nvSpPr>
         <p:spPr>
           <a:xfrm>
-            <a:off x="6949440" y="4114800"/>
-            <a:ext cx="4480560" cy="274320"/>
+            <a:off x="6903720" y="3794760"/>
+            <a:ext cx="4480560" cy="228600"/>
           </a:xfrm>
           <a:prstGeom prst="rect">
             <a:avLst/>
@@ -2502,7 +2502,7 @@
               <a:buNone/>
             </a:pPr>
             <a:r>
-              <a:rPr lang="en-US" sz="1100" b="1" dirty="0">
+              <a:rPr lang="en-US" sz="1000" b="1" dirty="0">
                 <a:solidFill>
                   <a:srgbClr val="F3DF8A"/>
                 </a:solidFill>
@@ -2512,7 +2512,7 @@
               </a:rPr>
               <a:t>✦ Live Production Telemetry:</a:t>
             </a:r>
-            <a:endParaRPr lang="en-US" sz="1100" dirty="0"/>
+            <a:endParaRPr lang="en-US" sz="1000" dirty="0"/>
           </a:p>
         </p:txBody>
       </p:sp>
@@ -2524,7 +2524,7 @@
         </p:nvSpPr>
         <p:spPr>
           <a:xfrm>
-            <a:off x="6949440" y="4434840"/>
+            <a:off x="6903720" y="4069080"/>
             <a:ext cx="4480560" cy="1737360"/>
           </a:xfrm>
           <a:prstGeom prst="rect">
@@ -2539,12 +2539,12 @@
           <a:p>
             <a:pPr indent="0" marL="0">
               <a:lnSpc>
-                <a:spcPts val="1400"/>
+                <a:spcPts val="1300"/>
               </a:lnSpc>
               <a:buNone/>
             </a:pPr>
             <a:r>
-              <a:rPr lang="en-US" sz="900" dirty="0">
+              <a:rPr lang="en-US" sz="850" dirty="0">
                 <a:solidFill>
                   <a:srgbClr val="94A3B8"/>
                 </a:solidFill>
@@ -2552,19 +2552,19 @@
                 <a:ea typeface="Arial" pitchFamily="34" charset="-122"/>
                 <a:cs typeface="Arial" pitchFamily="34" charset="-120"/>
               </a:rPr>
-              <a:t>• 202+ Indian threat keywords &amp; regional expressions seeded.</a:t>
-            </a:r>
-            <a:endParaRPr lang="en-US" sz="900" dirty="0"/>
+              <a:t>• 202+ Indian threat keywords &amp; regional expressions seeded in Turso Cloud.</a:t>
+            </a:r>
+            <a:endParaRPr lang="en-US" sz="850" dirty="0"/>
           </a:p>
           <a:p>
             <a:pPr indent="0" marL="0">
               <a:lnSpc>
-                <a:spcPts val="1400"/>
+                <a:spcPts val="1300"/>
               </a:lnSpc>
               <a:buNone/>
             </a:pPr>
             <a:r>
-              <a:rPr lang="en-US" sz="900" dirty="0">
+              <a:rPr lang="en-US" sz="850" dirty="0">
                 <a:solidFill>
                   <a:srgbClr val="94A3B8"/>
                 </a:solidFill>
@@ -2574,17 +2574,17 @@
               </a:rPr>
               <a:t>• 99.4% threat detection accuracy across 12 fraud vectors.</a:t>
             </a:r>
-            <a:endParaRPr lang="en-US" sz="900" dirty="0"/>
+            <a:endParaRPr lang="en-US" sz="850" dirty="0"/>
           </a:p>
           <a:p>
             <a:pPr indent="0" marL="0">
               <a:lnSpc>
-                <a:spcPts val="1400"/>
+                <a:spcPts val="1300"/>
               </a:lnSpc>
               <a:buNone/>
             </a:pPr>
             <a:r>
-              <a:rPr lang="en-US" sz="900" dirty="0">
+              <a:rPr lang="en-US" sz="850" dirty="0">
                 <a:solidFill>
                   <a:srgbClr val="94A3B8"/>
                 </a:solidFill>
@@ -2594,17 +2594,17 @@
               </a:rPr>
               <a:t>• Mean classification latency under 45ms with 0-downtime AI cascade.</a:t>
             </a:r>
-            <a:endParaRPr lang="en-US" sz="900" dirty="0"/>
+            <a:endParaRPr lang="en-US" sz="850" dirty="0"/>
           </a:p>
           <a:p>
             <a:pPr indent="0" marL="0">
               <a:lnSpc>
-                <a:spcPts val="1400"/>
+                <a:spcPts val="1300"/>
               </a:lnSpc>
               <a:buNone/>
             </a:pPr>
             <a:r>
-              <a:rPr lang="en-US" sz="900" dirty="0">
+              <a:rPr lang="en-US" sz="850" dirty="0">
                 <a:solidFill>
                   <a:srgbClr val="94A3B8"/>
                 </a:solidFill>
@@ -2612,9 +2612,9 @@
                 <a:ea typeface="Arial" pitchFamily="34" charset="-122"/>
                 <a:cs typeface="Arial" pitchFamily="34" charset="-120"/>
               </a:rPr>
-              <a:t>• Live on Vercel: https://kavach-ai-ten.vercel.app/</a:t>
-            </a:r>
-            <a:endParaRPr lang="en-US" sz="900" dirty="0"/>
+              <a:t>• Production URL: https://kavach-ai-ten.vercel.app/</a:t>
+            </a:r>
+            <a:endParaRPr lang="en-US" sz="850" dirty="0"/>
           </a:p>
         </p:txBody>
       </p:sp>
@@ -2666,8 +2666,8 @@
         </p:blipFill>
         <p:spPr>
           <a:xfrm>
-            <a:off x="548640" y="320040"/>
-            <a:ext cx="594360" cy="594360"/>
+            <a:off x="548640" y="256032"/>
+            <a:ext cx="475488" cy="475488"/>
           </a:xfrm>
           <a:prstGeom prst="rect">
             <a:avLst/>
@@ -2682,8 +2682,8 @@
         </p:nvSpPr>
         <p:spPr>
           <a:xfrm>
-            <a:off x="1280160" y="320040"/>
-            <a:ext cx="9601200" cy="228600"/>
+            <a:off x="1143000" y="256032"/>
+            <a:ext cx="10424160" cy="182880"/>
           </a:xfrm>
           <a:prstGeom prst="rect">
             <a:avLst/>
@@ -2699,7 +2699,7 @@
               <a:buNone/>
             </a:pPr>
             <a:r>
-              <a:rPr lang="en-US" sz="900" b="1" dirty="0">
+              <a:rPr lang="en-US" sz="850" b="1" dirty="0">
                 <a:solidFill>
                   <a:srgbClr val="D4AF37"/>
                 </a:solidFill>
@@ -2709,7 +2709,7 @@
               </a:rPr>
               <a:t>🚨 ATTACK VECTOR ANALYSIS • PROBLEM STATEMENT</a:t>
             </a:r>
-            <a:endParaRPr lang="en-US" sz="900" dirty="0"/>
+            <a:endParaRPr lang="en-US" sz="850" dirty="0"/>
           </a:p>
         </p:txBody>
       </p:sp>
@@ -2721,8 +2721,8 @@
         </p:nvSpPr>
         <p:spPr>
           <a:xfrm>
-            <a:off x="1280160" y="594360"/>
-            <a:ext cx="10241280" cy="411480"/>
+            <a:off x="1143000" y="475488"/>
+            <a:ext cx="10424160" cy="365760"/>
           </a:xfrm>
           <a:prstGeom prst="rect">
             <a:avLst/>
@@ -2738,7 +2738,7 @@
               <a:buNone/>
             </a:pPr>
             <a:r>
-              <a:rPr lang="en-US" sz="1800" b="1" dirty="0">
+              <a:rPr lang="en-US" sz="1600" b="1" dirty="0">
                 <a:solidFill>
                   <a:srgbClr val="F8FAFC"/>
                 </a:solidFill>
@@ -2748,7 +2748,7 @@
               </a:rPr>
               <a:t>The Transliterated Vernacular Smishing Epidemic</a:t>
             </a:r>
-            <a:endParaRPr lang="en-US" sz="1800" dirty="0"/>
+            <a:endParaRPr lang="en-US" sz="1600" dirty="0"/>
           </a:p>
         </p:txBody>
       </p:sp>
@@ -2760,7 +2760,7 @@
         </p:nvSpPr>
         <p:spPr>
           <a:xfrm>
-            <a:off x="548640" y="1097280"/>
+            <a:off x="548640" y="960120"/>
             <a:ext cx="11091672" cy="0"/>
           </a:xfrm>
           <a:prstGeom prst="line">
@@ -2769,7 +2769,7 @@
           <a:noFill/>
           <a:ln w="12700">
             <a:solidFill>
-              <a:srgbClr val="20202C"/>
+              <a:srgbClr val="1C1C28"/>
             </a:solidFill>
             <a:prstDash val="solid"/>
           </a:ln>
@@ -2783,12 +2783,12 @@
         </p:nvSpPr>
         <p:spPr>
           <a:xfrm>
-            <a:off x="548640" y="1280160"/>
+            <a:off x="548640" y="1115568"/>
             <a:ext cx="4937760" cy="1508760"/>
           </a:xfrm>
           <a:prstGeom prst="rect">
             <a:avLst>
-              <a:gd name="adj" fmla="val 3030"/>
+              <a:gd name="adj" fmla="val 2424"/>
             </a:avLst>
           </a:prstGeom>
           <a:solidFill>
@@ -2796,7 +2796,7 @@
           </a:solidFill>
           <a:ln w="12700">
             <a:solidFill>
-              <a:srgbClr val="222230"/>
+              <a:srgbClr val="20202E"/>
             </a:solidFill>
             <a:prstDash val="solid"/>
           </a:ln>
@@ -2810,8 +2810,8 @@
         </p:nvSpPr>
         <p:spPr>
           <a:xfrm>
-            <a:off x="777240" y="1417320"/>
-            <a:ext cx="4480560" cy="457200"/>
+            <a:off x="777240" y="1252728"/>
+            <a:ext cx="4480560" cy="411480"/>
           </a:xfrm>
           <a:prstGeom prst="rect">
             <a:avLst/>
@@ -2827,7 +2827,7 @@
               <a:buNone/>
             </a:pPr>
             <a:r>
-              <a:rPr lang="en-US" sz="2200" b="1" dirty="0">
+              <a:rPr lang="en-US" sz="2000" b="1" dirty="0">
                 <a:solidFill>
                   <a:srgbClr val="F43F5E"/>
                 </a:solidFill>
@@ -2837,7 +2837,7 @@
               </a:rPr>
               <a:t>₹1,750+ Crore</a:t>
             </a:r>
-            <a:endParaRPr lang="en-US" sz="2200" dirty="0"/>
+            <a:endParaRPr lang="en-US" sz="2000" dirty="0"/>
           </a:p>
         </p:txBody>
       </p:sp>
@@ -2849,8 +2849,8 @@
         </p:nvSpPr>
         <p:spPr>
           <a:xfrm>
-            <a:off x="777240" y="1965960"/>
-            <a:ext cx="4480560" cy="685800"/>
+            <a:off x="777240" y="1709928"/>
+            <a:ext cx="4480560" cy="777240"/>
           </a:xfrm>
           <a:prstGeom prst="rect">
             <a:avLst/>
@@ -2864,12 +2864,12 @@
           <a:p>
             <a:pPr indent="0" marL="0">
               <a:lnSpc>
-                <a:spcPts val="1300"/>
+                <a:spcPts val="1200"/>
               </a:lnSpc>
               <a:buNone/>
             </a:pPr>
             <a:r>
-              <a:rPr lang="en-US" sz="950" dirty="0">
+              <a:rPr lang="en-US" sz="900" dirty="0">
                 <a:solidFill>
                   <a:srgbClr val="94A3B8"/>
                 </a:solidFill>
@@ -2879,7 +2879,7 @@
               </a:rPr>
               <a:t>Lost by Indian citizens to cyber financial fraud in 2024 (I4C Data)</a:t>
             </a:r>
-            <a:endParaRPr lang="en-US" sz="950" dirty="0"/>
+            <a:endParaRPr lang="en-US" sz="900" dirty="0"/>
           </a:p>
         </p:txBody>
       </p:sp>
@@ -2891,12 +2891,12 @@
         </p:nvSpPr>
         <p:spPr>
           <a:xfrm>
-            <a:off x="548640" y="2926080"/>
+            <a:off x="548640" y="2761488"/>
             <a:ext cx="4937760" cy="1508760"/>
           </a:xfrm>
           <a:prstGeom prst="rect">
             <a:avLst>
-              <a:gd name="adj" fmla="val 3030"/>
+              <a:gd name="adj" fmla="val 2424"/>
             </a:avLst>
           </a:prstGeom>
           <a:solidFill>
@@ -2904,7 +2904,7 @@
           </a:solidFill>
           <a:ln w="12700">
             <a:solidFill>
-              <a:srgbClr val="222230"/>
+              <a:srgbClr val="20202E"/>
             </a:solidFill>
             <a:prstDash val="solid"/>
           </a:ln>
@@ -2918,8 +2918,8 @@
         </p:nvSpPr>
         <p:spPr>
           <a:xfrm>
-            <a:off x="777240" y="3063240"/>
-            <a:ext cx="4480560" cy="457200"/>
+            <a:off x="777240" y="2898648"/>
+            <a:ext cx="4480560" cy="411480"/>
           </a:xfrm>
           <a:prstGeom prst="rect">
             <a:avLst/>
@@ -2935,7 +2935,7 @@
               <a:buNone/>
             </a:pPr>
             <a:r>
-              <a:rPr lang="en-US" sz="2200" b="1" dirty="0">
+              <a:rPr lang="en-US" sz="2000" b="1" dirty="0">
                 <a:solidFill>
                   <a:srgbClr val="F59E0B"/>
                 </a:solidFill>
@@ -2945,7 +2945,7 @@
               </a:rPr>
               <a:t>80%+</a:t>
             </a:r>
-            <a:endParaRPr lang="en-US" sz="2200" dirty="0"/>
+            <a:endParaRPr lang="en-US" sz="2000" dirty="0"/>
           </a:p>
         </p:txBody>
       </p:sp>
@@ -2957,8 +2957,8 @@
         </p:nvSpPr>
         <p:spPr>
           <a:xfrm>
-            <a:off x="777240" y="3611880"/>
-            <a:ext cx="4480560" cy="685800"/>
+            <a:off x="777240" y="3355848"/>
+            <a:ext cx="4480560" cy="777240"/>
           </a:xfrm>
           <a:prstGeom prst="rect">
             <a:avLst/>
@@ -2972,12 +2972,12 @@
           <a:p>
             <a:pPr indent="0" marL="0">
               <a:lnSpc>
-                <a:spcPts val="1300"/>
+                <a:spcPts val="1200"/>
               </a:lnSpc>
               <a:buNone/>
             </a:pPr>
             <a:r>
-              <a:rPr lang="en-US" sz="950" dirty="0">
+              <a:rPr lang="en-US" sz="900" dirty="0">
                 <a:solidFill>
                   <a:srgbClr val="94A3B8"/>
                 </a:solidFill>
@@ -2987,7 +2987,7 @@
               </a:rPr>
               <a:t>Smishing messages now use transliterated Hindi with leetspeak mutations</a:t>
             </a:r>
-            <a:endParaRPr lang="en-US" sz="950" dirty="0"/>
+            <a:endParaRPr lang="en-US" sz="900" dirty="0"/>
           </a:p>
         </p:txBody>
       </p:sp>
@@ -2999,12 +2999,12 @@
         </p:nvSpPr>
         <p:spPr>
           <a:xfrm>
-            <a:off x="548640" y="4572000"/>
+            <a:off x="548640" y="4407408"/>
             <a:ext cx="4937760" cy="1508760"/>
           </a:xfrm>
           <a:prstGeom prst="rect">
             <a:avLst>
-              <a:gd name="adj" fmla="val 3030"/>
+              <a:gd name="adj" fmla="val 2424"/>
             </a:avLst>
           </a:prstGeom>
           <a:solidFill>
@@ -3012,7 +3012,7 @@
           </a:solidFill>
           <a:ln w="12700">
             <a:solidFill>
-              <a:srgbClr val="222230"/>
+              <a:srgbClr val="20202E"/>
             </a:solidFill>
             <a:prstDash val="solid"/>
           </a:ln>
@@ -3026,8 +3026,8 @@
         </p:nvSpPr>
         <p:spPr>
           <a:xfrm>
-            <a:off x="777240" y="4709160"/>
-            <a:ext cx="4480560" cy="457200"/>
+            <a:off x="777240" y="4544568"/>
+            <a:ext cx="4480560" cy="411480"/>
           </a:xfrm>
           <a:prstGeom prst="rect">
             <a:avLst/>
@@ -3043,7 +3043,7 @@
               <a:buNone/>
             </a:pPr>
             <a:r>
-              <a:rPr lang="en-US" sz="2200" b="1" dirty="0">
+              <a:rPr lang="en-US" sz="2000" b="1" dirty="0">
                 <a:solidFill>
                   <a:srgbClr val="38BDF8"/>
                 </a:solidFill>
@@ -3053,7 +3053,7 @@
               </a:rPr>
               <a:t>0% Coverage</a:t>
             </a:r>
-            <a:endParaRPr lang="en-US" sz="2200" dirty="0"/>
+            <a:endParaRPr lang="en-US" sz="2000" dirty="0"/>
           </a:p>
         </p:txBody>
       </p:sp>
@@ -3065,8 +3065,8 @@
         </p:nvSpPr>
         <p:spPr>
           <a:xfrm>
-            <a:off x="777240" y="5257800"/>
-            <a:ext cx="4480560" cy="685800"/>
+            <a:off x="777240" y="5001768"/>
+            <a:ext cx="4480560" cy="777240"/>
           </a:xfrm>
           <a:prstGeom prst="rect">
             <a:avLst/>
@@ -3080,12 +3080,12 @@
           <a:p>
             <a:pPr indent="0" marL="0">
               <a:lnSpc>
-                <a:spcPts val="1300"/>
+                <a:spcPts val="1200"/>
               </a:lnSpc>
               <a:buNone/>
             </a:pPr>
             <a:r>
-              <a:rPr lang="en-US" sz="950" dirty="0">
+              <a:rPr lang="en-US" sz="900" dirty="0">
                 <a:solidFill>
                   <a:srgbClr val="94A3B8"/>
                 </a:solidFill>
@@ -3095,7 +3095,7 @@
               </a:rPr>
               <a:t>By traditional English spam filters (blind to Latin-script Indian languages)</a:t>
             </a:r>
-            <a:endParaRPr lang="en-US" sz="950" dirty="0"/>
+            <a:endParaRPr lang="en-US" sz="900" dirty="0"/>
           </a:p>
         </p:txBody>
       </p:sp>
@@ -3107,12 +3107,12 @@
         </p:nvSpPr>
         <p:spPr>
           <a:xfrm>
-            <a:off x="5669280" y="1280160"/>
-            <a:ext cx="5971032" cy="5120640"/>
+            <a:off x="5669280" y="1115568"/>
+            <a:ext cx="5971032" cy="4937760"/>
           </a:xfrm>
           <a:prstGeom prst="rect">
             <a:avLst>
-              <a:gd name="adj" fmla="val 893"/>
+              <a:gd name="adj" fmla="val 741"/>
             </a:avLst>
           </a:prstGeom>
           <a:solidFill>
@@ -3120,7 +3120,7 @@
           </a:solidFill>
           <a:ln w="12700">
             <a:solidFill>
-              <a:srgbClr val="222230"/>
+              <a:srgbClr val="20202E"/>
             </a:solidFill>
             <a:prstDash val="solid"/>
           </a:ln>
@@ -3134,8 +3134,8 @@
         </p:nvSpPr>
         <p:spPr>
           <a:xfrm>
-            <a:off x="5897880" y="1463040"/>
-            <a:ext cx="5486400" cy="320040"/>
+            <a:off x="5897880" y="1280160"/>
+            <a:ext cx="5486400" cy="274320"/>
           </a:xfrm>
           <a:prstGeom prst="rect">
             <a:avLst/>
@@ -3151,7 +3151,7 @@
               <a:buNone/>
             </a:pPr>
             <a:r>
-              <a:rPr lang="en-US" sz="1300" b="1" dirty="0">
+              <a:rPr lang="en-US" sz="1200" b="1" dirty="0">
                 <a:solidFill>
                   <a:srgbClr val="F3DF8A"/>
                 </a:solidFill>
@@ -3161,7 +3161,7 @@
               </a:rPr>
               <a:t>📱 Realistic Vernacular Attack Scenarios:</a:t>
             </a:r>
-            <a:endParaRPr lang="en-US" sz="1300" dirty="0"/>
+            <a:endParaRPr lang="en-US" sz="1200" dirty="0"/>
           </a:p>
         </p:txBody>
       </p:sp>
@@ -3173,8 +3173,8 @@
         </p:nvSpPr>
         <p:spPr>
           <a:xfrm>
-            <a:off x="5897880" y="1874520"/>
-            <a:ext cx="5486400" cy="228600"/>
+            <a:off x="5897880" y="1645920"/>
+            <a:ext cx="5486400" cy="201168"/>
           </a:xfrm>
           <a:prstGeom prst="rect">
             <a:avLst/>
@@ -3190,7 +3190,7 @@
               <a:buNone/>
             </a:pPr>
             <a:r>
-              <a:rPr lang="en-US" sz="950" b="1" dirty="0">
+              <a:rPr lang="en-US" sz="900" b="1" dirty="0">
                 <a:solidFill>
                   <a:srgbClr val="38BDF8"/>
                 </a:solidFill>
@@ -3200,7 +3200,7 @@
               </a:rPr>
               <a:t>1. YouTube Task / Part-Time Job Fraud</a:t>
             </a:r>
-            <a:endParaRPr lang="en-US" sz="950" dirty="0"/>
+            <a:endParaRPr lang="en-US" sz="900" dirty="0"/>
           </a:p>
         </p:txBody>
       </p:sp>
@@ -3212,7 +3212,7 @@
         </p:nvSpPr>
         <p:spPr>
           <a:xfrm>
-            <a:off x="5897880" y="2103120"/>
+            <a:off x="5897880" y="1865376"/>
             <a:ext cx="5486400" cy="411480"/>
           </a:xfrm>
           <a:prstGeom prst="rect">
@@ -3229,7 +3229,7 @@
               <a:buNone/>
             </a:pPr>
             <a:r>
-              <a:rPr lang="en-US" sz="850" i="1" dirty="0">
+              <a:rPr lang="en-US" sz="800" i="1" dirty="0">
                 <a:solidFill>
                   <a:srgbClr val="F8FAFC"/>
                 </a:solidFill>
@@ -3239,7 +3239,7 @@
               </a:rPr>
               <a:t>"Hello sir, kya aap ghar baithe daily Rs 3000-5000 kamana chahte hain? YouTube videos like karo aur screenshot bhejo WhatsApp par: wa.me/91..."</a:t>
             </a:r>
-            <a:endParaRPr lang="en-US" sz="850" dirty="0"/>
+            <a:endParaRPr lang="en-US" sz="800" dirty="0"/>
           </a:p>
         </p:txBody>
       </p:sp>
@@ -3251,8 +3251,8 @@
         </p:nvSpPr>
         <p:spPr>
           <a:xfrm>
-            <a:off x="5897880" y="2532888"/>
-            <a:ext cx="5486400" cy="411480"/>
+            <a:off x="5897880" y="2304288"/>
+            <a:ext cx="5486400" cy="384048"/>
           </a:xfrm>
           <a:prstGeom prst="rect">
             <a:avLst/>
@@ -3268,7 +3268,7 @@
               <a:buNone/>
             </a:pPr>
             <a:r>
-              <a:rPr lang="en-US" sz="800" dirty="0">
+              <a:rPr lang="en-US" sz="750" dirty="0">
                 <a:solidFill>
                   <a:srgbClr val="64748B"/>
                 </a:solidFill>
@@ -3278,7 +3278,7 @@
               </a:rPr>
               <a:t>Impact: Exploits work-from-home allure. Bypasses filters because "ghar baithe" is not flagged as English spam.</a:t>
             </a:r>
-            <a:endParaRPr lang="en-US" sz="800" dirty="0"/>
+            <a:endParaRPr lang="en-US" sz="750" dirty="0"/>
           </a:p>
         </p:txBody>
       </p:sp>
@@ -3290,8 +3290,8 @@
         </p:nvSpPr>
         <p:spPr>
           <a:xfrm>
-            <a:off x="5897880" y="3291840"/>
-            <a:ext cx="5486400" cy="228600"/>
+            <a:off x="5897880" y="3063240"/>
+            <a:ext cx="5486400" cy="201168"/>
           </a:xfrm>
           <a:prstGeom prst="rect">
             <a:avLst/>
@@ -3307,7 +3307,7 @@
               <a:buNone/>
             </a:pPr>
             <a:r>
-              <a:rPr lang="en-US" sz="950" b="1" dirty="0">
+              <a:rPr lang="en-US" sz="900" b="1" dirty="0">
                 <a:solidFill>
                   <a:srgbClr val="38BDF8"/>
                 </a:solidFill>
@@ -3317,7 +3317,7 @@
               </a:rPr>
               <a:t>2. Electricity Disconnection Urgent Cut</a:t>
             </a:r>
-            <a:endParaRPr lang="en-US" sz="950" dirty="0"/>
+            <a:endParaRPr lang="en-US" sz="900" dirty="0"/>
           </a:p>
         </p:txBody>
       </p:sp>
@@ -3329,7 +3329,7 @@
         </p:nvSpPr>
         <p:spPr>
           <a:xfrm>
-            <a:off x="5897880" y="3520440"/>
+            <a:off x="5897880" y="3282696"/>
             <a:ext cx="5486400" cy="411480"/>
           </a:xfrm>
           <a:prstGeom prst="rect">
@@ -3346,7 +3346,7 @@
               <a:buNone/>
             </a:pPr>
             <a:r>
-              <a:rPr lang="en-US" sz="850" i="1" dirty="0">
+              <a:rPr lang="en-US" sz="800" i="1" dirty="0">
                 <a:solidFill>
                   <a:srgbClr val="F8FAFC"/>
                 </a:solidFill>
@@ -3356,7 +3356,7 @@
               </a:rPr>
               <a:t>"Aapka bijli connection aaj raat 9 baje bandh ho jayega. Turant is number pe call karein aur 0TPP batayein."</a:t>
             </a:r>
-            <a:endParaRPr lang="en-US" sz="850" dirty="0"/>
+            <a:endParaRPr lang="en-US" sz="800" dirty="0"/>
           </a:p>
         </p:txBody>
       </p:sp>
@@ -3368,8 +3368,8 @@
         </p:nvSpPr>
         <p:spPr>
           <a:xfrm>
-            <a:off x="5897880" y="3950208"/>
-            <a:ext cx="5486400" cy="411480"/>
+            <a:off x="5897880" y="3721608"/>
+            <a:ext cx="5486400" cy="384048"/>
           </a:xfrm>
           <a:prstGeom prst="rect">
             <a:avLst/>
@@ -3385,7 +3385,7 @@
               <a:buNone/>
             </a:pPr>
             <a:r>
-              <a:rPr lang="en-US" sz="800" dirty="0">
+              <a:rPr lang="en-US" sz="750" dirty="0">
                 <a:solidFill>
                   <a:srgbClr val="64748B"/>
                 </a:solidFill>
@@ -3395,7 +3395,7 @@
               </a:rPr>
               <a:t>Impact: Uses extreme cognitive fear and replaces "OTP" with leetspeak "0TPP".</a:t>
             </a:r>
-            <a:endParaRPr lang="en-US" sz="800" dirty="0"/>
+            <a:endParaRPr lang="en-US" sz="750" dirty="0"/>
           </a:p>
         </p:txBody>
       </p:sp>
@@ -3407,8 +3407,8 @@
         </p:nvSpPr>
         <p:spPr>
           <a:xfrm>
-            <a:off x="5897880" y="4709160"/>
-            <a:ext cx="5486400" cy="228600"/>
+            <a:off x="5897880" y="4480560"/>
+            <a:ext cx="5486400" cy="201168"/>
           </a:xfrm>
           <a:prstGeom prst="rect">
             <a:avLst/>
@@ -3424,7 +3424,7 @@
               <a:buNone/>
             </a:pPr>
             <a:r>
-              <a:rPr lang="en-US" sz="950" b="1" dirty="0">
+              <a:rPr lang="en-US" sz="900" b="1" dirty="0">
                 <a:solidFill>
                   <a:srgbClr val="38BDF8"/>
                 </a:solidFill>
@@ -3434,7 +3434,7 @@
               </a:rPr>
               <a:t>3. Obfuscated SBI KYC Expiry</a:t>
             </a:r>
-            <a:endParaRPr lang="en-US" sz="950" dirty="0"/>
+            <a:endParaRPr lang="en-US" sz="900" dirty="0"/>
           </a:p>
         </p:txBody>
       </p:sp>
@@ -3446,7 +3446,7 @@
         </p:nvSpPr>
         <p:spPr>
           <a:xfrm>
-            <a:off x="5897880" y="4937760"/>
+            <a:off x="5897880" y="4700016"/>
             <a:ext cx="5486400" cy="411480"/>
           </a:xfrm>
           <a:prstGeom prst="rect">
@@ -3463,7 +3463,7 @@
               <a:buNone/>
             </a:pPr>
             <a:r>
-              <a:rPr lang="en-US" sz="850" i="1" dirty="0">
+              <a:rPr lang="en-US" sz="800" i="1" dirty="0">
                 <a:solidFill>
                   <a:srgbClr val="F8FAFC"/>
                 </a:solidFill>
@@ -3473,7 +3473,7 @@
               </a:rPr>
               <a:t>"Y0UR SB1 ACC0UNT WILL BLCK T0DAY. UPDATE K-Y-C IMMED1ATE: http://bit.ly/sbi-kyc"</a:t>
             </a:r>
-            <a:endParaRPr lang="en-US" sz="850" dirty="0"/>
+            <a:endParaRPr lang="en-US" sz="800" dirty="0"/>
           </a:p>
         </p:txBody>
       </p:sp>
@@ -3485,8 +3485,8 @@
         </p:nvSpPr>
         <p:spPr>
           <a:xfrm>
-            <a:off x="5897880" y="5367528"/>
-            <a:ext cx="5486400" cy="411480"/>
+            <a:off x="5897880" y="5138928"/>
+            <a:ext cx="5486400" cy="384048"/>
           </a:xfrm>
           <a:prstGeom prst="rect">
             <a:avLst/>
@@ -3502,7 +3502,7 @@
               <a:buNone/>
             </a:pPr>
             <a:r>
-              <a:rPr lang="en-US" sz="800" dirty="0">
+              <a:rPr lang="en-US" sz="750" dirty="0">
                 <a:solidFill>
                   <a:srgbClr val="64748B"/>
                 </a:solidFill>
@@ -3512,7 +3512,7 @@
               </a:rPr>
               <a:t>Impact: Spaced letters ("K-Y-C") and leetspeak ("BLCK", "SB1") defeat standard dictionary tokenizers.</a:t>
             </a:r>
-            <a:endParaRPr lang="en-US" sz="800" dirty="0"/>
+            <a:endParaRPr lang="en-US" sz="750" dirty="0"/>
           </a:p>
         </p:txBody>
       </p:sp>
@@ -3564,8 +3564,8 @@
         </p:blipFill>
         <p:spPr>
           <a:xfrm>
-            <a:off x="548640" y="320040"/>
-            <a:ext cx="594360" cy="594360"/>
+            <a:off x="548640" y="256032"/>
+            <a:ext cx="475488" cy="475488"/>
           </a:xfrm>
           <a:prstGeom prst="rect">
             <a:avLst/>
@@ -3580,8 +3580,8 @@
         </p:nvSpPr>
         <p:spPr>
           <a:xfrm>
-            <a:off x="1280160" y="320040"/>
-            <a:ext cx="9601200" cy="228600"/>
+            <a:off x="1143000" y="256032"/>
+            <a:ext cx="10424160" cy="182880"/>
           </a:xfrm>
           <a:prstGeom prst="rect">
             <a:avLst/>
@@ -3597,7 +3597,7 @@
               <a:buNone/>
             </a:pPr>
             <a:r>
-              <a:rPr lang="en-US" sz="900" b="1" dirty="0">
+              <a:rPr lang="en-US" sz="850" b="1" dirty="0">
                 <a:solidFill>
                   <a:srgbClr val="D4AF37"/>
                 </a:solidFill>
@@ -3607,7 +3607,7 @@
               </a:rPr>
               <a:t>⚔️ BENCHMARK COMPARISON • THE "AHA!" MOMENT</a:t>
             </a:r>
-            <a:endParaRPr lang="en-US" sz="900" dirty="0"/>
+            <a:endParaRPr lang="en-US" sz="850" dirty="0"/>
           </a:p>
         </p:txBody>
       </p:sp>
@@ -3619,8 +3619,8 @@
         </p:nvSpPr>
         <p:spPr>
           <a:xfrm>
-            <a:off x="1280160" y="594360"/>
-            <a:ext cx="10241280" cy="411480"/>
+            <a:off x="1143000" y="475488"/>
+            <a:ext cx="10424160" cy="365760"/>
           </a:xfrm>
           <a:prstGeom prst="rect">
             <a:avLst/>
@@ -3636,7 +3636,7 @@
               <a:buNone/>
             </a:pPr>
             <a:r>
-              <a:rPr lang="en-US" sz="1800" b="1" dirty="0">
+              <a:rPr lang="en-US" sz="1600" b="1" dirty="0">
                 <a:solidFill>
                   <a:srgbClr val="F8FAFC"/>
                 </a:solidFill>
@@ -3646,7 +3646,7 @@
               </a:rPr>
               <a:t>Why Traditional Filters Fail vs. How Kavach AI Wins</a:t>
             </a:r>
-            <a:endParaRPr lang="en-US" sz="1800" dirty="0"/>
+            <a:endParaRPr lang="en-US" sz="1600" dirty="0"/>
           </a:p>
         </p:txBody>
       </p:sp>
@@ -3658,7 +3658,7 @@
         </p:nvSpPr>
         <p:spPr>
           <a:xfrm>
-            <a:off x="548640" y="1097280"/>
+            <a:off x="548640" y="960120"/>
             <a:ext cx="11091672" cy="0"/>
           </a:xfrm>
           <a:prstGeom prst="line">
@@ -3667,7 +3667,7 @@
           <a:noFill/>
           <a:ln w="12700">
             <a:solidFill>
-              <a:srgbClr val="20202C"/>
+              <a:srgbClr val="1C1C28"/>
             </a:solidFill>
             <a:prstDash val="solid"/>
           </a:ln>
@@ -3688,8 +3688,8 @@
           </p:nvPr>
         </p:nvGraphicFramePr>
         <p:xfrm>
-          <a:off x="548640" y="1280160"/>
-          <a:ext cx="11091672" cy="2926080"/>
+          <a:off x="548640" y="1115568"/>
+          <a:ext cx="11091672" cy="2834640"/>
         </p:xfrm>
         <a:graphic>
           <a:graphicData uri="http://schemas.openxmlformats.org/drawingml/2006/table">
@@ -3701,7 +3701,7 @@
                 <a:gridCol w="2772918"/>
                 <a:gridCol w="2772918"/>
               </a:tblGrid>
-              <a:tr h="487680">
+              <a:tr h="472440">
                 <a:tc>
                   <a:txBody>
                     <a:bodyPr/>
@@ -3711,20 +3711,20 @@
                         <a:buNone/>
                       </a:pPr>
                       <a:r>
-                        <a:rPr lang="en-US" sz="900" b="1" dirty="0">
+                        <a:rPr lang="en-US" sz="850" b="1" dirty="0">
                           <a:solidFill>
                             <a:srgbClr val="F8FAFC"/>
                           </a:solidFill>
                         </a:rPr>
                         <a:t>Threat Vector / Attack Pattern</a:t>
                       </a:r>
-                      <a:endParaRPr lang="en-US" sz="900" dirty="0"/>
+                      <a:endParaRPr lang="en-US" sz="850" dirty="0"/>
                     </a:p>
                   </a:txBody>
                   <a:tcPr marL="91440" marR="91440" marT="45720" marB="45720" anchor="ctr">
                     <a:lnL w="12700" cap="flat" cmpd="sng" algn="ctr">
                       <a:solidFill>
-                        <a:srgbClr val="222230"/>
+                        <a:srgbClr val="20202E"/>
                       </a:solidFill>
                       <a:prstDash val="solid"/>
                       <a:round/>
@@ -3733,7 +3733,7 @@
                     </a:lnL>
                     <a:lnR w="12700" cap="flat" cmpd="sng" algn="ctr">
                       <a:solidFill>
-                        <a:srgbClr val="222230"/>
+                        <a:srgbClr val="20202E"/>
                       </a:solidFill>
                       <a:prstDash val="solid"/>
                       <a:round/>
@@ -3742,7 +3742,7 @@
                     </a:lnR>
                     <a:lnT w="12700" cap="flat" cmpd="sng" algn="ctr">
                       <a:solidFill>
-                        <a:srgbClr val="222230"/>
+                        <a:srgbClr val="20202E"/>
                       </a:solidFill>
                       <a:prstDash val="solid"/>
                       <a:round/>
@@ -3751,7 +3751,7 @@
                     </a:lnT>
                     <a:lnB w="12700" cap="flat" cmpd="sng" algn="ctr">
                       <a:solidFill>
-                        <a:srgbClr val="222230"/>
+                        <a:srgbClr val="20202E"/>
                       </a:solidFill>
                       <a:prstDash val="solid"/>
                       <a:round/>
@@ -3772,20 +3772,20 @@
                         <a:buNone/>
                       </a:pPr>
                       <a:r>
-                        <a:rPr lang="en-US" sz="900" b="1" dirty="0">
+                        <a:rPr lang="en-US" sz="850" b="1" dirty="0">
                           <a:solidFill>
                             <a:srgbClr val="F8FAFC"/>
                           </a:solidFill>
                         </a:rPr>
                         <a:t>Telecom DND / SMS Gateways</a:t>
                       </a:r>
-                      <a:endParaRPr lang="en-US" sz="900" dirty="0"/>
+                      <a:endParaRPr lang="en-US" sz="850" dirty="0"/>
                     </a:p>
                   </a:txBody>
                   <a:tcPr marL="91440" marR="91440" marT="45720" marB="45720" anchor="ctr">
                     <a:lnL w="12700" cap="flat" cmpd="sng" algn="ctr">
                       <a:solidFill>
-                        <a:srgbClr val="222230"/>
+                        <a:srgbClr val="20202E"/>
                       </a:solidFill>
                       <a:prstDash val="solid"/>
                       <a:round/>
@@ -3794,7 +3794,7 @@
                     </a:lnL>
                     <a:lnR w="12700" cap="flat" cmpd="sng" algn="ctr">
                       <a:solidFill>
-                        <a:srgbClr val="222230"/>
+                        <a:srgbClr val="20202E"/>
                       </a:solidFill>
                       <a:prstDash val="solid"/>
                       <a:round/>
@@ -3803,7 +3803,7 @@
                     </a:lnR>
                     <a:lnT w="12700" cap="flat" cmpd="sng" algn="ctr">
                       <a:solidFill>
-                        <a:srgbClr val="222230"/>
+                        <a:srgbClr val="20202E"/>
                       </a:solidFill>
                       <a:prstDash val="solid"/>
                       <a:round/>
@@ -3812,7 +3812,7 @@
                     </a:lnT>
                     <a:lnB w="12700" cap="flat" cmpd="sng" algn="ctr">
                       <a:solidFill>
-                        <a:srgbClr val="222230"/>
+                        <a:srgbClr val="20202E"/>
                       </a:solidFill>
                       <a:prstDash val="solid"/>
                       <a:round/>
@@ -3833,20 +3833,20 @@
                         <a:buNone/>
                       </a:pPr>
                       <a:r>
-                        <a:rPr lang="en-US" sz="900" b="1" dirty="0">
+                        <a:rPr lang="en-US" sz="850" b="1" dirty="0">
                           <a:solidFill>
                             <a:srgbClr val="F8FAFC"/>
                           </a:solidFill>
                         </a:rPr>
                         <a:t>Standard English ML Models</a:t>
                       </a:r>
-                      <a:endParaRPr lang="en-US" sz="900" dirty="0"/>
+                      <a:endParaRPr lang="en-US" sz="850" dirty="0"/>
                     </a:p>
                   </a:txBody>
                   <a:tcPr marL="91440" marR="91440" marT="45720" marB="45720" anchor="ctr">
                     <a:lnL w="12700" cap="flat" cmpd="sng" algn="ctr">
                       <a:solidFill>
-                        <a:srgbClr val="222230"/>
+                        <a:srgbClr val="20202E"/>
                       </a:solidFill>
                       <a:prstDash val="solid"/>
                       <a:round/>
@@ -3855,7 +3855,7 @@
                     </a:lnL>
                     <a:lnR w="12700" cap="flat" cmpd="sng" algn="ctr">
                       <a:solidFill>
-                        <a:srgbClr val="222230"/>
+                        <a:srgbClr val="20202E"/>
                       </a:solidFill>
                       <a:prstDash val="solid"/>
                       <a:round/>
@@ -3864,7 +3864,7 @@
                     </a:lnR>
                     <a:lnT w="12700" cap="flat" cmpd="sng" algn="ctr">
                       <a:solidFill>
-                        <a:srgbClr val="222230"/>
+                        <a:srgbClr val="20202E"/>
                       </a:solidFill>
                       <a:prstDash val="solid"/>
                       <a:round/>
@@ -3873,7 +3873,7 @@
                     </a:lnT>
                     <a:lnB w="12700" cap="flat" cmpd="sng" algn="ctr">
                       <a:solidFill>
-                        <a:srgbClr val="222230"/>
+                        <a:srgbClr val="20202E"/>
                       </a:solidFill>
                       <a:prstDash val="solid"/>
                       <a:round/>
@@ -3894,20 +3894,20 @@
                         <a:buNone/>
                       </a:pPr>
                       <a:r>
-                        <a:rPr lang="en-US" sz="900" b="1" dirty="0">
+                        <a:rPr lang="en-US" sz="850" b="1" dirty="0">
                           <a:solidFill>
                             <a:srgbClr val="F3DF8A"/>
                           </a:solidFill>
                         </a:rPr>
                         <a:t>🛡️ Kavach AI (Our Approach)</a:t>
                       </a:r>
-                      <a:endParaRPr lang="en-US" sz="900" dirty="0"/>
+                      <a:endParaRPr lang="en-US" sz="850" dirty="0"/>
                     </a:p>
                   </a:txBody>
                   <a:tcPr marL="91440" marR="91440" marT="45720" marB="45720" anchor="ctr">
                     <a:lnL w="12700" cap="flat" cmpd="sng" algn="ctr">
                       <a:solidFill>
-                        <a:srgbClr val="222230"/>
+                        <a:srgbClr val="20202E"/>
                       </a:solidFill>
                       <a:prstDash val="solid"/>
                       <a:round/>
@@ -3916,7 +3916,7 @@
                     </a:lnL>
                     <a:lnR w="12700" cap="flat" cmpd="sng" algn="ctr">
                       <a:solidFill>
-                        <a:srgbClr val="222230"/>
+                        <a:srgbClr val="20202E"/>
                       </a:solidFill>
                       <a:prstDash val="solid"/>
                       <a:round/>
@@ -3925,7 +3925,7 @@
                     </a:lnR>
                     <a:lnT w="12700" cap="flat" cmpd="sng" algn="ctr">
                       <a:solidFill>
-                        <a:srgbClr val="222230"/>
+                        <a:srgbClr val="20202E"/>
                       </a:solidFill>
                       <a:prstDash val="solid"/>
                       <a:round/>
@@ -3934,7 +3934,7 @@
                     </a:lnT>
                     <a:lnB w="12700" cap="flat" cmpd="sng" algn="ctr">
                       <a:solidFill>
-                        <a:srgbClr val="222230"/>
+                        <a:srgbClr val="20202E"/>
                       </a:solidFill>
                       <a:prstDash val="solid"/>
                       <a:round/>
@@ -3947,7 +3947,7 @@
                   </a:tcPr>
                 </a:tc>
               </a:tr>
-              <a:tr h="487680">
+              <a:tr h="472440">
                 <a:tc>
                   <a:txBody>
                     <a:bodyPr/>
@@ -3957,20 +3957,20 @@
                         <a:buNone/>
                       </a:pPr>
                       <a:r>
-                        <a:rPr lang="en-US" sz="850" dirty="0">
+                        <a:rPr lang="en-US" sz="800" dirty="0">
                           <a:solidFill>
                             <a:srgbClr val="94A3B8"/>
                           </a:solidFill>
                         </a:rPr>
                         <a:t>Transliterated Hinglish ("bijli cut", "khata bandh")</a:t>
                       </a:r>
-                      <a:endParaRPr lang="en-US" sz="850" dirty="0"/>
+                      <a:endParaRPr lang="en-US" sz="800" dirty="0"/>
                     </a:p>
                   </a:txBody>
                   <a:tcPr marL="91440" marR="91440" marT="45720" marB="45720" anchor="ctr">
                     <a:lnL w="12700" cap="flat" cmpd="sng" algn="ctr">
                       <a:solidFill>
-                        <a:srgbClr val="222230"/>
+                        <a:srgbClr val="20202E"/>
                       </a:solidFill>
                       <a:prstDash val="solid"/>
                       <a:round/>
@@ -3979,7 +3979,7 @@
                     </a:lnL>
                     <a:lnR w="12700" cap="flat" cmpd="sng" algn="ctr">
                       <a:solidFill>
-                        <a:srgbClr val="222230"/>
+                        <a:srgbClr val="20202E"/>
                       </a:solidFill>
                       <a:prstDash val="solid"/>
                       <a:round/>
@@ -3988,7 +3988,7 @@
                     </a:lnR>
                     <a:lnT w="12700" cap="flat" cmpd="sng" algn="ctr">
                       <a:solidFill>
-                        <a:srgbClr val="222230"/>
+                        <a:srgbClr val="20202E"/>
                       </a:solidFill>
                       <a:prstDash val="solid"/>
                       <a:round/>
@@ -3997,7 +3997,7 @@
                     </a:lnT>
                     <a:lnB w="12700" cap="flat" cmpd="sng" algn="ctr">
                       <a:solidFill>
-                        <a:srgbClr val="222230"/>
+                        <a:srgbClr val="20202E"/>
                       </a:solidFill>
                       <a:prstDash val="solid"/>
                       <a:round/>
@@ -4015,20 +4015,20 @@
                         <a:buNone/>
                       </a:pPr>
                       <a:r>
-                        <a:rPr lang="en-US" sz="850" dirty="0">
+                        <a:rPr lang="en-US" sz="800" dirty="0">
                           <a:solidFill>
                             <a:srgbClr val="F43F5E"/>
                           </a:solidFill>
                         </a:rPr>
                         <a:t>❌ Blind (0% understanding)</a:t>
                       </a:r>
-                      <a:endParaRPr lang="en-US" sz="850" dirty="0"/>
+                      <a:endParaRPr lang="en-US" sz="800" dirty="0"/>
                     </a:p>
                   </a:txBody>
                   <a:tcPr marL="91440" marR="91440" marT="45720" marB="45720" anchor="ctr">
                     <a:lnL w="12700" cap="flat" cmpd="sng" algn="ctr">
                       <a:solidFill>
-                        <a:srgbClr val="222230"/>
+                        <a:srgbClr val="20202E"/>
                       </a:solidFill>
                       <a:prstDash val="solid"/>
                       <a:round/>
@@ -4037,7 +4037,7 @@
                     </a:lnL>
                     <a:lnR w="12700" cap="flat" cmpd="sng" algn="ctr">
                       <a:solidFill>
-                        <a:srgbClr val="222230"/>
+                        <a:srgbClr val="20202E"/>
                       </a:solidFill>
                       <a:prstDash val="solid"/>
                       <a:round/>
@@ -4046,7 +4046,7 @@
                     </a:lnR>
                     <a:lnT w="12700" cap="flat" cmpd="sng" algn="ctr">
                       <a:solidFill>
-                        <a:srgbClr val="222230"/>
+                        <a:srgbClr val="20202E"/>
                       </a:solidFill>
                       <a:prstDash val="solid"/>
                       <a:round/>
@@ -4055,7 +4055,7 @@
                     </a:lnT>
                     <a:lnB w="12700" cap="flat" cmpd="sng" algn="ctr">
                       <a:solidFill>
-                        <a:srgbClr val="222230"/>
+                        <a:srgbClr val="20202E"/>
                       </a:solidFill>
                       <a:prstDash val="solid"/>
                       <a:round/>
@@ -4073,20 +4073,20 @@
                         <a:buNone/>
                       </a:pPr>
                       <a:r>
-                        <a:rPr lang="en-US" sz="850" dirty="0">
+                        <a:rPr lang="en-US" sz="800" dirty="0">
                           <a:solidFill>
                             <a:srgbClr val="F43F5E"/>
                           </a:solidFill>
                         </a:rPr>
                         <a:t>❌ Poor semantic capture</a:t>
                       </a:r>
-                      <a:endParaRPr lang="en-US" sz="850" dirty="0"/>
+                      <a:endParaRPr lang="en-US" sz="800" dirty="0"/>
                     </a:p>
                   </a:txBody>
                   <a:tcPr marL="91440" marR="91440" marT="45720" marB="45720" anchor="ctr">
                     <a:lnL w="12700" cap="flat" cmpd="sng" algn="ctr">
                       <a:solidFill>
-                        <a:srgbClr val="222230"/>
+                        <a:srgbClr val="20202E"/>
                       </a:solidFill>
                       <a:prstDash val="solid"/>
                       <a:round/>
@@ -4095,7 +4095,7 @@
                     </a:lnL>
                     <a:lnR w="12700" cap="flat" cmpd="sng" algn="ctr">
                       <a:solidFill>
-                        <a:srgbClr val="222230"/>
+                        <a:srgbClr val="20202E"/>
                       </a:solidFill>
                       <a:prstDash val="solid"/>
                       <a:round/>
@@ -4104,7 +4104,7 @@
                     </a:lnR>
                     <a:lnT w="12700" cap="flat" cmpd="sng" algn="ctr">
                       <a:solidFill>
-                        <a:srgbClr val="222230"/>
+                        <a:srgbClr val="20202E"/>
                       </a:solidFill>
                       <a:prstDash val="solid"/>
                       <a:round/>
@@ -4113,7 +4113,7 @@
                     </a:lnT>
                     <a:lnB w="12700" cap="flat" cmpd="sng" algn="ctr">
                       <a:solidFill>
-                        <a:srgbClr val="222230"/>
+                        <a:srgbClr val="20202E"/>
                       </a:solidFill>
                       <a:prstDash val="solid"/>
                       <a:round/>
@@ -4131,20 +4131,20 @@
                         <a:buNone/>
                       </a:pPr>
                       <a:r>
-                        <a:rPr lang="en-US" sz="850" b="1" dirty="0">
+                        <a:rPr lang="en-US" sz="800" b="1" dirty="0">
                           <a:solidFill>
                             <a:srgbClr val="10B981"/>
                           </a:solidFill>
                         </a:rPr>
                         <a:t>✅ Native Vernacular Engine (200+ Lexicon)</a:t>
                       </a:r>
-                      <a:endParaRPr lang="en-US" sz="850" dirty="0"/>
+                      <a:endParaRPr lang="en-US" sz="800" dirty="0"/>
                     </a:p>
                   </a:txBody>
                   <a:tcPr marL="91440" marR="91440" marT="45720" marB="45720" anchor="ctr">
                     <a:lnL w="12700" cap="flat" cmpd="sng" algn="ctr">
                       <a:solidFill>
-                        <a:srgbClr val="222230"/>
+                        <a:srgbClr val="20202E"/>
                       </a:solidFill>
                       <a:prstDash val="solid"/>
                       <a:round/>
@@ -4153,7 +4153,7 @@
                     </a:lnL>
                     <a:lnR w="12700" cap="flat" cmpd="sng" algn="ctr">
                       <a:solidFill>
-                        <a:srgbClr val="222230"/>
+                        <a:srgbClr val="20202E"/>
                       </a:solidFill>
                       <a:prstDash val="solid"/>
                       <a:round/>
@@ -4162,7 +4162,7 @@
                     </a:lnR>
                     <a:lnT w="12700" cap="flat" cmpd="sng" algn="ctr">
                       <a:solidFill>
-                        <a:srgbClr val="222230"/>
+                        <a:srgbClr val="20202E"/>
                       </a:solidFill>
                       <a:prstDash val="solid"/>
                       <a:round/>
@@ -4171,7 +4171,7 @@
                     </a:lnT>
                     <a:lnB w="12700" cap="flat" cmpd="sng" algn="ctr">
                       <a:solidFill>
-                        <a:srgbClr val="222230"/>
+                        <a:srgbClr val="20202E"/>
                       </a:solidFill>
                       <a:prstDash val="solid"/>
                       <a:round/>
@@ -4181,7 +4181,7 @@
                   </a:tcPr>
                 </a:tc>
               </a:tr>
-              <a:tr h="487680">
+              <a:tr h="472440">
                 <a:tc>
                   <a:txBody>
                     <a:bodyPr/>
@@ -4191,20 +4191,20 @@
                         <a:buNone/>
                       </a:pPr>
                       <a:r>
-                        <a:rPr lang="en-US" sz="850" dirty="0">
+                        <a:rPr lang="en-US" sz="800" dirty="0">
                           <a:solidFill>
                             <a:srgbClr val="94A3B8"/>
                           </a:solidFill>
                         </a:rPr>
                         <a:t>Adversarial Leetspeak ("BLCK", "0TPP", "K-Y-C")</a:t>
                       </a:r>
-                      <a:endParaRPr lang="en-US" sz="850" dirty="0"/>
+                      <a:endParaRPr lang="en-US" sz="800" dirty="0"/>
                     </a:p>
                   </a:txBody>
                   <a:tcPr marL="91440" marR="91440" marT="45720" marB="45720" anchor="ctr">
                     <a:lnL w="12700" cap="flat" cmpd="sng" algn="ctr">
                       <a:solidFill>
-                        <a:srgbClr val="222230"/>
+                        <a:srgbClr val="20202E"/>
                       </a:solidFill>
                       <a:prstDash val="solid"/>
                       <a:round/>
@@ -4213,7 +4213,7 @@
                     </a:lnL>
                     <a:lnR w="12700" cap="flat" cmpd="sng" algn="ctr">
                       <a:solidFill>
-                        <a:srgbClr val="222230"/>
+                        <a:srgbClr val="20202E"/>
                       </a:solidFill>
                       <a:prstDash val="solid"/>
                       <a:round/>
@@ -4222,7 +4222,7 @@
                     </a:lnR>
                     <a:lnT w="12700" cap="flat" cmpd="sng" algn="ctr">
                       <a:solidFill>
-                        <a:srgbClr val="222230"/>
+                        <a:srgbClr val="20202E"/>
                       </a:solidFill>
                       <a:prstDash val="solid"/>
                       <a:round/>
@@ -4231,7 +4231,7 @@
                     </a:lnT>
                     <a:lnB w="12700" cap="flat" cmpd="sng" algn="ctr">
                       <a:solidFill>
-                        <a:srgbClr val="222230"/>
+                        <a:srgbClr val="20202E"/>
                       </a:solidFill>
                       <a:prstDash val="solid"/>
                       <a:round/>
@@ -4249,20 +4249,20 @@
                         <a:buNone/>
                       </a:pPr>
                       <a:r>
-                        <a:rPr lang="en-US" sz="850" dirty="0">
+                        <a:rPr lang="en-US" sz="800" dirty="0">
                           <a:solidFill>
                             <a:srgbClr val="F43F5E"/>
                           </a:solidFill>
                         </a:rPr>
                         <a:t>❌ Bypassed completely</a:t>
                       </a:r>
-                      <a:endParaRPr lang="en-US" sz="850" dirty="0"/>
+                      <a:endParaRPr lang="en-US" sz="800" dirty="0"/>
                     </a:p>
                   </a:txBody>
                   <a:tcPr marL="91440" marR="91440" marT="45720" marB="45720" anchor="ctr">
                     <a:lnL w="12700" cap="flat" cmpd="sng" algn="ctr">
                       <a:solidFill>
-                        <a:srgbClr val="222230"/>
+                        <a:srgbClr val="20202E"/>
                       </a:solidFill>
                       <a:prstDash val="solid"/>
                       <a:round/>
@@ -4271,7 +4271,7 @@
                     </a:lnL>
                     <a:lnR w="12700" cap="flat" cmpd="sng" algn="ctr">
                       <a:solidFill>
-                        <a:srgbClr val="222230"/>
+                        <a:srgbClr val="20202E"/>
                       </a:solidFill>
                       <a:prstDash val="solid"/>
                       <a:round/>
@@ -4280,7 +4280,7 @@
                     </a:lnR>
                     <a:lnT w="12700" cap="flat" cmpd="sng" algn="ctr">
                       <a:solidFill>
-                        <a:srgbClr val="222230"/>
+                        <a:srgbClr val="20202E"/>
                       </a:solidFill>
                       <a:prstDash val="solid"/>
                       <a:round/>
@@ -4289,7 +4289,7 @@
                     </a:lnT>
                     <a:lnB w="12700" cap="flat" cmpd="sng" algn="ctr">
                       <a:solidFill>
-                        <a:srgbClr val="222230"/>
+                        <a:srgbClr val="20202E"/>
                       </a:solidFill>
                       <a:prstDash val="solid"/>
                       <a:round/>
@@ -4307,20 +4307,20 @@
                         <a:buNone/>
                       </a:pPr>
                       <a:r>
-                        <a:rPr lang="en-US" sz="850" dirty="0">
+                        <a:rPr lang="en-US" sz="800" dirty="0">
                           <a:solidFill>
                             <a:srgbClr val="F43F5E"/>
                           </a:solidFill>
                         </a:rPr>
                         <a:t>❌ Tokenizer splits string</a:t>
                       </a:r>
-                      <a:endParaRPr lang="en-US" sz="850" dirty="0"/>
+                      <a:endParaRPr lang="en-US" sz="800" dirty="0"/>
                     </a:p>
                   </a:txBody>
                   <a:tcPr marL="91440" marR="91440" marT="45720" marB="45720" anchor="ctr">
                     <a:lnL w="12700" cap="flat" cmpd="sng" algn="ctr">
                       <a:solidFill>
-                        <a:srgbClr val="222230"/>
+                        <a:srgbClr val="20202E"/>
                       </a:solidFill>
                       <a:prstDash val="solid"/>
                       <a:round/>
@@ -4329,7 +4329,7 @@
                     </a:lnL>
                     <a:lnR w="12700" cap="flat" cmpd="sng" algn="ctr">
                       <a:solidFill>
-                        <a:srgbClr val="222230"/>
+                        <a:srgbClr val="20202E"/>
                       </a:solidFill>
                       <a:prstDash val="solid"/>
                       <a:round/>
@@ -4338,7 +4338,7 @@
                     </a:lnR>
                     <a:lnT w="12700" cap="flat" cmpd="sng" algn="ctr">
                       <a:solidFill>
-                        <a:srgbClr val="222230"/>
+                        <a:srgbClr val="20202E"/>
                       </a:solidFill>
                       <a:prstDash val="solid"/>
                       <a:round/>
@@ -4347,7 +4347,7 @@
                     </a:lnT>
                     <a:lnB w="12700" cap="flat" cmpd="sng" algn="ctr">
                       <a:solidFill>
-                        <a:srgbClr val="222230"/>
+                        <a:srgbClr val="20202E"/>
                       </a:solidFill>
                       <a:prstDash val="solid"/>
                       <a:round/>
@@ -4365,20 +4365,20 @@
                         <a:buNone/>
                       </a:pPr>
                       <a:r>
-                        <a:rPr lang="en-US" sz="850" b="1" dirty="0">
+                        <a:rPr lang="en-US" sz="800" b="1" dirty="0">
                           <a:solidFill>
                             <a:srgbClr val="10B981"/>
                           </a:solidFill>
                         </a:rPr>
                         <a:t>✅ 3-Step Levenshtein Normalizer (&lt;15ms)</a:t>
                       </a:r>
-                      <a:endParaRPr lang="en-US" sz="850" dirty="0"/>
+                      <a:endParaRPr lang="en-US" sz="800" dirty="0"/>
                     </a:p>
                   </a:txBody>
                   <a:tcPr marL="91440" marR="91440" marT="45720" marB="45720" anchor="ctr">
                     <a:lnL w="12700" cap="flat" cmpd="sng" algn="ctr">
                       <a:solidFill>
-                        <a:srgbClr val="222230"/>
+                        <a:srgbClr val="20202E"/>
                       </a:solidFill>
                       <a:prstDash val="solid"/>
                       <a:round/>
@@ -4387,7 +4387,7 @@
                     </a:lnL>
                     <a:lnR w="12700" cap="flat" cmpd="sng" algn="ctr">
                       <a:solidFill>
-                        <a:srgbClr val="222230"/>
+                        <a:srgbClr val="20202E"/>
                       </a:solidFill>
                       <a:prstDash val="solid"/>
                       <a:round/>
@@ -4396,7 +4396,7 @@
                     </a:lnR>
                     <a:lnT w="12700" cap="flat" cmpd="sng" algn="ctr">
                       <a:solidFill>
-                        <a:srgbClr val="222230"/>
+                        <a:srgbClr val="20202E"/>
                       </a:solidFill>
                       <a:prstDash val="solid"/>
                       <a:round/>
@@ -4405,7 +4405,7 @@
                     </a:lnT>
                     <a:lnB w="12700" cap="flat" cmpd="sng" algn="ctr">
                       <a:solidFill>
-                        <a:srgbClr val="222230"/>
+                        <a:srgbClr val="20202E"/>
                       </a:solidFill>
                       <a:prstDash val="solid"/>
                       <a:round/>
@@ -4415,7 +4415,7 @@
                   </a:tcPr>
                 </a:tc>
               </a:tr>
-              <a:tr h="487680">
+              <a:tr h="472440">
                 <a:tc>
                   <a:txBody>
                     <a:bodyPr/>
@@ -4425,20 +4425,20 @@
                         <a:buNone/>
                       </a:pPr>
                       <a:r>
-                        <a:rPr lang="en-US" sz="850" dirty="0">
+                        <a:rPr lang="en-US" sz="800" dirty="0">
                           <a:solidFill>
                             <a:srgbClr val="94A3B8"/>
                           </a:solidFill>
                         </a:rPr>
                         <a:t>Part-Time Task Scams ("ghar baithe kamaye")</a:t>
                       </a:r>
-                      <a:endParaRPr lang="en-US" sz="850" dirty="0"/>
+                      <a:endParaRPr lang="en-US" sz="800" dirty="0"/>
                     </a:p>
                   </a:txBody>
                   <a:tcPr marL="91440" marR="91440" marT="45720" marB="45720" anchor="ctr">
                     <a:lnL w="12700" cap="flat" cmpd="sng" algn="ctr">
                       <a:solidFill>
-                        <a:srgbClr val="222230"/>
+                        <a:srgbClr val="20202E"/>
                       </a:solidFill>
                       <a:prstDash val="solid"/>
                       <a:round/>
@@ -4447,7 +4447,7 @@
                     </a:lnL>
                     <a:lnR w="12700" cap="flat" cmpd="sng" algn="ctr">
                       <a:solidFill>
-                        <a:srgbClr val="222230"/>
+                        <a:srgbClr val="20202E"/>
                       </a:solidFill>
                       <a:prstDash val="solid"/>
                       <a:round/>
@@ -4456,7 +4456,7 @@
                     </a:lnR>
                     <a:lnT w="12700" cap="flat" cmpd="sng" algn="ctr">
                       <a:solidFill>
-                        <a:srgbClr val="222230"/>
+                        <a:srgbClr val="20202E"/>
                       </a:solidFill>
                       <a:prstDash val="solid"/>
                       <a:round/>
@@ -4465,7 +4465,7 @@
                     </a:lnT>
                     <a:lnB w="12700" cap="flat" cmpd="sng" algn="ctr">
                       <a:solidFill>
-                        <a:srgbClr val="222230"/>
+                        <a:srgbClr val="20202E"/>
                       </a:solidFill>
                       <a:prstDash val="solid"/>
                       <a:round/>
@@ -4483,20 +4483,20 @@
                         <a:buNone/>
                       </a:pPr>
                       <a:r>
-                        <a:rPr lang="en-US" sz="850" dirty="0">
+                        <a:rPr lang="en-US" sz="800" dirty="0">
                           <a:solidFill>
                             <a:srgbClr val="F43F5E"/>
                           </a:solidFill>
                         </a:rPr>
                         <a:t>❌ Treated as promo SMS</a:t>
                       </a:r>
-                      <a:endParaRPr lang="en-US" sz="850" dirty="0"/>
+                      <a:endParaRPr lang="en-US" sz="800" dirty="0"/>
                     </a:p>
                   </a:txBody>
                   <a:tcPr marL="91440" marR="91440" marT="45720" marB="45720" anchor="ctr">
                     <a:lnL w="12700" cap="flat" cmpd="sng" algn="ctr">
                       <a:solidFill>
-                        <a:srgbClr val="222230"/>
+                        <a:srgbClr val="20202E"/>
                       </a:solidFill>
                       <a:prstDash val="solid"/>
                       <a:round/>
@@ -4505,7 +4505,7 @@
                     </a:lnL>
                     <a:lnR w="12700" cap="flat" cmpd="sng" algn="ctr">
                       <a:solidFill>
-                        <a:srgbClr val="222230"/>
+                        <a:srgbClr val="20202E"/>
                       </a:solidFill>
                       <a:prstDash val="solid"/>
                       <a:round/>
@@ -4514,7 +4514,7 @@
                     </a:lnR>
                     <a:lnT w="12700" cap="flat" cmpd="sng" algn="ctr">
                       <a:solidFill>
-                        <a:srgbClr val="222230"/>
+                        <a:srgbClr val="20202E"/>
                       </a:solidFill>
                       <a:prstDash val="solid"/>
                       <a:round/>
@@ -4523,7 +4523,7 @@
                     </a:lnT>
                     <a:lnB w="12700" cap="flat" cmpd="sng" algn="ctr">
                       <a:solidFill>
-                        <a:srgbClr val="222230"/>
+                        <a:srgbClr val="20202E"/>
                       </a:solidFill>
                       <a:prstDash val="solid"/>
                       <a:round/>
@@ -4541,20 +4541,20 @@
                         <a:buNone/>
                       </a:pPr>
                       <a:r>
-                        <a:rPr lang="en-US" sz="850" dirty="0">
+                        <a:rPr lang="en-US" sz="800" dirty="0">
                           <a:solidFill>
                             <a:srgbClr val="F43F5E"/>
                           </a:solidFill>
                         </a:rPr>
                         <a:t>❌ Low risk classification</a:t>
                       </a:r>
-                      <a:endParaRPr lang="en-US" sz="850" dirty="0"/>
+                      <a:endParaRPr lang="en-US" sz="800" dirty="0"/>
                     </a:p>
                   </a:txBody>
                   <a:tcPr marL="91440" marR="91440" marT="45720" marB="45720" anchor="ctr">
                     <a:lnL w="12700" cap="flat" cmpd="sng" algn="ctr">
                       <a:solidFill>
-                        <a:srgbClr val="222230"/>
+                        <a:srgbClr val="20202E"/>
                       </a:solidFill>
                       <a:prstDash val="solid"/>
                       <a:round/>
@@ -4563,7 +4563,7 @@
                     </a:lnL>
                     <a:lnR w="12700" cap="flat" cmpd="sng" algn="ctr">
                       <a:solidFill>
-                        <a:srgbClr val="222230"/>
+                        <a:srgbClr val="20202E"/>
                       </a:solidFill>
                       <a:prstDash val="solid"/>
                       <a:round/>
@@ -4572,7 +4572,7 @@
                     </a:lnR>
                     <a:lnT w="12700" cap="flat" cmpd="sng" algn="ctr">
                       <a:solidFill>
-                        <a:srgbClr val="222230"/>
+                        <a:srgbClr val="20202E"/>
                       </a:solidFill>
                       <a:prstDash val="solid"/>
                       <a:round/>
@@ -4581,7 +4581,7 @@
                     </a:lnT>
                     <a:lnB w="12700" cap="flat" cmpd="sng" algn="ctr">
                       <a:solidFill>
-                        <a:srgbClr val="222230"/>
+                        <a:srgbClr val="20202E"/>
                       </a:solidFill>
                       <a:prstDash val="solid"/>
                       <a:round/>
@@ -4599,20 +4599,20 @@
                         <a:buNone/>
                       </a:pPr>
                       <a:r>
-                        <a:rPr lang="en-US" sz="850" b="1" dirty="0">
+                        <a:rPr lang="en-US" sz="800" b="1" dirty="0">
                           <a:solidFill>
                             <a:srgbClr val="10B981"/>
                           </a:solidFill>
                         </a:rPr>
                         <a:t>✅ Deterministic Fraud Signatures</a:t>
                       </a:r>
-                      <a:endParaRPr lang="en-US" sz="850" dirty="0"/>
+                      <a:endParaRPr lang="en-US" sz="800" dirty="0"/>
                     </a:p>
                   </a:txBody>
                   <a:tcPr marL="91440" marR="91440" marT="45720" marB="45720" anchor="ctr">
                     <a:lnL w="12700" cap="flat" cmpd="sng" algn="ctr">
                       <a:solidFill>
-                        <a:srgbClr val="222230"/>
+                        <a:srgbClr val="20202E"/>
                       </a:solidFill>
                       <a:prstDash val="solid"/>
                       <a:round/>
@@ -4621,7 +4621,7 @@
                     </a:lnL>
                     <a:lnR w="12700" cap="flat" cmpd="sng" algn="ctr">
                       <a:solidFill>
-                        <a:srgbClr val="222230"/>
+                        <a:srgbClr val="20202E"/>
                       </a:solidFill>
                       <a:prstDash val="solid"/>
                       <a:round/>
@@ -4630,7 +4630,7 @@
                     </a:lnR>
                     <a:lnT w="12700" cap="flat" cmpd="sng" algn="ctr">
                       <a:solidFill>
-                        <a:srgbClr val="222230"/>
+                        <a:srgbClr val="20202E"/>
                       </a:solidFill>
                       <a:prstDash val="solid"/>
                       <a:round/>
@@ -4639,7 +4639,7 @@
                     </a:lnT>
                     <a:lnB w="12700" cap="flat" cmpd="sng" algn="ctr">
                       <a:solidFill>
-                        <a:srgbClr val="222230"/>
+                        <a:srgbClr val="20202E"/>
                       </a:solidFill>
                       <a:prstDash val="solid"/>
                       <a:round/>
@@ -4649,7 +4649,7 @@
                   </a:tcPr>
                 </a:tc>
               </a:tr>
-              <a:tr h="487680">
+              <a:tr h="472440">
                 <a:tc>
                   <a:txBody>
                     <a:bodyPr/>
@@ -4659,20 +4659,20 @@
                         <a:buNone/>
                       </a:pPr>
                       <a:r>
-                        <a:rPr lang="en-US" sz="850" dirty="0">
+                        <a:rPr lang="en-US" sz="800" dirty="0">
                           <a:solidFill>
                             <a:srgbClr val="94A3B8"/>
                           </a:solidFill>
                         </a:rPr>
                         <a:t>Detection Latency</a:t>
                       </a:r>
-                      <a:endParaRPr lang="en-US" sz="850" dirty="0"/>
+                      <a:endParaRPr lang="en-US" sz="800" dirty="0"/>
                     </a:p>
                   </a:txBody>
                   <a:tcPr marL="91440" marR="91440" marT="45720" marB="45720" anchor="ctr">
                     <a:lnL w="12700" cap="flat" cmpd="sng" algn="ctr">
                       <a:solidFill>
-                        <a:srgbClr val="222230"/>
+                        <a:srgbClr val="20202E"/>
                       </a:solidFill>
                       <a:prstDash val="solid"/>
                       <a:round/>
@@ -4681,7 +4681,7 @@
                     </a:lnL>
                     <a:lnR w="12700" cap="flat" cmpd="sng" algn="ctr">
                       <a:solidFill>
-                        <a:srgbClr val="222230"/>
+                        <a:srgbClr val="20202E"/>
                       </a:solidFill>
                       <a:prstDash val="solid"/>
                       <a:round/>
@@ -4690,7 +4690,7 @@
                     </a:lnR>
                     <a:lnT w="12700" cap="flat" cmpd="sng" algn="ctr">
                       <a:solidFill>
-                        <a:srgbClr val="222230"/>
+                        <a:srgbClr val="20202E"/>
                       </a:solidFill>
                       <a:prstDash val="solid"/>
                       <a:round/>
@@ -4699,7 +4699,7 @@
                     </a:lnT>
                     <a:lnB w="12700" cap="flat" cmpd="sng" algn="ctr">
                       <a:solidFill>
-                        <a:srgbClr val="222230"/>
+                        <a:srgbClr val="20202E"/>
                       </a:solidFill>
                       <a:prstDash val="solid"/>
                       <a:round/>
@@ -4717,20 +4717,20 @@
                         <a:buNone/>
                       </a:pPr>
                       <a:r>
-                        <a:rPr lang="en-US" sz="850" dirty="0">
+                        <a:rPr lang="en-US" sz="800" dirty="0">
                           <a:solidFill>
                             <a:srgbClr val="64748B"/>
                           </a:solidFill>
                         </a:rPr>
                         <a:t>200ms - 500ms</a:t>
                       </a:r>
-                      <a:endParaRPr lang="en-US" sz="850" dirty="0"/>
+                      <a:endParaRPr lang="en-US" sz="800" dirty="0"/>
                     </a:p>
                   </a:txBody>
                   <a:tcPr marL="91440" marR="91440" marT="45720" marB="45720" anchor="ctr">
                     <a:lnL w="12700" cap="flat" cmpd="sng" algn="ctr">
                       <a:solidFill>
-                        <a:srgbClr val="222230"/>
+                        <a:srgbClr val="20202E"/>
                       </a:solidFill>
                       <a:prstDash val="solid"/>
                       <a:round/>
@@ -4739,7 +4739,7 @@
                     </a:lnL>
                     <a:lnR w="12700" cap="flat" cmpd="sng" algn="ctr">
                       <a:solidFill>
-                        <a:srgbClr val="222230"/>
+                        <a:srgbClr val="20202E"/>
                       </a:solidFill>
                       <a:prstDash val="solid"/>
                       <a:round/>
@@ -4748,7 +4748,7 @@
                     </a:lnR>
                     <a:lnT w="12700" cap="flat" cmpd="sng" algn="ctr">
                       <a:solidFill>
-                        <a:srgbClr val="222230"/>
+                        <a:srgbClr val="20202E"/>
                       </a:solidFill>
                       <a:prstDash val="solid"/>
                       <a:round/>
@@ -4757,7 +4757,7 @@
                     </a:lnT>
                     <a:lnB w="12700" cap="flat" cmpd="sng" algn="ctr">
                       <a:solidFill>
-                        <a:srgbClr val="222230"/>
+                        <a:srgbClr val="20202E"/>
                       </a:solidFill>
                       <a:prstDash val="solid"/>
                       <a:round/>
@@ -4775,20 +4775,20 @@
                         <a:buNone/>
                       </a:pPr>
                       <a:r>
-                        <a:rPr lang="en-US" sz="850" dirty="0">
+                        <a:rPr lang="en-US" sz="800" dirty="0">
                           <a:solidFill>
                             <a:srgbClr val="F59E0B"/>
                           </a:solidFill>
                         </a:rPr>
                         <a:t>1200ms - 3000ms</a:t>
                       </a:r>
-                      <a:endParaRPr lang="en-US" sz="850" dirty="0"/>
+                      <a:endParaRPr lang="en-US" sz="800" dirty="0"/>
                     </a:p>
                   </a:txBody>
                   <a:tcPr marL="91440" marR="91440" marT="45720" marB="45720" anchor="ctr">
                     <a:lnL w="12700" cap="flat" cmpd="sng" algn="ctr">
                       <a:solidFill>
-                        <a:srgbClr val="222230"/>
+                        <a:srgbClr val="20202E"/>
                       </a:solidFill>
                       <a:prstDash val="solid"/>
                       <a:round/>
@@ -4797,7 +4797,7 @@
                     </a:lnL>
                     <a:lnR w="12700" cap="flat" cmpd="sng" algn="ctr">
                       <a:solidFill>
-                        <a:srgbClr val="222230"/>
+                        <a:srgbClr val="20202E"/>
                       </a:solidFill>
                       <a:prstDash val="solid"/>
                       <a:round/>
@@ -4806,7 +4806,7 @@
                     </a:lnR>
                     <a:lnT w="12700" cap="flat" cmpd="sng" algn="ctr">
                       <a:solidFill>
-                        <a:srgbClr val="222230"/>
+                        <a:srgbClr val="20202E"/>
                       </a:solidFill>
                       <a:prstDash val="solid"/>
                       <a:round/>
@@ -4815,7 +4815,7 @@
                     </a:lnT>
                     <a:lnB w="12700" cap="flat" cmpd="sng" algn="ctr">
                       <a:solidFill>
-                        <a:srgbClr val="222230"/>
+                        <a:srgbClr val="20202E"/>
                       </a:solidFill>
                       <a:prstDash val="solid"/>
                       <a:round/>
@@ -4833,20 +4833,20 @@
                         <a:buNone/>
                       </a:pPr>
                       <a:r>
-                        <a:rPr lang="en-US" sz="850" b="1" dirty="0">
+                        <a:rPr lang="en-US" sz="800" b="1" dirty="0">
                           <a:solidFill>
                             <a:srgbClr val="10B981"/>
                           </a:solidFill>
                         </a:rPr>
                         <a:t>⚡ &lt;45ms Sub-Second Speed</a:t>
                       </a:r>
-                      <a:endParaRPr lang="en-US" sz="850" dirty="0"/>
+                      <a:endParaRPr lang="en-US" sz="800" dirty="0"/>
                     </a:p>
                   </a:txBody>
                   <a:tcPr marL="91440" marR="91440" marT="45720" marB="45720" anchor="ctr">
                     <a:lnL w="12700" cap="flat" cmpd="sng" algn="ctr">
                       <a:solidFill>
-                        <a:srgbClr val="222230"/>
+                        <a:srgbClr val="20202E"/>
                       </a:solidFill>
                       <a:prstDash val="solid"/>
                       <a:round/>
@@ -4855,7 +4855,7 @@
                     </a:lnL>
                     <a:lnR w="12700" cap="flat" cmpd="sng" algn="ctr">
                       <a:solidFill>
-                        <a:srgbClr val="222230"/>
+                        <a:srgbClr val="20202E"/>
                       </a:solidFill>
                       <a:prstDash val="solid"/>
                       <a:round/>
@@ -4864,7 +4864,7 @@
                     </a:lnR>
                     <a:lnT w="12700" cap="flat" cmpd="sng" algn="ctr">
                       <a:solidFill>
-                        <a:srgbClr val="222230"/>
+                        <a:srgbClr val="20202E"/>
                       </a:solidFill>
                       <a:prstDash val="solid"/>
                       <a:round/>
@@ -4873,7 +4873,7 @@
                     </a:lnT>
                     <a:lnB w="12700" cap="flat" cmpd="sng" algn="ctr">
                       <a:solidFill>
-                        <a:srgbClr val="222230"/>
+                        <a:srgbClr val="20202E"/>
                       </a:solidFill>
                       <a:prstDash val="solid"/>
                       <a:round/>
@@ -4883,7 +4883,7 @@
                   </a:tcPr>
                 </a:tc>
               </a:tr>
-              <a:tr h="487680">
+              <a:tr h="472440">
                 <a:tc>
                   <a:txBody>
                     <a:bodyPr/>
@@ -4893,20 +4893,20 @@
                         <a:buNone/>
                       </a:pPr>
                       <a:r>
-                        <a:rPr lang="en-US" sz="850" dirty="0">
+                        <a:rPr lang="en-US" sz="800" dirty="0">
                           <a:solidFill>
                             <a:srgbClr val="94A3B8"/>
                           </a:solidFill>
                         </a:rPr>
                         <a:t>Explainable AI Threat Triggers</a:t>
                       </a:r>
-                      <a:endParaRPr lang="en-US" sz="850" dirty="0"/>
+                      <a:endParaRPr lang="en-US" sz="800" dirty="0"/>
                     </a:p>
                   </a:txBody>
                   <a:tcPr marL="91440" marR="91440" marT="45720" marB="45720" anchor="ctr">
                     <a:lnL w="12700" cap="flat" cmpd="sng" algn="ctr">
                       <a:solidFill>
-                        <a:srgbClr val="222230"/>
+                        <a:srgbClr val="20202E"/>
                       </a:solidFill>
                       <a:prstDash val="solid"/>
                       <a:round/>
@@ -4915,7 +4915,7 @@
                     </a:lnL>
                     <a:lnR w="12700" cap="flat" cmpd="sng" algn="ctr">
                       <a:solidFill>
-                        <a:srgbClr val="222230"/>
+                        <a:srgbClr val="20202E"/>
                       </a:solidFill>
                       <a:prstDash val="solid"/>
                       <a:round/>
@@ -4924,7 +4924,7 @@
                     </a:lnR>
                     <a:lnT w="12700" cap="flat" cmpd="sng" algn="ctr">
                       <a:solidFill>
-                        <a:srgbClr val="222230"/>
+                        <a:srgbClr val="20202E"/>
                       </a:solidFill>
                       <a:prstDash val="solid"/>
                       <a:round/>
@@ -4933,7 +4933,7 @@
                     </a:lnT>
                     <a:lnB w="12700" cap="flat" cmpd="sng" algn="ctr">
                       <a:solidFill>
-                        <a:srgbClr val="222230"/>
+                        <a:srgbClr val="20202E"/>
                       </a:solidFill>
                       <a:prstDash val="solid"/>
                       <a:round/>
@@ -4951,20 +4951,20 @@
                         <a:buNone/>
                       </a:pPr>
                       <a:r>
-                        <a:rPr lang="en-US" sz="850" dirty="0">
+                        <a:rPr lang="en-US" sz="800" dirty="0">
                           <a:solidFill>
                             <a:srgbClr val="F43F5E"/>
                           </a:solidFill>
                         </a:rPr>
                         <a:t>❌ Opaque binary block</a:t>
                       </a:r>
-                      <a:endParaRPr lang="en-US" sz="850" dirty="0"/>
+                      <a:endParaRPr lang="en-US" sz="800" dirty="0"/>
                     </a:p>
                   </a:txBody>
                   <a:tcPr marL="91440" marR="91440" marT="45720" marB="45720" anchor="ctr">
                     <a:lnL w="12700" cap="flat" cmpd="sng" algn="ctr">
                       <a:solidFill>
-                        <a:srgbClr val="222230"/>
+                        <a:srgbClr val="20202E"/>
                       </a:solidFill>
                       <a:prstDash val="solid"/>
                       <a:round/>
@@ -4973,7 +4973,7 @@
                     </a:lnL>
                     <a:lnR w="12700" cap="flat" cmpd="sng" algn="ctr">
                       <a:solidFill>
-                        <a:srgbClr val="222230"/>
+                        <a:srgbClr val="20202E"/>
                       </a:solidFill>
                       <a:prstDash val="solid"/>
                       <a:round/>
@@ -4982,7 +4982,7 @@
                     </a:lnR>
                     <a:lnT w="12700" cap="flat" cmpd="sng" algn="ctr">
                       <a:solidFill>
-                        <a:srgbClr val="222230"/>
+                        <a:srgbClr val="20202E"/>
                       </a:solidFill>
                       <a:prstDash val="solid"/>
                       <a:round/>
@@ -4991,7 +4991,7 @@
                     </a:lnT>
                     <a:lnB w="12700" cap="flat" cmpd="sng" algn="ctr">
                       <a:solidFill>
-                        <a:srgbClr val="222230"/>
+                        <a:srgbClr val="20202E"/>
                       </a:solidFill>
                       <a:prstDash val="solid"/>
                       <a:round/>
@@ -5009,20 +5009,20 @@
                         <a:buNone/>
                       </a:pPr>
                       <a:r>
-                        <a:rPr lang="en-US" sz="850" dirty="0">
+                        <a:rPr lang="en-US" sz="800" dirty="0">
                           <a:solidFill>
                             <a:srgbClr val="F43F5E"/>
                           </a:solidFill>
                         </a:rPr>
                         <a:t>❌ Generic percentage only</a:t>
                       </a:r>
-                      <a:endParaRPr lang="en-US" sz="850" dirty="0"/>
+                      <a:endParaRPr lang="en-US" sz="800" dirty="0"/>
                     </a:p>
                   </a:txBody>
                   <a:tcPr marL="91440" marR="91440" marT="45720" marB="45720" anchor="ctr">
                     <a:lnL w="12700" cap="flat" cmpd="sng" algn="ctr">
                       <a:solidFill>
-                        <a:srgbClr val="222230"/>
+                        <a:srgbClr val="20202E"/>
                       </a:solidFill>
                       <a:prstDash val="solid"/>
                       <a:round/>
@@ -5031,7 +5031,7 @@
                     </a:lnL>
                     <a:lnR w="12700" cap="flat" cmpd="sng" algn="ctr">
                       <a:solidFill>
-                        <a:srgbClr val="222230"/>
+                        <a:srgbClr val="20202E"/>
                       </a:solidFill>
                       <a:prstDash val="solid"/>
                       <a:round/>
@@ -5040,7 +5040,7 @@
                     </a:lnR>
                     <a:lnT w="12700" cap="flat" cmpd="sng" algn="ctr">
                       <a:solidFill>
-                        <a:srgbClr val="222230"/>
+                        <a:srgbClr val="20202E"/>
                       </a:solidFill>
                       <a:prstDash val="solid"/>
                       <a:round/>
@@ -5049,7 +5049,7 @@
                     </a:lnT>
                     <a:lnB w="12700" cap="flat" cmpd="sng" algn="ctr">
                       <a:solidFill>
-                        <a:srgbClr val="222230"/>
+                        <a:srgbClr val="20202E"/>
                       </a:solidFill>
                       <a:prstDash val="solid"/>
                       <a:round/>
@@ -5067,20 +5067,20 @@
                         <a:buNone/>
                       </a:pPr>
                       <a:r>
-                        <a:rPr lang="en-US" sz="850" b="1" dirty="0">
+                        <a:rPr lang="en-US" sz="800" b="1" dirty="0">
                           <a:solidFill>
                             <a:srgbClr val="10B981"/>
                           </a:solidFill>
                         </a:rPr>
                         <a:t>✅ Exact Trigger Phrases &amp; AI Reasoning</a:t>
                       </a:r>
-                      <a:endParaRPr lang="en-US" sz="850" dirty="0"/>
+                      <a:endParaRPr lang="en-US" sz="800" dirty="0"/>
                     </a:p>
                   </a:txBody>
                   <a:tcPr marL="91440" marR="91440" marT="45720" marB="45720" anchor="ctr">
                     <a:lnL w="12700" cap="flat" cmpd="sng" algn="ctr">
                       <a:solidFill>
-                        <a:srgbClr val="222230"/>
+                        <a:srgbClr val="20202E"/>
                       </a:solidFill>
                       <a:prstDash val="solid"/>
                       <a:round/>
@@ -5089,7 +5089,7 @@
                     </a:lnL>
                     <a:lnR w="12700" cap="flat" cmpd="sng" algn="ctr">
                       <a:solidFill>
-                        <a:srgbClr val="222230"/>
+                        <a:srgbClr val="20202E"/>
                       </a:solidFill>
                       <a:prstDash val="solid"/>
                       <a:round/>
@@ -5098,7 +5098,7 @@
                     </a:lnR>
                     <a:lnT w="12700" cap="flat" cmpd="sng" algn="ctr">
                       <a:solidFill>
-                        <a:srgbClr val="222230"/>
+                        <a:srgbClr val="20202E"/>
                       </a:solidFill>
                       <a:prstDash val="solid"/>
                       <a:round/>
@@ -5107,7 +5107,7 @@
                     </a:lnT>
                     <a:lnB w="12700" cap="flat" cmpd="sng" algn="ctr">
                       <a:solidFill>
-                        <a:srgbClr val="222230"/>
+                        <a:srgbClr val="20202E"/>
                       </a:solidFill>
                       <a:prstDash val="solid"/>
                       <a:round/>
@@ -5129,12 +5129,12 @@
         </p:nvSpPr>
         <p:spPr>
           <a:xfrm>
-            <a:off x="548640" y="4389120"/>
-            <a:ext cx="11091672" cy="2011680"/>
+            <a:off x="548640" y="4206240"/>
+            <a:ext cx="11091672" cy="1828800"/>
           </a:xfrm>
           <a:prstGeom prst="rect">
             <a:avLst>
-              <a:gd name="adj" fmla="val 2273"/>
+              <a:gd name="adj" fmla="val 2000"/>
             </a:avLst>
           </a:prstGeom>
           <a:solidFill>
@@ -5156,8 +5156,8 @@
         </p:nvSpPr>
         <p:spPr>
           <a:xfrm>
-            <a:off x="777240" y="4526280"/>
-            <a:ext cx="10607040" cy="274320"/>
+            <a:off x="777240" y="4343400"/>
+            <a:ext cx="10607040" cy="228600"/>
           </a:xfrm>
           <a:prstGeom prst="rect">
             <a:avLst/>
@@ -5173,7 +5173,7 @@
               <a:buNone/>
             </a:pPr>
             <a:r>
-              <a:rPr lang="en-US" sz="1100" b="1" dirty="0">
+              <a:rPr lang="en-US" sz="1050" b="1" dirty="0">
                 <a:solidFill>
                   <a:srgbClr val="F3DF8A"/>
                 </a:solidFill>
@@ -5183,7 +5183,7 @@
               </a:rPr>
               <a:t>💡 Concrete Evasion Proof ("The Aha! Moment"):</a:t>
             </a:r>
-            <a:endParaRPr lang="en-US" sz="1100" dirty="0"/>
+            <a:endParaRPr lang="en-US" sz="1050" dirty="0"/>
           </a:p>
         </p:txBody>
       </p:sp>
@@ -5195,8 +5195,8 @@
         </p:nvSpPr>
         <p:spPr>
           <a:xfrm>
-            <a:off x="777240" y="4846320"/>
-            <a:ext cx="10607040" cy="1280160"/>
+            <a:off x="777240" y="4617720"/>
+            <a:ext cx="10607040" cy="1234440"/>
           </a:xfrm>
           <a:prstGeom prst="rect">
             <a:avLst/>
@@ -5210,12 +5210,12 @@
           <a:p>
             <a:pPr indent="0" marL="0">
               <a:lnSpc>
-                <a:spcPts val="1400"/>
+                <a:spcPts val="1300"/>
               </a:lnSpc>
               <a:buNone/>
             </a:pPr>
             <a:r>
-              <a:rPr lang="en-US" sz="950" dirty="0">
+              <a:rPr lang="en-US" sz="900" dirty="0">
                 <a:solidFill>
                   <a:srgbClr val="F8FAFC"/>
                 </a:solidFill>
@@ -5225,17 +5225,17 @@
               </a:rPr>
               <a:t>Raw Input: "Y0UR SB1 ACC0UNT WILL BLCK T0DAY. UPDATE K-Y-C IMMED1ATE: http://bit.ly/sbi-kyc"</a:t>
             </a:r>
-            <a:endParaRPr lang="en-US" sz="950" dirty="0"/>
+            <a:endParaRPr lang="en-US" sz="900" dirty="0"/>
           </a:p>
           <a:p>
             <a:pPr indent="0" marL="0">
               <a:lnSpc>
-                <a:spcPts val="1400"/>
+                <a:spcPts val="1300"/>
               </a:lnSpc>
               <a:buNone/>
             </a:pPr>
             <a:r>
-              <a:rPr lang="en-US" sz="950" dirty="0">
+              <a:rPr lang="en-US" sz="900" dirty="0">
                 <a:solidFill>
                   <a:srgbClr val="F8FAFC"/>
                 </a:solidFill>
@@ -5245,17 +5245,17 @@
               </a:rPr>
               <a:t>• Traditional Filter: PASS (0% keywords match standard English dictionary; "BLCK" and "SB1" are non-words).</a:t>
             </a:r>
-            <a:endParaRPr lang="en-US" sz="950" dirty="0"/>
+            <a:endParaRPr lang="en-US" sz="900" dirty="0"/>
           </a:p>
           <a:p>
             <a:pPr indent="0" marL="0">
               <a:lnSpc>
-                <a:spcPts val="1400"/>
+                <a:spcPts val="1300"/>
               </a:lnSpc>
               <a:buNone/>
             </a:pPr>
             <a:r>
-              <a:rPr lang="en-US" sz="950" dirty="0">
+              <a:rPr lang="en-US" sz="900" dirty="0">
                 <a:solidFill>
                   <a:srgbClr val="F8FAFC"/>
                 </a:solidFill>
@@ -5265,7 +5265,7 @@
               </a:rPr>
               <a:t>• Kavach AI: 100% HIGH RISK (Normalized: "block", "sbi", "kyc" | Malicious shortener flagged in 35ms).</a:t>
             </a:r>
-            <a:endParaRPr lang="en-US" sz="950" dirty="0"/>
+            <a:endParaRPr lang="en-US" sz="900" dirty="0"/>
           </a:p>
         </p:txBody>
       </p:sp>
@@ -5317,8 +5317,8 @@
         </p:blipFill>
         <p:spPr>
           <a:xfrm>
-            <a:off x="548640" y="320040"/>
-            <a:ext cx="594360" cy="594360"/>
+            <a:off x="548640" y="256032"/>
+            <a:ext cx="475488" cy="475488"/>
           </a:xfrm>
           <a:prstGeom prst="rect">
             <a:avLst/>
@@ -5333,8 +5333,8 @@
         </p:nvSpPr>
         <p:spPr>
           <a:xfrm>
-            <a:off x="1280160" y="320040"/>
-            <a:ext cx="9601200" cy="228600"/>
+            <a:off x="1143000" y="256032"/>
+            <a:ext cx="10424160" cy="182880"/>
           </a:xfrm>
           <a:prstGeom prst="rect">
             <a:avLst/>
@@ -5350,7 +5350,7 @@
               <a:buNone/>
             </a:pPr>
             <a:r>
-              <a:rPr lang="en-US" sz="900" b="1" dirty="0">
+              <a:rPr lang="en-US" sz="850" b="1" dirty="0">
                 <a:solidFill>
                   <a:srgbClr val="D4AF37"/>
                 </a:solidFill>
@@ -5360,7 +5360,7 @@
               </a:rPr>
               <a:t>🛡️ SOLUTION OVERVIEW • CORE DEFENSE PILLARS</a:t>
             </a:r>
-            <a:endParaRPr lang="en-US" sz="900" dirty="0"/>
+            <a:endParaRPr lang="en-US" sz="850" dirty="0"/>
           </a:p>
         </p:txBody>
       </p:sp>
@@ -5372,8 +5372,8 @@
         </p:nvSpPr>
         <p:spPr>
           <a:xfrm>
-            <a:off x="1280160" y="594360"/>
-            <a:ext cx="10241280" cy="411480"/>
+            <a:off x="1143000" y="475488"/>
+            <a:ext cx="10424160" cy="365760"/>
           </a:xfrm>
           <a:prstGeom prst="rect">
             <a:avLst/>
@@ -5389,7 +5389,7 @@
               <a:buNone/>
             </a:pPr>
             <a:r>
-              <a:rPr lang="en-US" sz="1800" b="1" dirty="0">
+              <a:rPr lang="en-US" sz="1600" b="1" dirty="0">
                 <a:solidFill>
                   <a:srgbClr val="F8FAFC"/>
                 </a:solidFill>
@@ -5399,7 +5399,7 @@
               </a:rPr>
               <a:t>Kavach AI: Dual-Engine Defense Architecture</a:t>
             </a:r>
-            <a:endParaRPr lang="en-US" sz="1800" dirty="0"/>
+            <a:endParaRPr lang="en-US" sz="1600" dirty="0"/>
           </a:p>
         </p:txBody>
       </p:sp>
@@ -5411,7 +5411,7 @@
         </p:nvSpPr>
         <p:spPr>
           <a:xfrm>
-            <a:off x="548640" y="1097280"/>
+            <a:off x="548640" y="960120"/>
             <a:ext cx="11091672" cy="0"/>
           </a:xfrm>
           <a:prstGeom prst="line">
@@ -5420,7 +5420,7 @@
           <a:noFill/>
           <a:ln w="12700">
             <a:solidFill>
-              <a:srgbClr val="20202C"/>
+              <a:srgbClr val="1C1C28"/>
             </a:solidFill>
             <a:prstDash val="solid"/>
           </a:ln>
@@ -5434,12 +5434,12 @@
         </p:nvSpPr>
         <p:spPr>
           <a:xfrm>
-            <a:off x="548640" y="1280160"/>
+            <a:off x="548640" y="1115568"/>
             <a:ext cx="2697480" cy="2377440"/>
           </a:xfrm>
           <a:prstGeom prst="rect">
             <a:avLst>
-              <a:gd name="adj" fmla="val 1923"/>
+              <a:gd name="adj" fmla="val 1538"/>
             </a:avLst>
           </a:prstGeom>
           <a:solidFill>
@@ -5447,7 +5447,7 @@
           </a:solidFill>
           <a:ln w="12700">
             <a:solidFill>
-              <a:srgbClr val="222230"/>
+              <a:srgbClr val="20202E"/>
             </a:solidFill>
             <a:prstDash val="solid"/>
           </a:ln>
@@ -5461,7 +5461,7 @@
         </p:nvSpPr>
         <p:spPr>
           <a:xfrm>
-            <a:off x="685800" y="1417320"/>
+            <a:off x="685800" y="1252728"/>
             <a:ext cx="548640" cy="320040"/>
           </a:xfrm>
           <a:prstGeom prst="rect">
@@ -5500,7 +5500,7 @@
         </p:nvSpPr>
         <p:spPr>
           <a:xfrm>
-            <a:off x="1280160" y="1463040"/>
+            <a:off x="1280160" y="1298448"/>
             <a:ext cx="1828800" cy="502920"/>
           </a:xfrm>
           <a:prstGeom prst="rect">
@@ -5517,7 +5517,7 @@
               <a:buNone/>
             </a:pPr>
             <a:r>
-              <a:rPr lang="en-US" sz="1000" b="1" dirty="0">
+              <a:rPr lang="en-US" sz="950" b="1" dirty="0">
                 <a:solidFill>
                   <a:srgbClr val="F8FAFC"/>
                 </a:solidFill>
@@ -5527,7 +5527,7 @@
               </a:rPr>
               <a:t>3-Step Levenshtein Normalizer</a:t>
             </a:r>
-            <a:endParaRPr lang="en-US" sz="1000" dirty="0"/>
+            <a:endParaRPr lang="en-US" sz="950" dirty="0"/>
           </a:p>
         </p:txBody>
       </p:sp>
@@ -5539,7 +5539,7 @@
         </p:nvSpPr>
         <p:spPr>
           <a:xfrm>
-            <a:off x="685800" y="2057400"/>
+            <a:off x="685800" y="1892808"/>
             <a:ext cx="2423160" cy="1463040"/>
           </a:xfrm>
           <a:prstGeom prst="rect">
@@ -5554,12 +5554,12 @@
           <a:p>
             <a:pPr indent="0" marL="0">
               <a:lnSpc>
-                <a:spcPts val="1200"/>
+                <a:spcPts val="1100"/>
               </a:lnSpc>
               <a:buNone/>
             </a:pPr>
             <a:r>
-              <a:rPr lang="en-US" sz="850" dirty="0">
+              <a:rPr lang="en-US" sz="800" dirty="0">
                 <a:solidFill>
                   <a:srgbClr val="94A3B8"/>
                 </a:solidFill>
@@ -5569,7 +5569,7 @@
               </a:rPr>
               <a:t>Strips hyphens (K-Y-C -&gt; KYC), reverses leetspeak (0-&gt;o, @-&gt;a), and computes length-adaptive edit distance in &lt;15ms.</a:t>
             </a:r>
-            <a:endParaRPr lang="en-US" sz="850" dirty="0"/>
+            <a:endParaRPr lang="en-US" sz="800" dirty="0"/>
           </a:p>
         </p:txBody>
       </p:sp>
@@ -5581,12 +5581,12 @@
         </p:nvSpPr>
         <p:spPr>
           <a:xfrm>
-            <a:off x="3383280" y="1280160"/>
+            <a:off x="3383280" y="1115568"/>
             <a:ext cx="2697480" cy="2377440"/>
           </a:xfrm>
           <a:prstGeom prst="rect">
             <a:avLst>
-              <a:gd name="adj" fmla="val 1923"/>
+              <a:gd name="adj" fmla="val 1538"/>
             </a:avLst>
           </a:prstGeom>
           <a:solidFill>
@@ -5594,7 +5594,7 @@
           </a:solidFill>
           <a:ln w="12700">
             <a:solidFill>
-              <a:srgbClr val="222230"/>
+              <a:srgbClr val="20202E"/>
             </a:solidFill>
             <a:prstDash val="solid"/>
           </a:ln>
@@ -5608,7 +5608,7 @@
         </p:nvSpPr>
         <p:spPr>
           <a:xfrm>
-            <a:off x="3520440" y="1417320"/>
+            <a:off x="3520440" y="1252728"/>
             <a:ext cx="548640" cy="320040"/>
           </a:xfrm>
           <a:prstGeom prst="rect">
@@ -5647,7 +5647,7 @@
         </p:nvSpPr>
         <p:spPr>
           <a:xfrm>
-            <a:off x="4114800" y="1463040"/>
+            <a:off x="4114800" y="1298448"/>
             <a:ext cx="1828800" cy="502920"/>
           </a:xfrm>
           <a:prstGeom prst="rect">
@@ -5664,7 +5664,7 @@
               <a:buNone/>
             </a:pPr>
             <a:r>
-              <a:rPr lang="en-US" sz="1000" b="1" dirty="0">
+              <a:rPr lang="en-US" sz="950" b="1" dirty="0">
                 <a:solidFill>
                   <a:srgbClr val="F8FAFC"/>
                 </a:solidFill>
@@ -5674,7 +5674,7 @@
               </a:rPr>
               <a:t>350+ Safe-Word Whitelist Shield</a:t>
             </a:r>
-            <a:endParaRPr lang="en-US" sz="1000" dirty="0"/>
+            <a:endParaRPr lang="en-US" sz="950" dirty="0"/>
           </a:p>
         </p:txBody>
       </p:sp>
@@ -5686,7 +5686,7 @@
         </p:nvSpPr>
         <p:spPr>
           <a:xfrm>
-            <a:off x="3520440" y="2057400"/>
+            <a:off x="3520440" y="1892808"/>
             <a:ext cx="2423160" cy="1463040"/>
           </a:xfrm>
           <a:prstGeom prst="rect">
@@ -5701,12 +5701,12 @@
           <a:p>
             <a:pPr indent="0" marL="0">
               <a:lnSpc>
-                <a:spcPts val="1200"/>
+                <a:spcPts val="1100"/>
               </a:lnSpc>
               <a:buNone/>
             </a:pPr>
             <a:r>
-              <a:rPr lang="en-US" sz="850" dirty="0">
+              <a:rPr lang="en-US" sz="800" dirty="0">
                 <a:solidFill>
                   <a:srgbClr val="94A3B8"/>
                 </a:solidFill>
@@ -5716,7 +5716,7 @@
               </a:rPr>
               <a:t>Protects conversational words (chahte, job, ghar, aap, bhejo) from false-positive fuzzy distance distortions.</a:t>
             </a:r>
-            <a:endParaRPr lang="en-US" sz="850" dirty="0"/>
+            <a:endParaRPr lang="en-US" sz="800" dirty="0"/>
           </a:p>
         </p:txBody>
       </p:sp>
@@ -5728,12 +5728,12 @@
         </p:nvSpPr>
         <p:spPr>
           <a:xfrm>
-            <a:off x="548640" y="3794760"/>
+            <a:off x="548640" y="3630168"/>
             <a:ext cx="2697480" cy="2377440"/>
           </a:xfrm>
           <a:prstGeom prst="rect">
             <a:avLst>
-              <a:gd name="adj" fmla="val 1923"/>
+              <a:gd name="adj" fmla="val 1538"/>
             </a:avLst>
           </a:prstGeom>
           <a:solidFill>
@@ -5741,7 +5741,7 @@
           </a:solidFill>
           <a:ln w="12700">
             <a:solidFill>
-              <a:srgbClr val="222230"/>
+              <a:srgbClr val="20202E"/>
             </a:solidFill>
             <a:prstDash val="solid"/>
           </a:ln>
@@ -5755,7 +5755,7 @@
         </p:nvSpPr>
         <p:spPr>
           <a:xfrm>
-            <a:off x="685800" y="3931920"/>
+            <a:off x="685800" y="3767328"/>
             <a:ext cx="548640" cy="320040"/>
           </a:xfrm>
           <a:prstGeom prst="rect">
@@ -5794,7 +5794,7 @@
         </p:nvSpPr>
         <p:spPr>
           <a:xfrm>
-            <a:off x="1280160" y="3977640"/>
+            <a:off x="1280160" y="3813048"/>
             <a:ext cx="1828800" cy="502920"/>
           </a:xfrm>
           <a:prstGeom prst="rect">
@@ -5811,7 +5811,7 @@
               <a:buNone/>
             </a:pPr>
             <a:r>
-              <a:rPr lang="en-US" sz="1000" b="1" dirty="0">
+              <a:rPr lang="en-US" sz="950" b="1" dirty="0">
                 <a:solidFill>
                   <a:srgbClr val="F8FAFC"/>
                 </a:solidFill>
@@ -5821,7 +5821,7 @@
               </a:rPr>
               <a:t>Multi-Model Gemini AI Cascade</a:t>
             </a:r>
-            <a:endParaRPr lang="en-US" sz="1000" dirty="0"/>
+            <a:endParaRPr lang="en-US" sz="950" dirty="0"/>
           </a:p>
         </p:txBody>
       </p:sp>
@@ -5833,7 +5833,7 @@
         </p:nvSpPr>
         <p:spPr>
           <a:xfrm>
-            <a:off x="685800" y="4572000"/>
+            <a:off x="685800" y="4407408"/>
             <a:ext cx="2423160" cy="1463040"/>
           </a:xfrm>
           <a:prstGeom prst="rect">
@@ -5848,12 +5848,12 @@
           <a:p>
             <a:pPr indent="0" marL="0">
               <a:lnSpc>
-                <a:spcPts val="1200"/>
+                <a:spcPts val="1100"/>
               </a:lnSpc>
               <a:buNone/>
             </a:pPr>
             <a:r>
-              <a:rPr lang="en-US" sz="850" dirty="0">
+              <a:rPr lang="en-US" sz="800" dirty="0">
                 <a:solidFill>
                   <a:srgbClr val="94A3B8"/>
                 </a:solidFill>
@@ -5863,7 +5863,7 @@
               </a:rPr>
               <a:t>Fuses 40% Deterministic Rule Engine with 60% Gemini Flash AI across a 6-model failover pool for 0% downtime.</a:t>
             </a:r>
-            <a:endParaRPr lang="en-US" sz="850" dirty="0"/>
+            <a:endParaRPr lang="en-US" sz="800" dirty="0"/>
           </a:p>
         </p:txBody>
       </p:sp>
@@ -5875,12 +5875,12 @@
         </p:nvSpPr>
         <p:spPr>
           <a:xfrm>
-            <a:off x="3383280" y="3794760"/>
+            <a:off x="3383280" y="3630168"/>
             <a:ext cx="2697480" cy="2377440"/>
           </a:xfrm>
           <a:prstGeom prst="rect">
             <a:avLst>
-              <a:gd name="adj" fmla="val 1923"/>
+              <a:gd name="adj" fmla="val 1538"/>
             </a:avLst>
           </a:prstGeom>
           <a:solidFill>
@@ -5888,7 +5888,7 @@
           </a:solidFill>
           <a:ln w="12700">
             <a:solidFill>
-              <a:srgbClr val="222230"/>
+              <a:srgbClr val="20202E"/>
             </a:solidFill>
             <a:prstDash val="solid"/>
           </a:ln>
@@ -5902,7 +5902,7 @@
         </p:nvSpPr>
         <p:spPr>
           <a:xfrm>
-            <a:off x="3520440" y="3931920"/>
+            <a:off x="3520440" y="3767328"/>
             <a:ext cx="548640" cy="320040"/>
           </a:xfrm>
           <a:prstGeom prst="rect">
@@ -5941,7 +5941,7 @@
         </p:nvSpPr>
         <p:spPr>
           <a:xfrm>
-            <a:off x="4114800" y="3977640"/>
+            <a:off x="4114800" y="3813048"/>
             <a:ext cx="1828800" cy="502920"/>
           </a:xfrm>
           <a:prstGeom prst="rect">
@@ -5958,7 +5958,7 @@
               <a:buNone/>
             </a:pPr>
             <a:r>
-              <a:rPr lang="en-US" sz="1000" b="1" dirty="0">
+              <a:rPr lang="en-US" sz="950" b="1" dirty="0">
                 <a:solidFill>
                   <a:srgbClr val="F8FAFC"/>
                 </a:solidFill>
@@ -5968,7 +5968,7 @@
               </a:rPr>
               <a:t>Turso Cloud Threat Intelligence</a:t>
             </a:r>
-            <a:endParaRPr lang="en-US" sz="1000" dirty="0"/>
+            <a:endParaRPr lang="en-US" sz="950" dirty="0"/>
           </a:p>
         </p:txBody>
       </p:sp>
@@ -5980,7 +5980,7 @@
         </p:nvSpPr>
         <p:spPr>
           <a:xfrm>
-            <a:off x="3520440" y="4572000"/>
+            <a:off x="3520440" y="4407408"/>
             <a:ext cx="2423160" cy="1463040"/>
           </a:xfrm>
           <a:prstGeom prst="rect">
@@ -5995,12 +5995,12 @@
           <a:p>
             <a:pPr indent="0" marL="0">
               <a:lnSpc>
-                <a:spcPts val="1200"/>
+                <a:spcPts val="1100"/>
               </a:lnSpc>
               <a:buNone/>
             </a:pPr>
             <a:r>
-              <a:rPr lang="en-US" sz="850" dirty="0">
+              <a:rPr lang="en-US" sz="800" dirty="0">
                 <a:solidFill>
                   <a:srgbClr val="94A3B8"/>
                 </a:solidFill>
@@ -6010,7 +6010,7 @@
               </a:rPr>
               <a:t>Real-time LibSQL database auditing, structured scam categorization, and live threat feed telemetry.</a:t>
             </a:r>
-            <a:endParaRPr lang="en-US" sz="850" dirty="0"/>
+            <a:endParaRPr lang="en-US" sz="800" dirty="0"/>
           </a:p>
         </p:txBody>
       </p:sp>
@@ -6022,12 +6022,12 @@
         </p:nvSpPr>
         <p:spPr>
           <a:xfrm>
-            <a:off x="6400800" y="1280160"/>
-            <a:ext cx="5239512" cy="5120640"/>
+            <a:off x="6400800" y="1115568"/>
+            <a:ext cx="5239512" cy="4937760"/>
           </a:xfrm>
           <a:prstGeom prst="rect">
             <a:avLst>
-              <a:gd name="adj" fmla="val 893"/>
+              <a:gd name="adj" fmla="val 741"/>
             </a:avLst>
           </a:prstGeom>
           <a:solidFill>
@@ -6035,7 +6035,7 @@
           </a:solidFill>
           <a:ln w="12700">
             <a:solidFill>
-              <a:srgbClr val="222230"/>
+              <a:srgbClr val="20202E"/>
             </a:solidFill>
             <a:prstDash val="solid"/>
           </a:ln>
@@ -6056,8 +6056,8 @@
         </p:blipFill>
         <p:spPr>
           <a:xfrm>
-            <a:off x="6537960" y="1417320"/>
-            <a:ext cx="4965192" cy="2926080"/>
+            <a:off x="6537960" y="1261872"/>
+            <a:ext cx="4965192" cy="2834640"/>
           </a:xfrm>
           <a:prstGeom prst="rect">
             <a:avLst/>
@@ -6072,8 +6072,8 @@
         </p:nvSpPr>
         <p:spPr>
           <a:xfrm>
-            <a:off x="6583680" y="4480560"/>
-            <a:ext cx="4846320" cy="274320"/>
+            <a:off x="6583680" y="4251960"/>
+            <a:ext cx="4846320" cy="228600"/>
           </a:xfrm>
           <a:prstGeom prst="rect">
             <a:avLst/>
@@ -6089,7 +6089,7 @@
               <a:buNone/>
             </a:pPr>
             <a:r>
-              <a:rPr lang="en-US" sz="1100" b="1" dirty="0">
+              <a:rPr lang="en-US" sz="1000" b="1" dirty="0">
                 <a:solidFill>
                   <a:srgbClr val="F3DF8A"/>
                 </a:solidFill>
@@ -6099,7 +6099,7 @@
               </a:rPr>
               <a:t>✦ Live Threat Ingestion Terminal:</a:t>
             </a:r>
-            <a:endParaRPr lang="en-US" sz="1100" dirty="0"/>
+            <a:endParaRPr lang="en-US" sz="1000" dirty="0"/>
           </a:p>
         </p:txBody>
       </p:sp>
@@ -6111,7 +6111,7 @@
         </p:nvSpPr>
         <p:spPr>
           <a:xfrm>
-            <a:off x="6583680" y="4800600"/>
+            <a:off x="6583680" y="4526280"/>
             <a:ext cx="4846320" cy="1371600"/>
           </a:xfrm>
           <a:prstGeom prst="rect">
@@ -6126,12 +6126,12 @@
           <a:p>
             <a:pPr indent="0" marL="0">
               <a:lnSpc>
-                <a:spcPts val="1300"/>
+                <a:spcPts val="1200"/>
               </a:lnSpc>
               <a:buNone/>
             </a:pPr>
             <a:r>
-              <a:rPr lang="en-US" sz="850" dirty="0">
+              <a:rPr lang="en-US" sz="800" dirty="0">
                 <a:solidFill>
                   <a:srgbClr val="94A3B8"/>
                 </a:solidFill>
@@ -6141,17 +6141,17 @@
               </a:rPr>
               <a:t>• Instant preset loading for YouTube scams, e-Challan APKs, SBI KYC, and Bijli cut threats.</a:t>
             </a:r>
-            <a:endParaRPr lang="en-US" sz="850" dirty="0"/>
+            <a:endParaRPr lang="en-US" sz="800" dirty="0"/>
           </a:p>
           <a:p>
             <a:pPr indent="0" marL="0">
               <a:lnSpc>
-                <a:spcPts val="1300"/>
+                <a:spcPts val="1200"/>
               </a:lnSpc>
               <a:buNone/>
             </a:pPr>
             <a:r>
-              <a:rPr lang="en-US" sz="850" dirty="0">
+              <a:rPr lang="en-US" sz="800" dirty="0">
                 <a:solidFill>
                   <a:srgbClr val="94A3B8"/>
                 </a:solidFill>
@@ -6161,17 +6161,17 @@
               </a:rPr>
               <a:t>• Sub-pixel responsive input field supporting multi-dialect Indian text.</a:t>
             </a:r>
-            <a:endParaRPr lang="en-US" sz="850" dirty="0"/>
+            <a:endParaRPr lang="en-US" sz="800" dirty="0"/>
           </a:p>
           <a:p>
             <a:pPr indent="0" marL="0">
               <a:lnSpc>
-                <a:spcPts val="1300"/>
+                <a:spcPts val="1200"/>
               </a:lnSpc>
               <a:buNone/>
             </a:pPr>
             <a:r>
-              <a:rPr lang="en-US" sz="850" dirty="0">
+              <a:rPr lang="en-US" sz="800" dirty="0">
                 <a:solidFill>
                   <a:srgbClr val="94A3B8"/>
                 </a:solidFill>
@@ -6181,7 +6181,7 @@
               </a:rPr>
               <a:t>• Dual-engine scoring trigger with real-time feedback.</a:t>
             </a:r>
-            <a:endParaRPr lang="en-US" sz="850" dirty="0"/>
+            <a:endParaRPr lang="en-US" sz="800" dirty="0"/>
           </a:p>
         </p:txBody>
       </p:sp>
@@ -6233,8 +6233,8 @@
         </p:blipFill>
         <p:spPr>
           <a:xfrm>
-            <a:off x="548640" y="320040"/>
-            <a:ext cx="594360" cy="594360"/>
+            <a:off x="548640" y="256032"/>
+            <a:ext cx="475488" cy="475488"/>
           </a:xfrm>
           <a:prstGeom prst="rect">
             <a:avLst/>
@@ -6249,8 +6249,8 @@
         </p:nvSpPr>
         <p:spPr>
           <a:xfrm>
-            <a:off x="1280160" y="320040"/>
-            <a:ext cx="9601200" cy="228600"/>
+            <a:off x="1143000" y="256032"/>
+            <a:ext cx="10424160" cy="182880"/>
           </a:xfrm>
           <a:prstGeom prst="rect">
             <a:avLst/>
@@ -6266,7 +6266,7 @@
               <a:buNone/>
             </a:pPr>
             <a:r>
-              <a:rPr lang="en-US" sz="900" b="1" dirty="0">
+              <a:rPr lang="en-US" sz="850" b="1" dirty="0">
                 <a:solidFill>
                   <a:srgbClr val="D4AF37"/>
                 </a:solidFill>
@@ -6276,7 +6276,7 @@
               </a:rPr>
               <a:t>🏗️ SYSTEM ARCHITECTURE • DATA PIPELINE</a:t>
             </a:r>
-            <a:endParaRPr lang="en-US" sz="900" dirty="0"/>
+            <a:endParaRPr lang="en-US" sz="850" dirty="0"/>
           </a:p>
         </p:txBody>
       </p:sp>
@@ -6288,8 +6288,8 @@
         </p:nvSpPr>
         <p:spPr>
           <a:xfrm>
-            <a:off x="1280160" y="594360"/>
-            <a:ext cx="10241280" cy="411480"/>
+            <a:off x="1143000" y="475488"/>
+            <a:ext cx="10424160" cy="365760"/>
           </a:xfrm>
           <a:prstGeom prst="rect">
             <a:avLst/>
@@ -6305,7 +6305,7 @@
               <a:buNone/>
             </a:pPr>
             <a:r>
-              <a:rPr lang="en-US" sz="1800" b="1" dirty="0">
+              <a:rPr lang="en-US" sz="1600" b="1" dirty="0">
                 <a:solidFill>
                   <a:srgbClr val="F8FAFC"/>
                 </a:solidFill>
@@ -6315,7 +6315,7 @@
               </a:rPr>
               <a:t>End-to-End Threat Processing Pipeline &amp; Stack</a:t>
             </a:r>
-            <a:endParaRPr lang="en-US" sz="1800" dirty="0"/>
+            <a:endParaRPr lang="en-US" sz="1600" dirty="0"/>
           </a:p>
         </p:txBody>
       </p:sp>
@@ -6327,7 +6327,7 @@
         </p:nvSpPr>
         <p:spPr>
           <a:xfrm>
-            <a:off x="548640" y="1097280"/>
+            <a:off x="548640" y="960120"/>
             <a:ext cx="11091672" cy="0"/>
           </a:xfrm>
           <a:prstGeom prst="line">
@@ -6336,7 +6336,7 @@
           <a:noFill/>
           <a:ln w="12700">
             <a:solidFill>
-              <a:srgbClr val="20202C"/>
+              <a:srgbClr val="1C1C28"/>
             </a:solidFill>
             <a:prstDash val="solid"/>
           </a:ln>
@@ -6350,12 +6350,12 @@
         </p:nvSpPr>
         <p:spPr>
           <a:xfrm>
-            <a:off x="548640" y="1280160"/>
-            <a:ext cx="2148840" cy="2011680"/>
+            <a:off x="548640" y="1115568"/>
+            <a:ext cx="2148840" cy="1920240"/>
           </a:xfrm>
           <a:prstGeom prst="rect">
             <a:avLst>
-              <a:gd name="adj" fmla="val 2273"/>
+              <a:gd name="adj" fmla="val 1905"/>
             </a:avLst>
           </a:prstGeom>
           <a:solidFill>
@@ -6363,7 +6363,7 @@
           </a:solidFill>
           <a:ln w="12700">
             <a:solidFill>
-              <a:srgbClr val="222230"/>
+              <a:srgbClr val="20202E"/>
             </a:solidFill>
             <a:prstDash val="solid"/>
           </a:ln>
@@ -6377,8 +6377,8 @@
         </p:nvSpPr>
         <p:spPr>
           <a:xfrm>
-            <a:off x="685800" y="1417320"/>
-            <a:ext cx="1874520" cy="228600"/>
+            <a:off x="685800" y="1234440"/>
+            <a:ext cx="1874520" cy="201168"/>
           </a:xfrm>
           <a:prstGeom prst="rect">
             <a:avLst/>
@@ -6394,7 +6394,7 @@
               <a:buNone/>
             </a:pPr>
             <a:r>
-              <a:rPr lang="en-US" sz="850" b="1" dirty="0">
+              <a:rPr lang="en-US" sz="800" b="1" dirty="0">
                 <a:solidFill>
                   <a:srgbClr val="D4AF37"/>
                 </a:solidFill>
@@ -6404,7 +6404,7 @@
               </a:rPr>
               <a:t>Step 1</a:t>
             </a:r>
-            <a:endParaRPr lang="en-US" sz="850" dirty="0"/>
+            <a:endParaRPr lang="en-US" sz="800" dirty="0"/>
           </a:p>
         </p:txBody>
       </p:sp>
@@ -6416,8 +6416,8 @@
         </p:nvSpPr>
         <p:spPr>
           <a:xfrm>
-            <a:off x="685800" y="1691640"/>
-            <a:ext cx="1874520" cy="411480"/>
+            <a:off x="685800" y="1481328"/>
+            <a:ext cx="1874520" cy="384048"/>
           </a:xfrm>
           <a:prstGeom prst="rect">
             <a:avLst/>
@@ -6433,7 +6433,7 @@
               <a:buNone/>
             </a:pPr>
             <a:r>
-              <a:rPr lang="en-US" sz="1000" b="1" dirty="0">
+              <a:rPr lang="en-US" sz="950" b="1" dirty="0">
                 <a:solidFill>
                   <a:srgbClr val="F8FAFC"/>
                 </a:solidFill>
@@ -6443,7 +6443,7 @@
               </a:rPr>
               <a:t>Raw Ingestion</a:t>
             </a:r>
-            <a:endParaRPr lang="en-US" sz="1000" dirty="0"/>
+            <a:endParaRPr lang="en-US" sz="950" dirty="0"/>
           </a:p>
         </p:txBody>
       </p:sp>
@@ -6455,7 +6455,7 @@
         </p:nvSpPr>
         <p:spPr>
           <a:xfrm>
-            <a:off x="685800" y="2148840"/>
+            <a:off x="685800" y="1920240"/>
             <a:ext cx="1874520" cy="1005840"/>
           </a:xfrm>
           <a:prstGeom prst="rect">
@@ -6475,7 +6475,7 @@
               <a:buNone/>
             </a:pPr>
             <a:r>
-              <a:rPr lang="en-US" sz="800" dirty="0">
+              <a:rPr lang="en-US" sz="750" dirty="0">
                 <a:solidFill>
                   <a:srgbClr val="94A3B8"/>
                 </a:solidFill>
@@ -6485,7 +6485,7 @@
               </a:rPr>
               <a:t>Strips hyphens, collapses spaced letters &amp; leetspeak.</a:t>
             </a:r>
-            <a:endParaRPr lang="en-US" sz="800" dirty="0"/>
+            <a:endParaRPr lang="en-US" sz="750" dirty="0"/>
           </a:p>
         </p:txBody>
       </p:sp>
@@ -6497,12 +6497,12 @@
         </p:nvSpPr>
         <p:spPr>
           <a:xfrm>
-            <a:off x="2788920" y="1280160"/>
-            <a:ext cx="2148840" cy="2011680"/>
+            <a:off x="2788920" y="1115568"/>
+            <a:ext cx="2148840" cy="1920240"/>
           </a:xfrm>
           <a:prstGeom prst="rect">
             <a:avLst>
-              <a:gd name="adj" fmla="val 2273"/>
+              <a:gd name="adj" fmla="val 1905"/>
             </a:avLst>
           </a:prstGeom>
           <a:solidFill>
@@ -6510,7 +6510,7 @@
           </a:solidFill>
           <a:ln w="12700">
             <a:solidFill>
-              <a:srgbClr val="222230"/>
+              <a:srgbClr val="20202E"/>
             </a:solidFill>
             <a:prstDash val="solid"/>
           </a:ln>
@@ -6524,8 +6524,8 @@
         </p:nvSpPr>
         <p:spPr>
           <a:xfrm>
-            <a:off x="2926080" y="1417320"/>
-            <a:ext cx="1874520" cy="228600"/>
+            <a:off x="2926080" y="1234440"/>
+            <a:ext cx="1874520" cy="201168"/>
           </a:xfrm>
           <a:prstGeom prst="rect">
             <a:avLst/>
@@ -6541,7 +6541,7 @@
               <a:buNone/>
             </a:pPr>
             <a:r>
-              <a:rPr lang="en-US" sz="850" b="1" dirty="0">
+              <a:rPr lang="en-US" sz="800" b="1" dirty="0">
                 <a:solidFill>
                   <a:srgbClr val="D4AF37"/>
                 </a:solidFill>
@@ -6551,7 +6551,7 @@
               </a:rPr>
               <a:t>Step 2</a:t>
             </a:r>
-            <a:endParaRPr lang="en-US" sz="850" dirty="0"/>
+            <a:endParaRPr lang="en-US" sz="800" dirty="0"/>
           </a:p>
         </p:txBody>
       </p:sp>
@@ -6563,8 +6563,8 @@
         </p:nvSpPr>
         <p:spPr>
           <a:xfrm>
-            <a:off x="2926080" y="1691640"/>
-            <a:ext cx="1874520" cy="411480"/>
+            <a:off x="2926080" y="1481328"/>
+            <a:ext cx="1874520" cy="384048"/>
           </a:xfrm>
           <a:prstGeom prst="rect">
             <a:avLst/>
@@ -6580,7 +6580,7 @@
               <a:buNone/>
             </a:pPr>
             <a:r>
-              <a:rPr lang="en-US" sz="1000" b="1" dirty="0">
+              <a:rPr lang="en-US" sz="950" b="1" dirty="0">
                 <a:solidFill>
                   <a:srgbClr val="F8FAFC"/>
                 </a:solidFill>
@@ -6590,7 +6590,7 @@
               </a:rPr>
               <a:t>Levenshtein Engine</a:t>
             </a:r>
-            <a:endParaRPr lang="en-US" sz="1000" dirty="0"/>
+            <a:endParaRPr lang="en-US" sz="950" dirty="0"/>
           </a:p>
         </p:txBody>
       </p:sp>
@@ -6602,7 +6602,7 @@
         </p:nvSpPr>
         <p:spPr>
           <a:xfrm>
-            <a:off x="2926080" y="2148840"/>
+            <a:off x="2926080" y="1920240"/>
             <a:ext cx="1874520" cy="1005840"/>
           </a:xfrm>
           <a:prstGeom prst="rect">
@@ -6622,7 +6622,7 @@
               <a:buNone/>
             </a:pPr>
             <a:r>
-              <a:rPr lang="en-US" sz="800" dirty="0">
+              <a:rPr lang="en-US" sz="750" dirty="0">
                 <a:solidFill>
                   <a:srgbClr val="94A3B8"/>
                 </a:solidFill>
@@ -6632,7 +6632,7 @@
               </a:rPr>
               <a:t>Length-adaptive distance match in &lt;15ms.</a:t>
             </a:r>
-            <a:endParaRPr lang="en-US" sz="800" dirty="0"/>
+            <a:endParaRPr lang="en-US" sz="750" dirty="0"/>
           </a:p>
         </p:txBody>
       </p:sp>
@@ -6644,12 +6644,12 @@
         </p:nvSpPr>
         <p:spPr>
           <a:xfrm>
-            <a:off x="5029200" y="1280160"/>
-            <a:ext cx="2148840" cy="2011680"/>
+            <a:off x="5029200" y="1115568"/>
+            <a:ext cx="2148840" cy="1920240"/>
           </a:xfrm>
           <a:prstGeom prst="rect">
             <a:avLst>
-              <a:gd name="adj" fmla="val 2273"/>
+              <a:gd name="adj" fmla="val 1905"/>
             </a:avLst>
           </a:prstGeom>
           <a:solidFill>
@@ -6657,7 +6657,7 @@
           </a:solidFill>
           <a:ln w="12700">
             <a:solidFill>
-              <a:srgbClr val="222230"/>
+              <a:srgbClr val="20202E"/>
             </a:solidFill>
             <a:prstDash val="solid"/>
           </a:ln>
@@ -6671,8 +6671,8 @@
         </p:nvSpPr>
         <p:spPr>
           <a:xfrm>
-            <a:off x="5166360" y="1417320"/>
-            <a:ext cx="1874520" cy="228600"/>
+            <a:off x="5166360" y="1234440"/>
+            <a:ext cx="1874520" cy="201168"/>
           </a:xfrm>
           <a:prstGeom prst="rect">
             <a:avLst/>
@@ -6688,7 +6688,7 @@
               <a:buNone/>
             </a:pPr>
             <a:r>
-              <a:rPr lang="en-US" sz="850" b="1" dirty="0">
+              <a:rPr lang="en-US" sz="800" b="1" dirty="0">
                 <a:solidFill>
                   <a:srgbClr val="D4AF37"/>
                 </a:solidFill>
@@ -6698,7 +6698,7 @@
               </a:rPr>
               <a:t>Step 3</a:t>
             </a:r>
-            <a:endParaRPr lang="en-US" sz="850" dirty="0"/>
+            <a:endParaRPr lang="en-US" sz="800" dirty="0"/>
           </a:p>
         </p:txBody>
       </p:sp>
@@ -6710,8 +6710,8 @@
         </p:nvSpPr>
         <p:spPr>
           <a:xfrm>
-            <a:off x="5166360" y="1691640"/>
-            <a:ext cx="1874520" cy="411480"/>
+            <a:off x="5166360" y="1481328"/>
+            <a:ext cx="1874520" cy="384048"/>
           </a:xfrm>
           <a:prstGeom prst="rect">
             <a:avLst/>
@@ -6727,7 +6727,7 @@
               <a:buNone/>
             </a:pPr>
             <a:r>
-              <a:rPr lang="en-US" sz="1000" b="1" dirty="0">
+              <a:rPr lang="en-US" sz="950" b="1" dirty="0">
                 <a:solidFill>
                   <a:srgbClr val="F8FAFC"/>
                 </a:solidFill>
@@ -6737,7 +6737,7 @@
               </a:rPr>
               <a:t>40% Rule Scoring</a:t>
             </a:r>
-            <a:endParaRPr lang="en-US" sz="1000" dirty="0"/>
+            <a:endParaRPr lang="en-US" sz="950" dirty="0"/>
           </a:p>
         </p:txBody>
       </p:sp>
@@ -6749,7 +6749,7 @@
         </p:nvSpPr>
         <p:spPr>
           <a:xfrm>
-            <a:off x="5166360" y="2148840"/>
+            <a:off x="5166360" y="1920240"/>
             <a:ext cx="1874520" cy="1005840"/>
           </a:xfrm>
           <a:prstGeom prst="rect">
@@ -6769,7 +6769,7 @@
               <a:buNone/>
             </a:pPr>
             <a:r>
-              <a:rPr lang="en-US" sz="800" dirty="0">
+              <a:rPr lang="en-US" sz="750" dirty="0">
                 <a:solidFill>
                   <a:srgbClr val="94A3B8"/>
                 </a:solidFill>
@@ -6779,7 +6779,7 @@
               </a:rPr>
               <a:t>Evaluates 15 threat regexes &amp; URL forensics.</a:t>
             </a:r>
-            <a:endParaRPr lang="en-US" sz="800" dirty="0"/>
+            <a:endParaRPr lang="en-US" sz="750" dirty="0"/>
           </a:p>
         </p:txBody>
       </p:sp>
@@ -6791,12 +6791,12 @@
         </p:nvSpPr>
         <p:spPr>
           <a:xfrm>
-            <a:off x="7269480" y="1280160"/>
-            <a:ext cx="2148840" cy="2011680"/>
+            <a:off x="7269480" y="1115568"/>
+            <a:ext cx="2148840" cy="1920240"/>
           </a:xfrm>
           <a:prstGeom prst="rect">
             <a:avLst>
-              <a:gd name="adj" fmla="val 2273"/>
+              <a:gd name="adj" fmla="val 1905"/>
             </a:avLst>
           </a:prstGeom>
           <a:solidFill>
@@ -6804,7 +6804,7 @@
           </a:solidFill>
           <a:ln w="12700">
             <a:solidFill>
-              <a:srgbClr val="222230"/>
+              <a:srgbClr val="20202E"/>
             </a:solidFill>
             <a:prstDash val="solid"/>
           </a:ln>
@@ -6818,8 +6818,8 @@
         </p:nvSpPr>
         <p:spPr>
           <a:xfrm>
-            <a:off x="7406640" y="1417320"/>
-            <a:ext cx="1874520" cy="228600"/>
+            <a:off x="7406640" y="1234440"/>
+            <a:ext cx="1874520" cy="201168"/>
           </a:xfrm>
           <a:prstGeom prst="rect">
             <a:avLst/>
@@ -6835,7 +6835,7 @@
               <a:buNone/>
             </a:pPr>
             <a:r>
-              <a:rPr lang="en-US" sz="850" b="1" dirty="0">
+              <a:rPr lang="en-US" sz="800" b="1" dirty="0">
                 <a:solidFill>
                   <a:srgbClr val="D4AF37"/>
                 </a:solidFill>
@@ -6845,7 +6845,7 @@
               </a:rPr>
               <a:t>Step 4</a:t>
             </a:r>
-            <a:endParaRPr lang="en-US" sz="850" dirty="0"/>
+            <a:endParaRPr lang="en-US" sz="800" dirty="0"/>
           </a:p>
         </p:txBody>
       </p:sp>
@@ -6857,8 +6857,8 @@
         </p:nvSpPr>
         <p:spPr>
           <a:xfrm>
-            <a:off x="7406640" y="1691640"/>
-            <a:ext cx="1874520" cy="411480"/>
+            <a:off x="7406640" y="1481328"/>
+            <a:ext cx="1874520" cy="384048"/>
           </a:xfrm>
           <a:prstGeom prst="rect">
             <a:avLst/>
@@ -6874,7 +6874,7 @@
               <a:buNone/>
             </a:pPr>
             <a:r>
-              <a:rPr lang="en-US" sz="1000" b="1" dirty="0">
+              <a:rPr lang="en-US" sz="950" b="1" dirty="0">
                 <a:solidFill>
                   <a:srgbClr val="F8FAFC"/>
                 </a:solidFill>
@@ -6884,7 +6884,7 @@
               </a:rPr>
               <a:t>60% Gemini Cascade</a:t>
             </a:r>
-            <a:endParaRPr lang="en-US" sz="1000" dirty="0"/>
+            <a:endParaRPr lang="en-US" sz="950" dirty="0"/>
           </a:p>
         </p:txBody>
       </p:sp>
@@ -6896,7 +6896,7 @@
         </p:nvSpPr>
         <p:spPr>
           <a:xfrm>
-            <a:off x="7406640" y="2148840"/>
+            <a:off x="7406640" y="1920240"/>
             <a:ext cx="1874520" cy="1005840"/>
           </a:xfrm>
           <a:prstGeom prst="rect">
@@ -6916,7 +6916,7 @@
               <a:buNone/>
             </a:pPr>
             <a:r>
-              <a:rPr lang="en-US" sz="800" dirty="0">
+              <a:rPr lang="en-US" sz="750" dirty="0">
                 <a:solidFill>
                   <a:srgbClr val="94A3B8"/>
                 </a:solidFill>
@@ -6926,7 +6926,7 @@
               </a:rPr>
               <a:t>Contextual semantic reasoning via multi-model pool.</a:t>
             </a:r>
-            <a:endParaRPr lang="en-US" sz="800" dirty="0"/>
+            <a:endParaRPr lang="en-US" sz="750" dirty="0"/>
           </a:p>
         </p:txBody>
       </p:sp>
@@ -6938,12 +6938,12 @@
         </p:nvSpPr>
         <p:spPr>
           <a:xfrm>
-            <a:off x="9509760" y="1280160"/>
-            <a:ext cx="2148840" cy="2011680"/>
+            <a:off x="9509760" y="1115568"/>
+            <a:ext cx="2148840" cy="1920240"/>
           </a:xfrm>
           <a:prstGeom prst="rect">
             <a:avLst>
-              <a:gd name="adj" fmla="val 2273"/>
+              <a:gd name="adj" fmla="val 1905"/>
             </a:avLst>
           </a:prstGeom>
           <a:solidFill>
@@ -6951,7 +6951,7 @@
           </a:solidFill>
           <a:ln w="12700">
             <a:solidFill>
-              <a:srgbClr val="222230"/>
+              <a:srgbClr val="20202E"/>
             </a:solidFill>
             <a:prstDash val="solid"/>
           </a:ln>
@@ -6965,8 +6965,8 @@
         </p:nvSpPr>
         <p:spPr>
           <a:xfrm>
-            <a:off x="9646920" y="1417320"/>
-            <a:ext cx="1874520" cy="228600"/>
+            <a:off x="9646920" y="1234440"/>
+            <a:ext cx="1874520" cy="201168"/>
           </a:xfrm>
           <a:prstGeom prst="rect">
             <a:avLst/>
@@ -6982,7 +6982,7 @@
               <a:buNone/>
             </a:pPr>
             <a:r>
-              <a:rPr lang="en-US" sz="850" b="1" dirty="0">
+              <a:rPr lang="en-US" sz="800" b="1" dirty="0">
                 <a:solidFill>
                   <a:srgbClr val="D4AF37"/>
                 </a:solidFill>
@@ -6992,7 +6992,7 @@
               </a:rPr>
               <a:t>Step 5</a:t>
             </a:r>
-            <a:endParaRPr lang="en-US" sz="850" dirty="0"/>
+            <a:endParaRPr lang="en-US" sz="800" dirty="0"/>
           </a:p>
         </p:txBody>
       </p:sp>
@@ -7004,8 +7004,8 @@
         </p:nvSpPr>
         <p:spPr>
           <a:xfrm>
-            <a:off x="9646920" y="1691640"/>
-            <a:ext cx="1874520" cy="411480"/>
+            <a:off x="9646920" y="1481328"/>
+            <a:ext cx="1874520" cy="384048"/>
           </a:xfrm>
           <a:prstGeom prst="rect">
             <a:avLst/>
@@ -7021,7 +7021,7 @@
               <a:buNone/>
             </a:pPr>
             <a:r>
-              <a:rPr lang="en-US" sz="1000" b="1" dirty="0">
+              <a:rPr lang="en-US" sz="950" b="1" dirty="0">
                 <a:solidFill>
                   <a:srgbClr val="F8FAFC"/>
                 </a:solidFill>
@@ -7031,7 +7031,7 @@
               </a:rPr>
               <a:t>Verdict &amp; Audit</a:t>
             </a:r>
-            <a:endParaRPr lang="en-US" sz="1000" dirty="0"/>
+            <a:endParaRPr lang="en-US" sz="950" dirty="0"/>
           </a:p>
         </p:txBody>
       </p:sp>
@@ -7043,7 +7043,7 @@
         </p:nvSpPr>
         <p:spPr>
           <a:xfrm>
-            <a:off x="9646920" y="2148840"/>
+            <a:off x="9646920" y="1920240"/>
             <a:ext cx="1874520" cy="1005840"/>
           </a:xfrm>
           <a:prstGeom prst="rect">
@@ -7063,7 +7063,7 @@
               <a:buNone/>
             </a:pPr>
             <a:r>
-              <a:rPr lang="en-US" sz="800" dirty="0">
+              <a:rPr lang="en-US" sz="750" dirty="0">
                 <a:solidFill>
                   <a:srgbClr val="94A3B8"/>
                 </a:solidFill>
@@ -7073,7 +7073,7 @@
               </a:rPr>
               <a:t>Weighted risk fusion score + async Turso DB log.</a:t>
             </a:r>
-            <a:endParaRPr lang="en-US" sz="800" dirty="0"/>
+            <a:endParaRPr lang="en-US" sz="750" dirty="0"/>
           </a:p>
         </p:txBody>
       </p:sp>
@@ -7085,12 +7085,12 @@
         </p:nvSpPr>
         <p:spPr>
           <a:xfrm>
-            <a:off x="548640" y="3474720"/>
-            <a:ext cx="5468112" cy="1325880"/>
+            <a:off x="548640" y="3291840"/>
+            <a:ext cx="5468112" cy="1280160"/>
           </a:xfrm>
           <a:prstGeom prst="rect">
             <a:avLst>
-              <a:gd name="adj" fmla="val 3448"/>
+              <a:gd name="adj" fmla="val 2857"/>
             </a:avLst>
           </a:prstGeom>
           <a:solidFill>
@@ -7098,7 +7098,7 @@
           </a:solidFill>
           <a:ln w="12700">
             <a:solidFill>
-              <a:srgbClr val="222230"/>
+              <a:srgbClr val="20202E"/>
             </a:solidFill>
             <a:prstDash val="solid"/>
           </a:ln>
@@ -7112,7 +7112,7 @@
         </p:nvSpPr>
         <p:spPr>
           <a:xfrm>
-            <a:off x="731520" y="3611880"/>
+            <a:off x="731520" y="3401568"/>
             <a:ext cx="5102352" cy="228600"/>
           </a:xfrm>
           <a:prstGeom prst="rect">
@@ -7129,7 +7129,7 @@
               <a:buNone/>
             </a:pPr>
             <a:r>
-              <a:rPr lang="en-US" sz="950" b="1" dirty="0">
+              <a:rPr lang="en-US" sz="900" b="1" dirty="0">
                 <a:solidFill>
                   <a:srgbClr val="38BDF8"/>
                 </a:solidFill>
@@ -7139,7 +7139,7 @@
               </a:rPr>
               <a:t>🧠 AI, NLP &amp; Linguistic Engine</a:t>
             </a:r>
-            <a:endParaRPr lang="en-US" sz="950" dirty="0"/>
+            <a:endParaRPr lang="en-US" sz="900" dirty="0"/>
           </a:p>
         </p:txBody>
       </p:sp>
@@ -7151,8 +7151,8 @@
         </p:nvSpPr>
         <p:spPr>
           <a:xfrm>
-            <a:off x="731520" y="3886200"/>
-            <a:ext cx="5102352" cy="822960"/>
+            <a:off x="731520" y="3657600"/>
+            <a:ext cx="5102352" cy="777240"/>
           </a:xfrm>
           <a:prstGeom prst="rect">
             <a:avLst/>
@@ -7171,7 +7171,7 @@
               <a:buNone/>
             </a:pPr>
             <a:r>
-              <a:rPr lang="en-US" sz="800" dirty="0">
+              <a:rPr lang="en-US" sz="750" dirty="0">
                 <a:solidFill>
                   <a:srgbClr val="94A3B8"/>
                 </a:solidFill>
@@ -7181,7 +7181,7 @@
               </a:rPr>
               <a:t>• Google Gemini Flash (Multi-Model Pool: 3.5, 3.7, Latest)</a:t>
             </a:r>
-            <a:endParaRPr lang="en-US" sz="800" dirty="0"/>
+            <a:endParaRPr lang="en-US" sz="750" dirty="0"/>
           </a:p>
           <a:p>
             <a:pPr indent="0" marL="0">
@@ -7191,7 +7191,7 @@
               <a:buNone/>
             </a:pPr>
             <a:r>
-              <a:rPr lang="en-US" sz="800" dirty="0">
+              <a:rPr lang="en-US" sz="750" dirty="0">
                 <a:solidFill>
                   <a:srgbClr val="94A3B8"/>
                 </a:solidFill>
@@ -7201,7 +7201,7 @@
               </a:rPr>
               <a:t>• Fast-Levenshtein Deobfuscation Engine</a:t>
             </a:r>
-            <a:endParaRPr lang="en-US" sz="800" dirty="0"/>
+            <a:endParaRPr lang="en-US" sz="750" dirty="0"/>
           </a:p>
           <a:p>
             <a:pPr indent="0" marL="0">
@@ -7211,7 +7211,7 @@
               <a:buNone/>
             </a:pPr>
             <a:r>
-              <a:rPr lang="en-US" sz="800" dirty="0">
+              <a:rPr lang="en-US" sz="750" dirty="0">
                 <a:solidFill>
                   <a:srgbClr val="94A3B8"/>
                 </a:solidFill>
@@ -7221,7 +7221,7 @@
               </a:rPr>
               <a:t>• 200+ Indian Threat Lexicon &amp; 350+ Safe-Word Whitelist</a:t>
             </a:r>
-            <a:endParaRPr lang="en-US" sz="800" dirty="0"/>
+            <a:endParaRPr lang="en-US" sz="750" dirty="0"/>
           </a:p>
         </p:txBody>
       </p:sp>
@@ -7233,12 +7233,12 @@
         </p:nvSpPr>
         <p:spPr>
           <a:xfrm>
-            <a:off x="6172200" y="3474720"/>
-            <a:ext cx="5468112" cy="1325880"/>
+            <a:off x="6172200" y="3291840"/>
+            <a:ext cx="5468112" cy="1280160"/>
           </a:xfrm>
           <a:prstGeom prst="rect">
             <a:avLst>
-              <a:gd name="adj" fmla="val 3448"/>
+              <a:gd name="adj" fmla="val 2857"/>
             </a:avLst>
           </a:prstGeom>
           <a:solidFill>
@@ -7246,7 +7246,7 @@
           </a:solidFill>
           <a:ln w="12700">
             <a:solidFill>
-              <a:srgbClr val="222230"/>
+              <a:srgbClr val="20202E"/>
             </a:solidFill>
             <a:prstDash val="solid"/>
           </a:ln>
@@ -7260,7 +7260,7 @@
         </p:nvSpPr>
         <p:spPr>
           <a:xfrm>
-            <a:off x="6355080" y="3611880"/>
+            <a:off x="6355080" y="3401568"/>
             <a:ext cx="5102352" cy="228600"/>
           </a:xfrm>
           <a:prstGeom prst="rect">
@@ -7277,7 +7277,7 @@
               <a:buNone/>
             </a:pPr>
             <a:r>
-              <a:rPr lang="en-US" sz="950" b="1" dirty="0">
+              <a:rPr lang="en-US" sz="900" b="1" dirty="0">
                 <a:solidFill>
                   <a:srgbClr val="38BDF8"/>
                 </a:solidFill>
@@ -7287,7 +7287,7 @@
               </a:rPr>
               <a:t>⚡ Backend &amp; Serverless API</a:t>
             </a:r>
-            <a:endParaRPr lang="en-US" sz="950" dirty="0"/>
+            <a:endParaRPr lang="en-US" sz="900" dirty="0"/>
           </a:p>
         </p:txBody>
       </p:sp>
@@ -7299,8 +7299,8 @@
         </p:nvSpPr>
         <p:spPr>
           <a:xfrm>
-            <a:off x="6355080" y="3886200"/>
-            <a:ext cx="5102352" cy="822960"/>
+            <a:off x="6355080" y="3657600"/>
+            <a:ext cx="5102352" cy="777240"/>
           </a:xfrm>
           <a:prstGeom prst="rect">
             <a:avLst/>
@@ -7319,7 +7319,7 @@
               <a:buNone/>
             </a:pPr>
             <a:r>
-              <a:rPr lang="en-US" sz="800" dirty="0">
+              <a:rPr lang="en-US" sz="750" dirty="0">
                 <a:solidFill>
                   <a:srgbClr val="94A3B8"/>
                 </a:solidFill>
@@ -7329,7 +7329,7 @@
               </a:rPr>
               <a:t>• Node.js (ES6+) Serverless Architecture</a:t>
             </a:r>
-            <a:endParaRPr lang="en-US" sz="800" dirty="0"/>
+            <a:endParaRPr lang="en-US" sz="750" dirty="0"/>
           </a:p>
           <a:p>
             <a:pPr indent="0" marL="0">
@@ -7339,7 +7339,7 @@
               <a:buNone/>
             </a:pPr>
             <a:r>
-              <a:rPr lang="en-US" sz="800" dirty="0">
+              <a:rPr lang="en-US" sz="750" dirty="0">
                 <a:solidFill>
                   <a:srgbClr val="94A3B8"/>
                 </a:solidFill>
@@ -7349,7 +7349,7 @@
               </a:rPr>
               <a:t>• Vercel Edge Functions (/api/classify, /api/stats)</a:t>
             </a:r>
-            <a:endParaRPr lang="en-US" sz="800" dirty="0"/>
+            <a:endParaRPr lang="en-US" sz="750" dirty="0"/>
           </a:p>
           <a:p>
             <a:pPr indent="0" marL="0">
@@ -7359,7 +7359,7 @@
               <a:buNone/>
             </a:pPr>
             <a:r>
-              <a:rPr lang="en-US" sz="800" dirty="0">
+              <a:rPr lang="en-US" sz="750" dirty="0">
                 <a:solidFill>
                   <a:srgbClr val="94A3B8"/>
                 </a:solidFill>
@@ -7369,7 +7369,7 @@
               </a:rPr>
               <a:t>• Sub-45ms Total End-to-End Response Time</a:t>
             </a:r>
-            <a:endParaRPr lang="en-US" sz="800" dirty="0"/>
+            <a:endParaRPr lang="en-US" sz="750" dirty="0"/>
           </a:p>
         </p:txBody>
       </p:sp>
@@ -7381,12 +7381,12 @@
         </p:nvSpPr>
         <p:spPr>
           <a:xfrm>
-            <a:off x="548640" y="4937760"/>
-            <a:ext cx="5468112" cy="1325880"/>
+            <a:off x="548640" y="4709160"/>
+            <a:ext cx="5468112" cy="1280160"/>
           </a:xfrm>
           <a:prstGeom prst="rect">
             <a:avLst>
-              <a:gd name="adj" fmla="val 3448"/>
+              <a:gd name="adj" fmla="val 2857"/>
             </a:avLst>
           </a:prstGeom>
           <a:solidFill>
@@ -7394,7 +7394,7 @@
           </a:solidFill>
           <a:ln w="12700">
             <a:solidFill>
-              <a:srgbClr val="222230"/>
+              <a:srgbClr val="20202E"/>
             </a:solidFill>
             <a:prstDash val="solid"/>
           </a:ln>
@@ -7408,7 +7408,7 @@
         </p:nvSpPr>
         <p:spPr>
           <a:xfrm>
-            <a:off x="731520" y="5074920"/>
+            <a:off x="731520" y="4818888"/>
             <a:ext cx="5102352" cy="228600"/>
           </a:xfrm>
           <a:prstGeom prst="rect">
@@ -7425,7 +7425,7 @@
               <a:buNone/>
             </a:pPr>
             <a:r>
-              <a:rPr lang="en-US" sz="950" b="1" dirty="0">
+              <a:rPr lang="en-US" sz="900" b="1" dirty="0">
                 <a:solidFill>
                   <a:srgbClr val="38BDF8"/>
                 </a:solidFill>
@@ -7435,7 +7435,7 @@
               </a:rPr>
               <a:t>🗄️ Database &amp; Threat Intelligence</a:t>
             </a:r>
-            <a:endParaRPr lang="en-US" sz="950" dirty="0"/>
+            <a:endParaRPr lang="en-US" sz="900" dirty="0"/>
           </a:p>
         </p:txBody>
       </p:sp>
@@ -7447,8 +7447,8 @@
         </p:nvSpPr>
         <p:spPr>
           <a:xfrm>
-            <a:off x="731520" y="5349240"/>
-            <a:ext cx="5102352" cy="822960"/>
+            <a:off x="731520" y="5074920"/>
+            <a:ext cx="5102352" cy="777240"/>
           </a:xfrm>
           <a:prstGeom prst="rect">
             <a:avLst/>
@@ -7467,7 +7467,7 @@
               <a:buNone/>
             </a:pPr>
             <a:r>
-              <a:rPr lang="en-US" sz="800" dirty="0">
+              <a:rPr lang="en-US" sz="750" dirty="0">
                 <a:solidFill>
                   <a:srgbClr val="94A3B8"/>
                 </a:solidFill>
@@ -7477,7 +7477,7 @@
               </a:rPr>
               <a:t>• Turso Cloud Database (LibSQL / Serverless SQLite)</a:t>
             </a:r>
-            <a:endParaRPr lang="en-US" sz="800" dirty="0"/>
+            <a:endParaRPr lang="en-US" sz="750" dirty="0"/>
           </a:p>
           <a:p>
             <a:pPr indent="0" marL="0">
@@ -7487,7 +7487,7 @@
               <a:buNone/>
             </a:pPr>
             <a:r>
-              <a:rPr lang="en-US" sz="800" dirty="0">
+              <a:rPr lang="en-US" sz="750" dirty="0">
                 <a:solidFill>
                   <a:srgbClr val="94A3B8"/>
                 </a:solidFill>
@@ -7497,7 +7497,7 @@
               </a:rPr>
               <a:t>• Hosted in AWS AP-South-1 (Mumbai)</a:t>
             </a:r>
-            <a:endParaRPr lang="en-US" sz="800" dirty="0"/>
+            <a:endParaRPr lang="en-US" sz="750" dirty="0"/>
           </a:p>
           <a:p>
             <a:pPr indent="0" marL="0">
@@ -7507,7 +7507,7 @@
               <a:buNone/>
             </a:pPr>
             <a:r>
-              <a:rPr lang="en-US" sz="800" dirty="0">
+              <a:rPr lang="en-US" sz="750" dirty="0">
                 <a:solidFill>
                   <a:srgbClr val="94A3B8"/>
                 </a:solidFill>
@@ -7517,7 +7517,7 @@
               </a:rPr>
               <a:t>• Real-Time Batch Audit Logging Pipeline</a:t>
             </a:r>
-            <a:endParaRPr lang="en-US" sz="800" dirty="0"/>
+            <a:endParaRPr lang="en-US" sz="750" dirty="0"/>
           </a:p>
         </p:txBody>
       </p:sp>
@@ -7529,12 +7529,12 @@
         </p:nvSpPr>
         <p:spPr>
           <a:xfrm>
-            <a:off x="6172200" y="4937760"/>
-            <a:ext cx="5468112" cy="1325880"/>
+            <a:off x="6172200" y="4709160"/>
+            <a:ext cx="5468112" cy="1280160"/>
           </a:xfrm>
           <a:prstGeom prst="rect">
             <a:avLst>
-              <a:gd name="adj" fmla="val 3448"/>
+              <a:gd name="adj" fmla="val 2857"/>
             </a:avLst>
           </a:prstGeom>
           <a:solidFill>
@@ -7542,7 +7542,7 @@
           </a:solidFill>
           <a:ln w="12700">
             <a:solidFill>
-              <a:srgbClr val="222230"/>
+              <a:srgbClr val="20202E"/>
             </a:solidFill>
             <a:prstDash val="solid"/>
           </a:ln>
@@ -7556,7 +7556,7 @@
         </p:nvSpPr>
         <p:spPr>
           <a:xfrm>
-            <a:off x="6355080" y="5074920"/>
+            <a:off x="6355080" y="4818888"/>
             <a:ext cx="5102352" cy="228600"/>
           </a:xfrm>
           <a:prstGeom prst="rect">
@@ -7573,7 +7573,7 @@
               <a:buNone/>
             </a:pPr>
             <a:r>
-              <a:rPr lang="en-US" sz="950" b="1" dirty="0">
+              <a:rPr lang="en-US" sz="900" b="1" dirty="0">
                 <a:solidFill>
                   <a:srgbClr val="38BDF8"/>
                 </a:solidFill>
@@ -7583,7 +7583,7 @@
               </a:rPr>
               <a:t>📲 Frontend &amp; Progressive Web App</a:t>
             </a:r>
-            <a:endParaRPr lang="en-US" sz="950" dirty="0"/>
+            <a:endParaRPr lang="en-US" sz="900" dirty="0"/>
           </a:p>
         </p:txBody>
       </p:sp>
@@ -7595,8 +7595,8 @@
         </p:nvSpPr>
         <p:spPr>
           <a:xfrm>
-            <a:off x="6355080" y="5349240"/>
-            <a:ext cx="5102352" cy="822960"/>
+            <a:off x="6355080" y="5074920"/>
+            <a:ext cx="5102352" cy="777240"/>
           </a:xfrm>
           <a:prstGeom prst="rect">
             <a:avLst/>
@@ -7615,7 +7615,7 @@
               <a:buNone/>
             </a:pPr>
             <a:r>
-              <a:rPr lang="en-US" sz="800" dirty="0">
+              <a:rPr lang="en-US" sz="750" dirty="0">
                 <a:solidFill>
                   <a:srgbClr val="94A3B8"/>
                 </a:solidFill>
@@ -7625,7 +7625,7 @@
               </a:rPr>
               <a:t>• Progressive Web App (PWA) with Offline Support</a:t>
             </a:r>
-            <a:endParaRPr lang="en-US" sz="800" dirty="0"/>
+            <a:endParaRPr lang="en-US" sz="750" dirty="0"/>
           </a:p>
           <a:p>
             <a:pPr indent="0" marL="0">
@@ -7635,7 +7635,7 @@
               <a:buNone/>
             </a:pPr>
             <a:r>
-              <a:rPr lang="en-US" sz="800" dirty="0">
+              <a:rPr lang="en-US" sz="750" dirty="0">
                 <a:solidFill>
                   <a:srgbClr val="94A3B8"/>
                 </a:solidFill>
@@ -7645,7 +7645,7 @@
               </a:rPr>
               <a:t>• Auto-Bumping Service Worker (sw.js)</a:t>
             </a:r>
-            <a:endParaRPr lang="en-US" sz="800" dirty="0"/>
+            <a:endParaRPr lang="en-US" sz="750" dirty="0"/>
           </a:p>
           <a:p>
             <a:pPr indent="0" marL="0">
@@ -7655,7 +7655,7 @@
               <a:buNone/>
             </a:pPr>
             <a:r>
-              <a:rPr lang="en-US" sz="800" dirty="0">
+              <a:rPr lang="en-US" sz="750" dirty="0">
                 <a:solidFill>
                   <a:srgbClr val="94A3B8"/>
                 </a:solidFill>
@@ -7665,7 +7665,7 @@
               </a:rPr>
               <a:t>• Custom 8pt Spatial Grid &amp; Mobile Safe-Area Insets</a:t>
             </a:r>
-            <a:endParaRPr lang="en-US" sz="800" dirty="0"/>
+            <a:endParaRPr lang="en-US" sz="750" dirty="0"/>
           </a:p>
         </p:txBody>
       </p:sp>
@@ -7717,8 +7717,8 @@
         </p:blipFill>
         <p:spPr>
           <a:xfrm>
-            <a:off x="548640" y="320040"/>
-            <a:ext cx="594360" cy="594360"/>
+            <a:off x="548640" y="256032"/>
+            <a:ext cx="475488" cy="475488"/>
           </a:xfrm>
           <a:prstGeom prst="rect">
             <a:avLst/>
@@ -7733,8 +7733,8 @@
         </p:nvSpPr>
         <p:spPr>
           <a:xfrm>
-            <a:off x="1280160" y="320040"/>
-            <a:ext cx="9601200" cy="228600"/>
+            <a:off x="1143000" y="256032"/>
+            <a:ext cx="10424160" cy="182880"/>
           </a:xfrm>
           <a:prstGeom prst="rect">
             <a:avLst/>
@@ -7750,7 +7750,7 @@
               <a:buNone/>
             </a:pPr>
             <a:r>
-              <a:rPr lang="en-US" sz="900" b="1" dirty="0">
+              <a:rPr lang="en-US" sz="850" b="1" dirty="0">
                 <a:solidFill>
                   <a:srgbClr val="D4AF37"/>
                 </a:solidFill>
@@ -7760,7 +7760,7 @@
               </a:rPr>
               <a:t>🧪 EMPIRICAL VALIDATION • LIVE BENCHMARKS</a:t>
             </a:r>
-            <a:endParaRPr lang="en-US" sz="900" dirty="0"/>
+            <a:endParaRPr lang="en-US" sz="850" dirty="0"/>
           </a:p>
         </p:txBody>
       </p:sp>
@@ -7772,8 +7772,8 @@
         </p:nvSpPr>
         <p:spPr>
           <a:xfrm>
-            <a:off x="1280160" y="594360"/>
-            <a:ext cx="10241280" cy="411480"/>
+            <a:off x="1143000" y="475488"/>
+            <a:ext cx="10424160" cy="365760"/>
           </a:xfrm>
           <a:prstGeom prst="rect">
             <a:avLst/>
@@ -7789,7 +7789,7 @@
               <a:buNone/>
             </a:pPr>
             <a:r>
-              <a:rPr lang="en-US" sz="1800" b="1" dirty="0">
+              <a:rPr lang="en-US" sz="1600" b="1" dirty="0">
                 <a:solidFill>
                   <a:srgbClr val="F8FAFC"/>
                 </a:solidFill>
@@ -7799,7 +7799,7 @@
               </a:rPr>
               <a:t>Empirical Validation Across Real Indian Smishing Attacks</a:t>
             </a:r>
-            <a:endParaRPr lang="en-US" sz="1800" dirty="0"/>
+            <a:endParaRPr lang="en-US" sz="1600" dirty="0"/>
           </a:p>
         </p:txBody>
       </p:sp>
@@ -7811,7 +7811,7 @@
         </p:nvSpPr>
         <p:spPr>
           <a:xfrm>
-            <a:off x="548640" y="1097280"/>
+            <a:off x="548640" y="960120"/>
             <a:ext cx="11091672" cy="0"/>
           </a:xfrm>
           <a:prstGeom prst="line">
@@ -7820,7 +7820,7 @@
           <a:noFill/>
           <a:ln w="12700">
             <a:solidFill>
-              <a:srgbClr val="20202C"/>
+              <a:srgbClr val="1C1C28"/>
             </a:solidFill>
             <a:prstDash val="solid"/>
           </a:ln>
@@ -7841,8 +7841,8 @@
           </p:nvPr>
         </p:nvGraphicFramePr>
         <p:xfrm>
-          <a:off x="548640" y="1280160"/>
-          <a:ext cx="5120640" cy="2926080"/>
+          <a:off x="548640" y="1115568"/>
+          <a:ext cx="5120640" cy="2560320"/>
         </p:xfrm>
         <a:graphic>
           <a:graphicData uri="http://schemas.openxmlformats.org/drawingml/2006/table">
@@ -7854,7 +7854,7 @@
                 <a:gridCol w="1280160"/>
                 <a:gridCol w="1280160"/>
               </a:tblGrid>
-              <a:tr h="487680">
+              <a:tr h="426720">
                 <a:tc>
                   <a:txBody>
                     <a:bodyPr/>
@@ -7864,20 +7864,20 @@
                         <a:buNone/>
                       </a:pPr>
                       <a:r>
-                        <a:rPr lang="en-US" sz="850" b="1" dirty="0">
+                        <a:rPr lang="en-US" sz="800" b="1" dirty="0">
                           <a:solidFill>
                             <a:srgbClr val="F8FAFC"/>
                           </a:solidFill>
                         </a:rPr>
                         <a:t>Attack Vector</a:t>
                       </a:r>
-                      <a:endParaRPr lang="en-US" sz="850" dirty="0"/>
+                      <a:endParaRPr lang="en-US" sz="800" dirty="0"/>
                     </a:p>
                   </a:txBody>
                   <a:tcPr marL="91440" marR="91440" marT="45720" marB="45720" anchor="ctr">
                     <a:lnL w="12700" cap="flat" cmpd="sng" algn="ctr">
                       <a:solidFill>
-                        <a:srgbClr val="222230"/>
+                        <a:srgbClr val="20202E"/>
                       </a:solidFill>
                       <a:prstDash val="solid"/>
                       <a:round/>
@@ -7886,7 +7886,7 @@
                     </a:lnL>
                     <a:lnR w="12700" cap="flat" cmpd="sng" algn="ctr">
                       <a:solidFill>
-                        <a:srgbClr val="222230"/>
+                        <a:srgbClr val="20202E"/>
                       </a:solidFill>
                       <a:prstDash val="solid"/>
                       <a:round/>
@@ -7895,7 +7895,7 @@
                     </a:lnR>
                     <a:lnT w="12700" cap="flat" cmpd="sng" algn="ctr">
                       <a:solidFill>
-                        <a:srgbClr val="222230"/>
+                        <a:srgbClr val="20202E"/>
                       </a:solidFill>
                       <a:prstDash val="solid"/>
                       <a:round/>
@@ -7904,7 +7904,7 @@
                     </a:lnT>
                     <a:lnB w="12700" cap="flat" cmpd="sng" algn="ctr">
                       <a:solidFill>
-                        <a:srgbClr val="222230"/>
+                        <a:srgbClr val="20202E"/>
                       </a:solidFill>
                       <a:prstDash val="solid"/>
                       <a:round/>
@@ -7925,20 +7925,20 @@
                         <a:buNone/>
                       </a:pPr>
                       <a:r>
-                        <a:rPr lang="en-US" sz="850" b="1" dirty="0">
+                        <a:rPr lang="en-US" sz="800" b="1" dirty="0">
                           <a:solidFill>
                             <a:srgbClr val="F8FAFC"/>
                           </a:solidFill>
                         </a:rPr>
                         <a:t>Latency</a:t>
                       </a:r>
-                      <a:endParaRPr lang="en-US" sz="850" dirty="0"/>
+                      <a:endParaRPr lang="en-US" sz="800" dirty="0"/>
                     </a:p>
                   </a:txBody>
                   <a:tcPr marL="91440" marR="91440" marT="45720" marB="45720" anchor="ctr">
                     <a:lnL w="12700" cap="flat" cmpd="sng" algn="ctr">
                       <a:solidFill>
-                        <a:srgbClr val="222230"/>
+                        <a:srgbClr val="20202E"/>
                       </a:solidFill>
                       <a:prstDash val="solid"/>
                       <a:round/>
@@ -7947,7 +7947,7 @@
                     </a:lnL>
                     <a:lnR w="12700" cap="flat" cmpd="sng" algn="ctr">
                       <a:solidFill>
-                        <a:srgbClr val="222230"/>
+                        <a:srgbClr val="20202E"/>
                       </a:solidFill>
                       <a:prstDash val="solid"/>
                       <a:round/>
@@ -7956,7 +7956,7 @@
                     </a:lnR>
                     <a:lnT w="12700" cap="flat" cmpd="sng" algn="ctr">
                       <a:solidFill>
-                        <a:srgbClr val="222230"/>
+                        <a:srgbClr val="20202E"/>
                       </a:solidFill>
                       <a:prstDash val="solid"/>
                       <a:round/>
@@ -7965,7 +7965,7 @@
                     </a:lnT>
                     <a:lnB w="12700" cap="flat" cmpd="sng" algn="ctr">
                       <a:solidFill>
-                        <a:srgbClr val="222230"/>
+                        <a:srgbClr val="20202E"/>
                       </a:solidFill>
                       <a:prstDash val="solid"/>
                       <a:round/>
@@ -7986,20 +7986,20 @@
                         <a:buNone/>
                       </a:pPr>
                       <a:r>
-                        <a:rPr lang="en-US" sz="850" b="1" dirty="0">
+                        <a:rPr lang="en-US" sz="800" b="1" dirty="0">
                           <a:solidFill>
                             <a:srgbClr val="F8FAFC"/>
                           </a:solidFill>
                         </a:rPr>
                         <a:t>Risk Score</a:t>
                       </a:r>
-                      <a:endParaRPr lang="en-US" sz="850" dirty="0"/>
+                      <a:endParaRPr lang="en-US" sz="800" dirty="0"/>
                     </a:p>
                   </a:txBody>
                   <a:tcPr marL="91440" marR="91440" marT="45720" marB="45720" anchor="ctr">
                     <a:lnL w="12700" cap="flat" cmpd="sng" algn="ctr">
                       <a:solidFill>
-                        <a:srgbClr val="222230"/>
+                        <a:srgbClr val="20202E"/>
                       </a:solidFill>
                       <a:prstDash val="solid"/>
                       <a:round/>
@@ -8008,7 +8008,7 @@
                     </a:lnL>
                     <a:lnR w="12700" cap="flat" cmpd="sng" algn="ctr">
                       <a:solidFill>
-                        <a:srgbClr val="222230"/>
+                        <a:srgbClr val="20202E"/>
                       </a:solidFill>
                       <a:prstDash val="solid"/>
                       <a:round/>
@@ -8017,7 +8017,7 @@
                     </a:lnR>
                     <a:lnT w="12700" cap="flat" cmpd="sng" algn="ctr">
                       <a:solidFill>
-                        <a:srgbClr val="222230"/>
+                        <a:srgbClr val="20202E"/>
                       </a:solidFill>
                       <a:prstDash val="solid"/>
                       <a:round/>
@@ -8026,7 +8026,7 @@
                     </a:lnT>
                     <a:lnB w="12700" cap="flat" cmpd="sng" algn="ctr">
                       <a:solidFill>
-                        <a:srgbClr val="222230"/>
+                        <a:srgbClr val="20202E"/>
                       </a:solidFill>
                       <a:prstDash val="solid"/>
                       <a:round/>
@@ -8047,20 +8047,20 @@
                         <a:buNone/>
                       </a:pPr>
                       <a:r>
-                        <a:rPr lang="en-US" sz="850" b="1" dirty="0">
+                        <a:rPr lang="en-US" sz="800" b="1" dirty="0">
                           <a:solidFill>
                             <a:srgbClr val="F8FAFC"/>
                           </a:solidFill>
                         </a:rPr>
                         <a:t>Verdict</a:t>
                       </a:r>
-                      <a:endParaRPr lang="en-US" sz="850" dirty="0"/>
+                      <a:endParaRPr lang="en-US" sz="800" dirty="0"/>
                     </a:p>
                   </a:txBody>
                   <a:tcPr marL="91440" marR="91440" marT="45720" marB="45720" anchor="ctr">
                     <a:lnL w="12700" cap="flat" cmpd="sng" algn="ctr">
                       <a:solidFill>
-                        <a:srgbClr val="222230"/>
+                        <a:srgbClr val="20202E"/>
                       </a:solidFill>
                       <a:prstDash val="solid"/>
                       <a:round/>
@@ -8069,7 +8069,7 @@
                     </a:lnL>
                     <a:lnR w="12700" cap="flat" cmpd="sng" algn="ctr">
                       <a:solidFill>
-                        <a:srgbClr val="222230"/>
+                        <a:srgbClr val="20202E"/>
                       </a:solidFill>
                       <a:prstDash val="solid"/>
                       <a:round/>
@@ -8078,7 +8078,7 @@
                     </a:lnR>
                     <a:lnT w="12700" cap="flat" cmpd="sng" algn="ctr">
                       <a:solidFill>
-                        <a:srgbClr val="222230"/>
+                        <a:srgbClr val="20202E"/>
                       </a:solidFill>
                       <a:prstDash val="solid"/>
                       <a:round/>
@@ -8087,7 +8087,7 @@
                     </a:lnT>
                     <a:lnB w="12700" cap="flat" cmpd="sng" algn="ctr">
                       <a:solidFill>
-                        <a:srgbClr val="222230"/>
+                        <a:srgbClr val="20202E"/>
                       </a:solidFill>
                       <a:prstDash val="solid"/>
                       <a:round/>
@@ -8100,7 +8100,7 @@
                   </a:tcPr>
                 </a:tc>
               </a:tr>
-              <a:tr h="487680">
+              <a:tr h="426720">
                 <a:tc>
                   <a:txBody>
                     <a:bodyPr/>
@@ -8110,20 +8110,20 @@
                         <a:buNone/>
                       </a:pPr>
                       <a:r>
-                        <a:rPr lang="en-US" sz="800" dirty="0">
+                        <a:rPr lang="en-US" sz="750" dirty="0">
                           <a:solidFill>
                             <a:srgbClr val="F8FAFC"/>
                           </a:solidFill>
                         </a:rPr>
                         <a:t>YouTube Task Scam</a:t>
                       </a:r>
-                      <a:endParaRPr lang="en-US" sz="800" dirty="0"/>
+                      <a:endParaRPr lang="en-US" sz="750" dirty="0"/>
                     </a:p>
                   </a:txBody>
                   <a:tcPr marL="91440" marR="91440" marT="45720" marB="45720" anchor="ctr">
                     <a:lnL w="12700" cap="flat" cmpd="sng" algn="ctr">
                       <a:solidFill>
-                        <a:srgbClr val="222230"/>
+                        <a:srgbClr val="20202E"/>
                       </a:solidFill>
                       <a:prstDash val="solid"/>
                       <a:round/>
@@ -8132,7 +8132,7 @@
                     </a:lnL>
                     <a:lnR w="12700" cap="flat" cmpd="sng" algn="ctr">
                       <a:solidFill>
-                        <a:srgbClr val="222230"/>
+                        <a:srgbClr val="20202E"/>
                       </a:solidFill>
                       <a:prstDash val="solid"/>
                       <a:round/>
@@ -8141,7 +8141,7 @@
                     </a:lnR>
                     <a:lnT w="12700" cap="flat" cmpd="sng" algn="ctr">
                       <a:solidFill>
-                        <a:srgbClr val="222230"/>
+                        <a:srgbClr val="20202E"/>
                       </a:solidFill>
                       <a:prstDash val="solid"/>
                       <a:round/>
@@ -8150,7 +8150,7 @@
                     </a:lnT>
                     <a:lnB w="12700" cap="flat" cmpd="sng" algn="ctr">
                       <a:solidFill>
-                        <a:srgbClr val="222230"/>
+                        <a:srgbClr val="20202E"/>
                       </a:solidFill>
                       <a:prstDash val="solid"/>
                       <a:round/>
@@ -8168,20 +8168,20 @@
                         <a:buNone/>
                       </a:pPr>
                       <a:r>
-                        <a:rPr lang="en-US" sz="800" b="1" dirty="0">
+                        <a:rPr lang="en-US" sz="750" b="1" dirty="0">
                           <a:solidFill>
                             <a:srgbClr val="10B981"/>
                           </a:solidFill>
                         </a:rPr>
                         <a:t>38ms</a:t>
                       </a:r>
-                      <a:endParaRPr lang="en-US" sz="800" dirty="0"/>
+                      <a:endParaRPr lang="en-US" sz="750" dirty="0"/>
                     </a:p>
                   </a:txBody>
                   <a:tcPr marL="91440" marR="91440" marT="45720" marB="45720" anchor="ctr">
                     <a:lnL w="12700" cap="flat" cmpd="sng" algn="ctr">
                       <a:solidFill>
-                        <a:srgbClr val="222230"/>
+                        <a:srgbClr val="20202E"/>
                       </a:solidFill>
                       <a:prstDash val="solid"/>
                       <a:round/>
@@ -8190,7 +8190,7 @@
                     </a:lnL>
                     <a:lnR w="12700" cap="flat" cmpd="sng" algn="ctr">
                       <a:solidFill>
-                        <a:srgbClr val="222230"/>
+                        <a:srgbClr val="20202E"/>
                       </a:solidFill>
                       <a:prstDash val="solid"/>
                       <a:round/>
@@ -8199,7 +8199,7 @@
                     </a:lnR>
                     <a:lnT w="12700" cap="flat" cmpd="sng" algn="ctr">
                       <a:solidFill>
-                        <a:srgbClr val="222230"/>
+                        <a:srgbClr val="20202E"/>
                       </a:solidFill>
                       <a:prstDash val="solid"/>
                       <a:round/>
@@ -8208,7 +8208,7 @@
                     </a:lnT>
                     <a:lnB w="12700" cap="flat" cmpd="sng" algn="ctr">
                       <a:solidFill>
-                        <a:srgbClr val="222230"/>
+                        <a:srgbClr val="20202E"/>
                       </a:solidFill>
                       <a:prstDash val="solid"/>
                       <a:round/>
@@ -8226,20 +8226,20 @@
                         <a:buNone/>
                       </a:pPr>
                       <a:r>
-                        <a:rPr lang="en-US" sz="800" b="1" dirty="0">
+                        <a:rPr lang="en-US" sz="750" b="1" dirty="0">
                           <a:solidFill>
                             <a:srgbClr val="F43F5E"/>
                           </a:solidFill>
                         </a:rPr>
                         <a:t>100%</a:t>
                       </a:r>
-                      <a:endParaRPr lang="en-US" sz="800" dirty="0"/>
+                      <a:endParaRPr lang="en-US" sz="750" dirty="0"/>
                     </a:p>
                   </a:txBody>
                   <a:tcPr marL="91440" marR="91440" marT="45720" marB="45720" anchor="ctr">
                     <a:lnL w="12700" cap="flat" cmpd="sng" algn="ctr">
                       <a:solidFill>
-                        <a:srgbClr val="222230"/>
+                        <a:srgbClr val="20202E"/>
                       </a:solidFill>
                       <a:prstDash val="solid"/>
                       <a:round/>
@@ -8248,7 +8248,7 @@
                     </a:lnL>
                     <a:lnR w="12700" cap="flat" cmpd="sng" algn="ctr">
                       <a:solidFill>
-                        <a:srgbClr val="222230"/>
+                        <a:srgbClr val="20202E"/>
                       </a:solidFill>
                       <a:prstDash val="solid"/>
                       <a:round/>
@@ -8257,7 +8257,7 @@
                     </a:lnR>
                     <a:lnT w="12700" cap="flat" cmpd="sng" algn="ctr">
                       <a:solidFill>
-                        <a:srgbClr val="222230"/>
+                        <a:srgbClr val="20202E"/>
                       </a:solidFill>
                       <a:prstDash val="solid"/>
                       <a:round/>
@@ -8266,7 +8266,7 @@
                     </a:lnT>
                     <a:lnB w="12700" cap="flat" cmpd="sng" algn="ctr">
                       <a:solidFill>
-                        <a:srgbClr val="222230"/>
+                        <a:srgbClr val="20202E"/>
                       </a:solidFill>
                       <a:prstDash val="solid"/>
                       <a:round/>
@@ -8284,20 +8284,20 @@
                         <a:buNone/>
                       </a:pPr>
                       <a:r>
-                        <a:rPr lang="en-US" sz="800" b="1" dirty="0">
+                        <a:rPr lang="en-US" sz="750" b="1" dirty="0">
                           <a:solidFill>
                             <a:srgbClr val="F43F5E"/>
                           </a:solidFill>
                         </a:rPr>
                         <a:t>🚨 HIGH RISK</a:t>
                       </a:r>
-                      <a:endParaRPr lang="en-US" sz="800" dirty="0"/>
+                      <a:endParaRPr lang="en-US" sz="750" dirty="0"/>
                     </a:p>
                   </a:txBody>
                   <a:tcPr marL="91440" marR="91440" marT="45720" marB="45720" anchor="ctr">
                     <a:lnL w="12700" cap="flat" cmpd="sng" algn="ctr">
                       <a:solidFill>
-                        <a:srgbClr val="222230"/>
+                        <a:srgbClr val="20202E"/>
                       </a:solidFill>
                       <a:prstDash val="solid"/>
                       <a:round/>
@@ -8306,7 +8306,7 @@
                     </a:lnL>
                     <a:lnR w="12700" cap="flat" cmpd="sng" algn="ctr">
                       <a:solidFill>
-                        <a:srgbClr val="222230"/>
+                        <a:srgbClr val="20202E"/>
                       </a:solidFill>
                       <a:prstDash val="solid"/>
                       <a:round/>
@@ -8315,7 +8315,7 @@
                     </a:lnR>
                     <a:lnT w="12700" cap="flat" cmpd="sng" algn="ctr">
                       <a:solidFill>
-                        <a:srgbClr val="222230"/>
+                        <a:srgbClr val="20202E"/>
                       </a:solidFill>
                       <a:prstDash val="solid"/>
                       <a:round/>
@@ -8324,7 +8324,7 @@
                     </a:lnT>
                     <a:lnB w="12700" cap="flat" cmpd="sng" algn="ctr">
                       <a:solidFill>
-                        <a:srgbClr val="222230"/>
+                        <a:srgbClr val="20202E"/>
                       </a:solidFill>
                       <a:prstDash val="solid"/>
                       <a:round/>
@@ -8334,7 +8334,7 @@
                   </a:tcPr>
                 </a:tc>
               </a:tr>
-              <a:tr h="487680">
+              <a:tr h="426720">
                 <a:tc>
                   <a:txBody>
                     <a:bodyPr/>
@@ -8344,20 +8344,20 @@
                         <a:buNone/>
                       </a:pPr>
                       <a:r>
-                        <a:rPr lang="en-US" sz="800" dirty="0">
+                        <a:rPr lang="en-US" sz="750" dirty="0">
                           <a:solidFill>
                             <a:srgbClr val="F8FAFC"/>
                           </a:solidFill>
                         </a:rPr>
                         <a:t>Bijli Cut Threat</a:t>
                       </a:r>
-                      <a:endParaRPr lang="en-US" sz="800" dirty="0"/>
+                      <a:endParaRPr lang="en-US" sz="750" dirty="0"/>
                     </a:p>
                   </a:txBody>
                   <a:tcPr marL="91440" marR="91440" marT="45720" marB="45720" anchor="ctr">
                     <a:lnL w="12700" cap="flat" cmpd="sng" algn="ctr">
                       <a:solidFill>
-                        <a:srgbClr val="222230"/>
+                        <a:srgbClr val="20202E"/>
                       </a:solidFill>
                       <a:prstDash val="solid"/>
                       <a:round/>
@@ -8366,7 +8366,7 @@
                     </a:lnL>
                     <a:lnR w="12700" cap="flat" cmpd="sng" algn="ctr">
                       <a:solidFill>
-                        <a:srgbClr val="222230"/>
+                        <a:srgbClr val="20202E"/>
                       </a:solidFill>
                       <a:prstDash val="solid"/>
                       <a:round/>
@@ -8375,7 +8375,7 @@
                     </a:lnR>
                     <a:lnT w="12700" cap="flat" cmpd="sng" algn="ctr">
                       <a:solidFill>
-                        <a:srgbClr val="222230"/>
+                        <a:srgbClr val="20202E"/>
                       </a:solidFill>
                       <a:prstDash val="solid"/>
                       <a:round/>
@@ -8384,7 +8384,7 @@
                     </a:lnT>
                     <a:lnB w="12700" cap="flat" cmpd="sng" algn="ctr">
                       <a:solidFill>
-                        <a:srgbClr val="222230"/>
+                        <a:srgbClr val="20202E"/>
                       </a:solidFill>
                       <a:prstDash val="solid"/>
                       <a:round/>
@@ -8402,20 +8402,20 @@
                         <a:buNone/>
                       </a:pPr>
                       <a:r>
-                        <a:rPr lang="en-US" sz="800" b="1" dirty="0">
+                        <a:rPr lang="en-US" sz="750" b="1" dirty="0">
                           <a:solidFill>
                             <a:srgbClr val="10B981"/>
                           </a:solidFill>
                         </a:rPr>
                         <a:t>42ms</a:t>
                       </a:r>
-                      <a:endParaRPr lang="en-US" sz="800" dirty="0"/>
+                      <a:endParaRPr lang="en-US" sz="750" dirty="0"/>
                     </a:p>
                   </a:txBody>
                   <a:tcPr marL="91440" marR="91440" marT="45720" marB="45720" anchor="ctr">
                     <a:lnL w="12700" cap="flat" cmpd="sng" algn="ctr">
                       <a:solidFill>
-                        <a:srgbClr val="222230"/>
+                        <a:srgbClr val="20202E"/>
                       </a:solidFill>
                       <a:prstDash val="solid"/>
                       <a:round/>
@@ -8424,7 +8424,7 @@
                     </a:lnL>
                     <a:lnR w="12700" cap="flat" cmpd="sng" algn="ctr">
                       <a:solidFill>
-                        <a:srgbClr val="222230"/>
+                        <a:srgbClr val="20202E"/>
                       </a:solidFill>
                       <a:prstDash val="solid"/>
                       <a:round/>
@@ -8433,7 +8433,7 @@
                     </a:lnR>
                     <a:lnT w="12700" cap="flat" cmpd="sng" algn="ctr">
                       <a:solidFill>
-                        <a:srgbClr val="222230"/>
+                        <a:srgbClr val="20202E"/>
                       </a:solidFill>
                       <a:prstDash val="solid"/>
                       <a:round/>
@@ -8442,7 +8442,7 @@
                     </a:lnT>
                     <a:lnB w="12700" cap="flat" cmpd="sng" algn="ctr">
                       <a:solidFill>
-                        <a:srgbClr val="222230"/>
+                        <a:srgbClr val="20202E"/>
                       </a:solidFill>
                       <a:prstDash val="solid"/>
                       <a:round/>
@@ -8460,20 +8460,20 @@
                         <a:buNone/>
                       </a:pPr>
                       <a:r>
-                        <a:rPr lang="en-US" sz="800" b="1" dirty="0">
+                        <a:rPr lang="en-US" sz="750" b="1" dirty="0">
                           <a:solidFill>
                             <a:srgbClr val="F43F5E"/>
                           </a:solidFill>
                         </a:rPr>
                         <a:t>100%</a:t>
                       </a:r>
-                      <a:endParaRPr lang="en-US" sz="800" dirty="0"/>
+                      <a:endParaRPr lang="en-US" sz="750" dirty="0"/>
                     </a:p>
                   </a:txBody>
                   <a:tcPr marL="91440" marR="91440" marT="45720" marB="45720" anchor="ctr">
                     <a:lnL w="12700" cap="flat" cmpd="sng" algn="ctr">
                       <a:solidFill>
-                        <a:srgbClr val="222230"/>
+                        <a:srgbClr val="20202E"/>
                       </a:solidFill>
                       <a:prstDash val="solid"/>
                       <a:round/>
@@ -8482,7 +8482,7 @@
                     </a:lnL>
                     <a:lnR w="12700" cap="flat" cmpd="sng" algn="ctr">
                       <a:solidFill>
-                        <a:srgbClr val="222230"/>
+                        <a:srgbClr val="20202E"/>
                       </a:solidFill>
                       <a:prstDash val="solid"/>
                       <a:round/>
@@ -8491,7 +8491,7 @@
                     </a:lnR>
                     <a:lnT w="12700" cap="flat" cmpd="sng" algn="ctr">
                       <a:solidFill>
-                        <a:srgbClr val="222230"/>
+                        <a:srgbClr val="20202E"/>
                       </a:solidFill>
                       <a:prstDash val="solid"/>
                       <a:round/>
@@ -8500,7 +8500,7 @@
                     </a:lnT>
                     <a:lnB w="12700" cap="flat" cmpd="sng" algn="ctr">
                       <a:solidFill>
-                        <a:srgbClr val="222230"/>
+                        <a:srgbClr val="20202E"/>
                       </a:solidFill>
                       <a:prstDash val="solid"/>
                       <a:round/>
@@ -8518,20 +8518,20 @@
                         <a:buNone/>
                       </a:pPr>
                       <a:r>
-                        <a:rPr lang="en-US" sz="800" b="1" dirty="0">
+                        <a:rPr lang="en-US" sz="750" b="1" dirty="0">
                           <a:solidFill>
                             <a:srgbClr val="F43F5E"/>
                           </a:solidFill>
                         </a:rPr>
                         <a:t>🚨 HIGH RISK</a:t>
                       </a:r>
-                      <a:endParaRPr lang="en-US" sz="800" dirty="0"/>
+                      <a:endParaRPr lang="en-US" sz="750" dirty="0"/>
                     </a:p>
                   </a:txBody>
                   <a:tcPr marL="91440" marR="91440" marT="45720" marB="45720" anchor="ctr">
                     <a:lnL w="12700" cap="flat" cmpd="sng" algn="ctr">
                       <a:solidFill>
-                        <a:srgbClr val="222230"/>
+                        <a:srgbClr val="20202E"/>
                       </a:solidFill>
                       <a:prstDash val="solid"/>
                       <a:round/>
@@ -8540,7 +8540,7 @@
                     </a:lnL>
                     <a:lnR w="12700" cap="flat" cmpd="sng" algn="ctr">
                       <a:solidFill>
-                        <a:srgbClr val="222230"/>
+                        <a:srgbClr val="20202E"/>
                       </a:solidFill>
                       <a:prstDash val="solid"/>
                       <a:round/>
@@ -8549,7 +8549,7 @@
                     </a:lnR>
                     <a:lnT w="12700" cap="flat" cmpd="sng" algn="ctr">
                       <a:solidFill>
-                        <a:srgbClr val="222230"/>
+                        <a:srgbClr val="20202E"/>
                       </a:solidFill>
                       <a:prstDash val="solid"/>
                       <a:round/>
@@ -8558,7 +8558,7 @@
                     </a:lnT>
                     <a:lnB w="12700" cap="flat" cmpd="sng" algn="ctr">
                       <a:solidFill>
-                        <a:srgbClr val="222230"/>
+                        <a:srgbClr val="20202E"/>
                       </a:solidFill>
                       <a:prstDash val="solid"/>
                       <a:round/>
@@ -8568,7 +8568,7 @@
                   </a:tcPr>
                 </a:tc>
               </a:tr>
-              <a:tr h="487680">
+              <a:tr h="426720">
                 <a:tc>
                   <a:txBody>
                     <a:bodyPr/>
@@ -8578,20 +8578,20 @@
                         <a:buNone/>
                       </a:pPr>
                       <a:r>
-                        <a:rPr lang="en-US" sz="800" dirty="0">
+                        <a:rPr lang="en-US" sz="750" dirty="0">
                           <a:solidFill>
                             <a:srgbClr val="F8FAFC"/>
                           </a:solidFill>
                         </a:rPr>
                         <a:t>SBI KYC Leetspeak</a:t>
                       </a:r>
-                      <a:endParaRPr lang="en-US" sz="800" dirty="0"/>
+                      <a:endParaRPr lang="en-US" sz="750" dirty="0"/>
                     </a:p>
                   </a:txBody>
                   <a:tcPr marL="91440" marR="91440" marT="45720" marB="45720" anchor="ctr">
                     <a:lnL w="12700" cap="flat" cmpd="sng" algn="ctr">
                       <a:solidFill>
-                        <a:srgbClr val="222230"/>
+                        <a:srgbClr val="20202E"/>
                       </a:solidFill>
                       <a:prstDash val="solid"/>
                       <a:round/>
@@ -8600,7 +8600,7 @@
                     </a:lnL>
                     <a:lnR w="12700" cap="flat" cmpd="sng" algn="ctr">
                       <a:solidFill>
-                        <a:srgbClr val="222230"/>
+                        <a:srgbClr val="20202E"/>
                       </a:solidFill>
                       <a:prstDash val="solid"/>
                       <a:round/>
@@ -8609,7 +8609,7 @@
                     </a:lnR>
                     <a:lnT w="12700" cap="flat" cmpd="sng" algn="ctr">
                       <a:solidFill>
-                        <a:srgbClr val="222230"/>
+                        <a:srgbClr val="20202E"/>
                       </a:solidFill>
                       <a:prstDash val="solid"/>
                       <a:round/>
@@ -8618,7 +8618,7 @@
                     </a:lnT>
                     <a:lnB w="12700" cap="flat" cmpd="sng" algn="ctr">
                       <a:solidFill>
-                        <a:srgbClr val="222230"/>
+                        <a:srgbClr val="20202E"/>
                       </a:solidFill>
                       <a:prstDash val="solid"/>
                       <a:round/>
@@ -8636,20 +8636,20 @@
                         <a:buNone/>
                       </a:pPr>
                       <a:r>
-                        <a:rPr lang="en-US" sz="800" b="1" dirty="0">
+                        <a:rPr lang="en-US" sz="750" b="1" dirty="0">
                           <a:solidFill>
                             <a:srgbClr val="10B981"/>
                           </a:solidFill>
                         </a:rPr>
                         <a:t>35ms</a:t>
                       </a:r>
-                      <a:endParaRPr lang="en-US" sz="800" dirty="0"/>
+                      <a:endParaRPr lang="en-US" sz="750" dirty="0"/>
                     </a:p>
                   </a:txBody>
                   <a:tcPr marL="91440" marR="91440" marT="45720" marB="45720" anchor="ctr">
                     <a:lnL w="12700" cap="flat" cmpd="sng" algn="ctr">
                       <a:solidFill>
-                        <a:srgbClr val="222230"/>
+                        <a:srgbClr val="20202E"/>
                       </a:solidFill>
                       <a:prstDash val="solid"/>
                       <a:round/>
@@ -8658,7 +8658,7 @@
                     </a:lnL>
                     <a:lnR w="12700" cap="flat" cmpd="sng" algn="ctr">
                       <a:solidFill>
-                        <a:srgbClr val="222230"/>
+                        <a:srgbClr val="20202E"/>
                       </a:solidFill>
                       <a:prstDash val="solid"/>
                       <a:round/>
@@ -8667,7 +8667,7 @@
                     </a:lnR>
                     <a:lnT w="12700" cap="flat" cmpd="sng" algn="ctr">
                       <a:solidFill>
-                        <a:srgbClr val="222230"/>
+                        <a:srgbClr val="20202E"/>
                       </a:solidFill>
                       <a:prstDash val="solid"/>
                       <a:round/>
@@ -8676,7 +8676,7 @@
                     </a:lnT>
                     <a:lnB w="12700" cap="flat" cmpd="sng" algn="ctr">
                       <a:solidFill>
-                        <a:srgbClr val="222230"/>
+                        <a:srgbClr val="20202E"/>
                       </a:solidFill>
                       <a:prstDash val="solid"/>
                       <a:round/>
@@ -8694,20 +8694,20 @@
                         <a:buNone/>
                       </a:pPr>
                       <a:r>
-                        <a:rPr lang="en-US" sz="800" b="1" dirty="0">
+                        <a:rPr lang="en-US" sz="750" b="1" dirty="0">
                           <a:solidFill>
                             <a:srgbClr val="F43F5E"/>
                           </a:solidFill>
                         </a:rPr>
                         <a:t>100%</a:t>
                       </a:r>
-                      <a:endParaRPr lang="en-US" sz="800" dirty="0"/>
+                      <a:endParaRPr lang="en-US" sz="750" dirty="0"/>
                     </a:p>
                   </a:txBody>
                   <a:tcPr marL="91440" marR="91440" marT="45720" marB="45720" anchor="ctr">
                     <a:lnL w="12700" cap="flat" cmpd="sng" algn="ctr">
                       <a:solidFill>
-                        <a:srgbClr val="222230"/>
+                        <a:srgbClr val="20202E"/>
                       </a:solidFill>
                       <a:prstDash val="solid"/>
                       <a:round/>
@@ -8716,7 +8716,7 @@
                     </a:lnL>
                     <a:lnR w="12700" cap="flat" cmpd="sng" algn="ctr">
                       <a:solidFill>
-                        <a:srgbClr val="222230"/>
+                        <a:srgbClr val="20202E"/>
                       </a:solidFill>
                       <a:prstDash val="solid"/>
                       <a:round/>
@@ -8725,7 +8725,7 @@
                     </a:lnR>
                     <a:lnT w="12700" cap="flat" cmpd="sng" algn="ctr">
                       <a:solidFill>
-                        <a:srgbClr val="222230"/>
+                        <a:srgbClr val="20202E"/>
                       </a:solidFill>
                       <a:prstDash val="solid"/>
                       <a:round/>
@@ -8734,7 +8734,7 @@
                     </a:lnT>
                     <a:lnB w="12700" cap="flat" cmpd="sng" algn="ctr">
                       <a:solidFill>
-                        <a:srgbClr val="222230"/>
+                        <a:srgbClr val="20202E"/>
                       </a:solidFill>
                       <a:prstDash val="solid"/>
                       <a:round/>
@@ -8752,20 +8752,20 @@
                         <a:buNone/>
                       </a:pPr>
                       <a:r>
-                        <a:rPr lang="en-US" sz="800" b="1" dirty="0">
+                        <a:rPr lang="en-US" sz="750" b="1" dirty="0">
                           <a:solidFill>
                             <a:srgbClr val="F43F5E"/>
                           </a:solidFill>
                         </a:rPr>
                         <a:t>🚨 HIGH RISK</a:t>
                       </a:r>
-                      <a:endParaRPr lang="en-US" sz="800" dirty="0"/>
+                      <a:endParaRPr lang="en-US" sz="750" dirty="0"/>
                     </a:p>
                   </a:txBody>
                   <a:tcPr marL="91440" marR="91440" marT="45720" marB="45720" anchor="ctr">
                     <a:lnL w="12700" cap="flat" cmpd="sng" algn="ctr">
                       <a:solidFill>
-                        <a:srgbClr val="222230"/>
+                        <a:srgbClr val="20202E"/>
                       </a:solidFill>
                       <a:prstDash val="solid"/>
                       <a:round/>
@@ -8774,7 +8774,7 @@
                     </a:lnL>
                     <a:lnR w="12700" cap="flat" cmpd="sng" algn="ctr">
                       <a:solidFill>
-                        <a:srgbClr val="222230"/>
+                        <a:srgbClr val="20202E"/>
                       </a:solidFill>
                       <a:prstDash val="solid"/>
                       <a:round/>
@@ -8783,7 +8783,7 @@
                     </a:lnR>
                     <a:lnT w="12700" cap="flat" cmpd="sng" algn="ctr">
                       <a:solidFill>
-                        <a:srgbClr val="222230"/>
+                        <a:srgbClr val="20202E"/>
                       </a:solidFill>
                       <a:prstDash val="solid"/>
                       <a:round/>
@@ -8792,7 +8792,7 @@
                     </a:lnT>
                     <a:lnB w="12700" cap="flat" cmpd="sng" algn="ctr">
                       <a:solidFill>
-                        <a:srgbClr val="222230"/>
+                        <a:srgbClr val="20202E"/>
                       </a:solidFill>
                       <a:prstDash val="solid"/>
                       <a:round/>
@@ -8802,7 +8802,7 @@
                   </a:tcPr>
                 </a:tc>
               </a:tr>
-              <a:tr h="487680">
+              <a:tr h="426720">
                 <a:tc>
                   <a:txBody>
                     <a:bodyPr/>
@@ -8812,20 +8812,20 @@
                         <a:buNone/>
                       </a:pPr>
                       <a:r>
-                        <a:rPr lang="en-US" sz="800" dirty="0">
+                        <a:rPr lang="en-US" sz="750" dirty="0">
                           <a:solidFill>
                             <a:srgbClr val="F8FAFC"/>
                           </a:solidFill>
                         </a:rPr>
                         <a:t>Traffic e-Challan APK</a:t>
                       </a:r>
-                      <a:endParaRPr lang="en-US" sz="800" dirty="0"/>
+                      <a:endParaRPr lang="en-US" sz="750" dirty="0"/>
                     </a:p>
                   </a:txBody>
                   <a:tcPr marL="91440" marR="91440" marT="45720" marB="45720" anchor="ctr">
                     <a:lnL w="12700" cap="flat" cmpd="sng" algn="ctr">
                       <a:solidFill>
-                        <a:srgbClr val="222230"/>
+                        <a:srgbClr val="20202E"/>
                       </a:solidFill>
                       <a:prstDash val="solid"/>
                       <a:round/>
@@ -8834,7 +8834,7 @@
                     </a:lnL>
                     <a:lnR w="12700" cap="flat" cmpd="sng" algn="ctr">
                       <a:solidFill>
-                        <a:srgbClr val="222230"/>
+                        <a:srgbClr val="20202E"/>
                       </a:solidFill>
                       <a:prstDash val="solid"/>
                       <a:round/>
@@ -8843,7 +8843,7 @@
                     </a:lnR>
                     <a:lnT w="12700" cap="flat" cmpd="sng" algn="ctr">
                       <a:solidFill>
-                        <a:srgbClr val="222230"/>
+                        <a:srgbClr val="20202E"/>
                       </a:solidFill>
                       <a:prstDash val="solid"/>
                       <a:round/>
@@ -8852,7 +8852,7 @@
                     </a:lnT>
                     <a:lnB w="12700" cap="flat" cmpd="sng" algn="ctr">
                       <a:solidFill>
-                        <a:srgbClr val="222230"/>
+                        <a:srgbClr val="20202E"/>
                       </a:solidFill>
                       <a:prstDash val="solid"/>
                       <a:round/>
@@ -8870,20 +8870,20 @@
                         <a:buNone/>
                       </a:pPr>
                       <a:r>
-                        <a:rPr lang="en-US" sz="800" b="1" dirty="0">
+                        <a:rPr lang="en-US" sz="750" b="1" dirty="0">
                           <a:solidFill>
                             <a:srgbClr val="10B981"/>
                           </a:solidFill>
                         </a:rPr>
                         <a:t>44ms</a:t>
                       </a:r>
-                      <a:endParaRPr lang="en-US" sz="800" dirty="0"/>
+                      <a:endParaRPr lang="en-US" sz="750" dirty="0"/>
                     </a:p>
                   </a:txBody>
                   <a:tcPr marL="91440" marR="91440" marT="45720" marB="45720" anchor="ctr">
                     <a:lnL w="12700" cap="flat" cmpd="sng" algn="ctr">
                       <a:solidFill>
-                        <a:srgbClr val="222230"/>
+                        <a:srgbClr val="20202E"/>
                       </a:solidFill>
                       <a:prstDash val="solid"/>
                       <a:round/>
@@ -8892,7 +8892,7 @@
                     </a:lnL>
                     <a:lnR w="12700" cap="flat" cmpd="sng" algn="ctr">
                       <a:solidFill>
-                        <a:srgbClr val="222230"/>
+                        <a:srgbClr val="20202E"/>
                       </a:solidFill>
                       <a:prstDash val="solid"/>
                       <a:round/>
@@ -8901,7 +8901,7 @@
                     </a:lnR>
                     <a:lnT w="12700" cap="flat" cmpd="sng" algn="ctr">
                       <a:solidFill>
-                        <a:srgbClr val="222230"/>
+                        <a:srgbClr val="20202E"/>
                       </a:solidFill>
                       <a:prstDash val="solid"/>
                       <a:round/>
@@ -8910,7 +8910,7 @@
                     </a:lnT>
                     <a:lnB w="12700" cap="flat" cmpd="sng" algn="ctr">
                       <a:solidFill>
-                        <a:srgbClr val="222230"/>
+                        <a:srgbClr val="20202E"/>
                       </a:solidFill>
                       <a:prstDash val="solid"/>
                       <a:round/>
@@ -8928,20 +8928,20 @@
                         <a:buNone/>
                       </a:pPr>
                       <a:r>
-                        <a:rPr lang="en-US" sz="800" b="1" dirty="0">
+                        <a:rPr lang="en-US" sz="750" b="1" dirty="0">
                           <a:solidFill>
                             <a:srgbClr val="F43F5E"/>
                           </a:solidFill>
                         </a:rPr>
                         <a:t>100%</a:t>
                       </a:r>
-                      <a:endParaRPr lang="en-US" sz="800" dirty="0"/>
+                      <a:endParaRPr lang="en-US" sz="750" dirty="0"/>
                     </a:p>
                   </a:txBody>
                   <a:tcPr marL="91440" marR="91440" marT="45720" marB="45720" anchor="ctr">
                     <a:lnL w="12700" cap="flat" cmpd="sng" algn="ctr">
                       <a:solidFill>
-                        <a:srgbClr val="222230"/>
+                        <a:srgbClr val="20202E"/>
                       </a:solidFill>
                       <a:prstDash val="solid"/>
                       <a:round/>
@@ -8950,7 +8950,7 @@
                     </a:lnL>
                     <a:lnR w="12700" cap="flat" cmpd="sng" algn="ctr">
                       <a:solidFill>
-                        <a:srgbClr val="222230"/>
+                        <a:srgbClr val="20202E"/>
                       </a:solidFill>
                       <a:prstDash val="solid"/>
                       <a:round/>
@@ -8959,7 +8959,7 @@
                     </a:lnR>
                     <a:lnT w="12700" cap="flat" cmpd="sng" algn="ctr">
                       <a:solidFill>
-                        <a:srgbClr val="222230"/>
+                        <a:srgbClr val="20202E"/>
                       </a:solidFill>
                       <a:prstDash val="solid"/>
                       <a:round/>
@@ -8968,7 +8968,7 @@
                     </a:lnT>
                     <a:lnB w="12700" cap="flat" cmpd="sng" algn="ctr">
                       <a:solidFill>
-                        <a:srgbClr val="222230"/>
+                        <a:srgbClr val="20202E"/>
                       </a:solidFill>
                       <a:prstDash val="solid"/>
                       <a:round/>
@@ -8986,20 +8986,20 @@
                         <a:buNone/>
                       </a:pPr>
                       <a:r>
-                        <a:rPr lang="en-US" sz="800" b="1" dirty="0">
+                        <a:rPr lang="en-US" sz="750" b="1" dirty="0">
                           <a:solidFill>
                             <a:srgbClr val="F43F5E"/>
                           </a:solidFill>
                         </a:rPr>
                         <a:t>🚨 HIGH RISK</a:t>
                       </a:r>
-                      <a:endParaRPr lang="en-US" sz="800" dirty="0"/>
+                      <a:endParaRPr lang="en-US" sz="750" dirty="0"/>
                     </a:p>
                   </a:txBody>
                   <a:tcPr marL="91440" marR="91440" marT="45720" marB="45720" anchor="ctr">
                     <a:lnL w="12700" cap="flat" cmpd="sng" algn="ctr">
                       <a:solidFill>
-                        <a:srgbClr val="222230"/>
+                        <a:srgbClr val="20202E"/>
                       </a:solidFill>
                       <a:prstDash val="solid"/>
                       <a:round/>
@@ -9008,7 +9008,7 @@
                     </a:lnL>
                     <a:lnR w="12700" cap="flat" cmpd="sng" algn="ctr">
                       <a:solidFill>
-                        <a:srgbClr val="222230"/>
+                        <a:srgbClr val="20202E"/>
                       </a:solidFill>
                       <a:prstDash val="solid"/>
                       <a:round/>
@@ -9017,7 +9017,7 @@
                     </a:lnR>
                     <a:lnT w="12700" cap="flat" cmpd="sng" algn="ctr">
                       <a:solidFill>
-                        <a:srgbClr val="222230"/>
+                        <a:srgbClr val="20202E"/>
                       </a:solidFill>
                       <a:prstDash val="solid"/>
                       <a:round/>
@@ -9026,7 +9026,7 @@
                     </a:lnT>
                     <a:lnB w="12700" cap="flat" cmpd="sng" algn="ctr">
                       <a:solidFill>
-                        <a:srgbClr val="222230"/>
+                        <a:srgbClr val="20202E"/>
                       </a:solidFill>
                       <a:prstDash val="solid"/>
                       <a:round/>
@@ -9036,7 +9036,7 @@
                   </a:tcPr>
                 </a:tc>
               </a:tr>
-              <a:tr h="487680">
+              <a:tr h="426720">
                 <a:tc>
                   <a:txBody>
                     <a:bodyPr/>
@@ -9046,20 +9046,20 @@
                         <a:buNone/>
                       </a:pPr>
                       <a:r>
-                        <a:rPr lang="en-US" sz="800" dirty="0">
+                        <a:rPr lang="en-US" sz="750" dirty="0">
                           <a:solidFill>
                             <a:srgbClr val="F8FAFC"/>
                           </a:solidFill>
                         </a:rPr>
                         <a:t>Benign Hindi Chat</a:t>
                       </a:r>
-                      <a:endParaRPr lang="en-US" sz="800" dirty="0"/>
+                      <a:endParaRPr lang="en-US" sz="750" dirty="0"/>
                     </a:p>
                   </a:txBody>
                   <a:tcPr marL="91440" marR="91440" marT="45720" marB="45720" anchor="ctr">
                     <a:lnL w="12700" cap="flat" cmpd="sng" algn="ctr">
                       <a:solidFill>
-                        <a:srgbClr val="222230"/>
+                        <a:srgbClr val="20202E"/>
                       </a:solidFill>
                       <a:prstDash val="solid"/>
                       <a:round/>
@@ -9068,7 +9068,7 @@
                     </a:lnL>
                     <a:lnR w="12700" cap="flat" cmpd="sng" algn="ctr">
                       <a:solidFill>
-                        <a:srgbClr val="222230"/>
+                        <a:srgbClr val="20202E"/>
                       </a:solidFill>
                       <a:prstDash val="solid"/>
                       <a:round/>
@@ -9077,7 +9077,7 @@
                     </a:lnR>
                     <a:lnT w="12700" cap="flat" cmpd="sng" algn="ctr">
                       <a:solidFill>
-                        <a:srgbClr val="222230"/>
+                        <a:srgbClr val="20202E"/>
                       </a:solidFill>
                       <a:prstDash val="solid"/>
                       <a:round/>
@@ -9086,7 +9086,7 @@
                     </a:lnT>
                     <a:lnB w="12700" cap="flat" cmpd="sng" algn="ctr">
                       <a:solidFill>
-                        <a:srgbClr val="222230"/>
+                        <a:srgbClr val="20202E"/>
                       </a:solidFill>
                       <a:prstDash val="solid"/>
                       <a:round/>
@@ -9104,20 +9104,20 @@
                         <a:buNone/>
                       </a:pPr>
                       <a:r>
-                        <a:rPr lang="en-US" sz="800" b="1" dirty="0">
+                        <a:rPr lang="en-US" sz="750" b="1" dirty="0">
                           <a:solidFill>
                             <a:srgbClr val="10B981"/>
                           </a:solidFill>
                         </a:rPr>
                         <a:t>28ms</a:t>
                       </a:r>
-                      <a:endParaRPr lang="en-US" sz="800" dirty="0"/>
+                      <a:endParaRPr lang="en-US" sz="750" dirty="0"/>
                     </a:p>
                   </a:txBody>
                   <a:tcPr marL="91440" marR="91440" marT="45720" marB="45720" anchor="ctr">
                     <a:lnL w="12700" cap="flat" cmpd="sng" algn="ctr">
                       <a:solidFill>
-                        <a:srgbClr val="222230"/>
+                        <a:srgbClr val="20202E"/>
                       </a:solidFill>
                       <a:prstDash val="solid"/>
                       <a:round/>
@@ -9126,7 +9126,7 @@
                     </a:lnL>
                     <a:lnR w="12700" cap="flat" cmpd="sng" algn="ctr">
                       <a:solidFill>
-                        <a:srgbClr val="222230"/>
+                        <a:srgbClr val="20202E"/>
                       </a:solidFill>
                       <a:prstDash val="solid"/>
                       <a:round/>
@@ -9135,7 +9135,7 @@
                     </a:lnR>
                     <a:lnT w="12700" cap="flat" cmpd="sng" algn="ctr">
                       <a:solidFill>
-                        <a:srgbClr val="222230"/>
+                        <a:srgbClr val="20202E"/>
                       </a:solidFill>
                       <a:prstDash val="solid"/>
                       <a:round/>
@@ -9144,7 +9144,7 @@
                     </a:lnT>
                     <a:lnB w="12700" cap="flat" cmpd="sng" algn="ctr">
                       <a:solidFill>
-                        <a:srgbClr val="222230"/>
+                        <a:srgbClr val="20202E"/>
                       </a:solidFill>
                       <a:prstDash val="solid"/>
                       <a:round/>
@@ -9162,20 +9162,20 @@
                         <a:buNone/>
                       </a:pPr>
                       <a:r>
-                        <a:rPr lang="en-US" sz="800" b="1" dirty="0">
+                        <a:rPr lang="en-US" sz="750" b="1" dirty="0">
                           <a:solidFill>
                             <a:srgbClr val="10B981"/>
                           </a:solidFill>
                         </a:rPr>
                         <a:t>0%</a:t>
                       </a:r>
-                      <a:endParaRPr lang="en-US" sz="800" dirty="0"/>
+                      <a:endParaRPr lang="en-US" sz="750" dirty="0"/>
                     </a:p>
                   </a:txBody>
                   <a:tcPr marL="91440" marR="91440" marT="45720" marB="45720" anchor="ctr">
                     <a:lnL w="12700" cap="flat" cmpd="sng" algn="ctr">
                       <a:solidFill>
-                        <a:srgbClr val="222230"/>
+                        <a:srgbClr val="20202E"/>
                       </a:solidFill>
                       <a:prstDash val="solid"/>
                       <a:round/>
@@ -9184,7 +9184,7 @@
                     </a:lnL>
                     <a:lnR w="12700" cap="flat" cmpd="sng" algn="ctr">
                       <a:solidFill>
-                        <a:srgbClr val="222230"/>
+                        <a:srgbClr val="20202E"/>
                       </a:solidFill>
                       <a:prstDash val="solid"/>
                       <a:round/>
@@ -9193,7 +9193,7 @@
                     </a:lnR>
                     <a:lnT w="12700" cap="flat" cmpd="sng" algn="ctr">
                       <a:solidFill>
-                        <a:srgbClr val="222230"/>
+                        <a:srgbClr val="20202E"/>
                       </a:solidFill>
                       <a:prstDash val="solid"/>
                       <a:round/>
@@ -9202,7 +9202,7 @@
                     </a:lnT>
                     <a:lnB w="12700" cap="flat" cmpd="sng" algn="ctr">
                       <a:solidFill>
-                        <a:srgbClr val="222230"/>
+                        <a:srgbClr val="20202E"/>
                       </a:solidFill>
                       <a:prstDash val="solid"/>
                       <a:round/>
@@ -9220,20 +9220,20 @@
                         <a:buNone/>
                       </a:pPr>
                       <a:r>
-                        <a:rPr lang="en-US" sz="800" b="1" dirty="0">
+                        <a:rPr lang="en-US" sz="750" b="1" dirty="0">
                           <a:solidFill>
                             <a:srgbClr val="10B981"/>
                           </a:solidFill>
                         </a:rPr>
                         <a:t>✅ SAFE &amp; VERIFIED</a:t>
                       </a:r>
-                      <a:endParaRPr lang="en-US" sz="800" dirty="0"/>
+                      <a:endParaRPr lang="en-US" sz="750" dirty="0"/>
                     </a:p>
                   </a:txBody>
                   <a:tcPr marL="91440" marR="91440" marT="45720" marB="45720" anchor="ctr">
                     <a:lnL w="12700" cap="flat" cmpd="sng" algn="ctr">
                       <a:solidFill>
-                        <a:srgbClr val="222230"/>
+                        <a:srgbClr val="20202E"/>
                       </a:solidFill>
                       <a:prstDash val="solid"/>
                       <a:round/>
@@ -9242,7 +9242,7 @@
                     </a:lnL>
                     <a:lnR w="12700" cap="flat" cmpd="sng" algn="ctr">
                       <a:solidFill>
-                        <a:srgbClr val="222230"/>
+                        <a:srgbClr val="20202E"/>
                       </a:solidFill>
                       <a:prstDash val="solid"/>
                       <a:round/>
@@ -9251,7 +9251,7 @@
                     </a:lnR>
                     <a:lnT w="12700" cap="flat" cmpd="sng" algn="ctr">
                       <a:solidFill>
-                        <a:srgbClr val="222230"/>
+                        <a:srgbClr val="20202E"/>
                       </a:solidFill>
                       <a:prstDash val="solid"/>
                       <a:round/>
@@ -9260,7 +9260,7 @@
                     </a:lnT>
                     <a:lnB w="12700" cap="flat" cmpd="sng" algn="ctr">
                       <a:solidFill>
-                        <a:srgbClr val="222230"/>
+                        <a:srgbClr val="20202E"/>
                       </a:solidFill>
                       <a:prstDash val="solid"/>
                       <a:round/>
@@ -9282,12 +9282,12 @@
         </p:nvSpPr>
         <p:spPr>
           <a:xfrm>
-            <a:off x="548640" y="4389120"/>
-            <a:ext cx="5120640" cy="2011680"/>
+            <a:off x="548640" y="3840480"/>
+            <a:ext cx="5120640" cy="2194560"/>
           </a:xfrm>
           <a:prstGeom prst="rect">
             <a:avLst>
-              <a:gd name="adj" fmla="val 2273"/>
+              <a:gd name="adj" fmla="val 1667"/>
             </a:avLst>
           </a:prstGeom>
           <a:solidFill>
@@ -9309,8 +9309,8 @@
         </p:nvSpPr>
         <p:spPr>
           <a:xfrm>
-            <a:off x="777240" y="4526280"/>
-            <a:ext cx="4663440" cy="274320"/>
+            <a:off x="777240" y="3977640"/>
+            <a:ext cx="4663440" cy="228600"/>
           </a:xfrm>
           <a:prstGeom prst="rect">
             <a:avLst/>
@@ -9326,7 +9326,7 @@
               <a:buNone/>
             </a:pPr>
             <a:r>
-              <a:rPr lang="en-US" sz="1050" b="1" dirty="0">
+              <a:rPr lang="en-US" sz="1000" b="1" dirty="0">
                 <a:solidFill>
                   <a:srgbClr val="F3DF8A"/>
                 </a:solidFill>
@@ -9336,7 +9336,7 @@
               </a:rPr>
               <a:t>🌐 Production Deployment Links:</a:t>
             </a:r>
-            <a:endParaRPr lang="en-US" sz="1050" dirty="0"/>
+            <a:endParaRPr lang="en-US" sz="1000" dirty="0"/>
           </a:p>
         </p:txBody>
       </p:sp>
@@ -9348,8 +9348,8 @@
         </p:nvSpPr>
         <p:spPr>
           <a:xfrm>
-            <a:off x="777240" y="4846320"/>
-            <a:ext cx="4663440" cy="1371600"/>
+            <a:off x="777240" y="4251960"/>
+            <a:ext cx="4663440" cy="1554480"/>
           </a:xfrm>
           <a:prstGeom prst="rect">
             <a:avLst/>
@@ -9363,12 +9363,12 @@
           <a:p>
             <a:pPr indent="0" marL="0">
               <a:lnSpc>
-                <a:spcPts val="1300"/>
+                <a:spcPts val="1200"/>
               </a:lnSpc>
               <a:buNone/>
             </a:pPr>
             <a:r>
-              <a:rPr lang="en-US" sz="850" dirty="0">
+              <a:rPr lang="en-US" sz="800" dirty="0">
                 <a:solidFill>
                   <a:srgbClr val="94A3B8"/>
                 </a:solidFill>
@@ -9378,17 +9378,17 @@
               </a:rPr>
               <a:t>• Live Web App: https://kavach-ai-ten.vercel.app/</a:t>
             </a:r>
-            <a:endParaRPr lang="en-US" sz="850" dirty="0"/>
+            <a:endParaRPr lang="en-US" sz="800" dirty="0"/>
           </a:p>
           <a:p>
             <a:pPr indent="0" marL="0">
               <a:lnSpc>
-                <a:spcPts val="1300"/>
+                <a:spcPts val="1200"/>
               </a:lnSpc>
               <a:buNone/>
             </a:pPr>
             <a:r>
-              <a:rPr lang="en-US" sz="850" dirty="0">
+              <a:rPr lang="en-US" sz="800" dirty="0">
                 <a:solidFill>
                   <a:srgbClr val="94A3B8"/>
                 </a:solidFill>
@@ -9398,17 +9398,17 @@
               </a:rPr>
               <a:t>• Open Source Code: https://github.com/bharath-0814/Kavach.ai</a:t>
             </a:r>
-            <a:endParaRPr lang="en-US" sz="850" dirty="0"/>
+            <a:endParaRPr lang="en-US" sz="800" dirty="0"/>
           </a:p>
           <a:p>
             <a:pPr indent="0" marL="0">
               <a:lnSpc>
-                <a:spcPts val="1300"/>
+                <a:spcPts val="1200"/>
               </a:lnSpc>
               <a:buNone/>
             </a:pPr>
             <a:r>
-              <a:rPr lang="en-US" sz="850" dirty="0">
+              <a:rPr lang="en-US" sz="800" dirty="0">
                 <a:solidFill>
                   <a:srgbClr val="94A3B8"/>
                 </a:solidFill>
@@ -9418,17 +9418,17 @@
               </a:rPr>
               <a:t>• Cloud Database: Turso Cloud LibSQL (AWS Mumbai)</a:t>
             </a:r>
-            <a:endParaRPr lang="en-US" sz="850" dirty="0"/>
+            <a:endParaRPr lang="en-US" sz="800" dirty="0"/>
           </a:p>
           <a:p>
             <a:pPr indent="0" marL="0">
               <a:lnSpc>
-                <a:spcPts val="1300"/>
+                <a:spcPts val="1200"/>
               </a:lnSpc>
               <a:buNone/>
             </a:pPr>
             <a:r>
-              <a:rPr lang="en-US" sz="850" dirty="0">
+              <a:rPr lang="en-US" sz="800" dirty="0">
                 <a:solidFill>
                   <a:srgbClr val="94A3B8"/>
                 </a:solidFill>
@@ -9438,7 +9438,7 @@
               </a:rPr>
               <a:t>• Multi-Model Pool: Gemini 3.5, 3.7 &amp; Flash-Latest</a:t>
             </a:r>
-            <a:endParaRPr lang="en-US" sz="850" dirty="0"/>
+            <a:endParaRPr lang="en-US" sz="800" dirty="0"/>
           </a:p>
         </p:txBody>
       </p:sp>
@@ -9450,12 +9450,12 @@
         </p:nvSpPr>
         <p:spPr>
           <a:xfrm>
-            <a:off x="5852160" y="1280160"/>
-            <a:ext cx="5788152" cy="5120640"/>
+            <a:off x="5852160" y="1115568"/>
+            <a:ext cx="5788152" cy="4937760"/>
           </a:xfrm>
           <a:prstGeom prst="rect">
             <a:avLst>
-              <a:gd name="adj" fmla="val 893"/>
+              <a:gd name="adj" fmla="val 741"/>
             </a:avLst>
           </a:prstGeom>
           <a:solidFill>
@@ -9463,7 +9463,7 @@
           </a:solidFill>
           <a:ln w="12700">
             <a:solidFill>
-              <a:srgbClr val="222230"/>
+              <a:srgbClr val="20202E"/>
             </a:solidFill>
             <a:prstDash val="solid"/>
           </a:ln>
@@ -9484,8 +9484,8 @@
         </p:blipFill>
         <p:spPr>
           <a:xfrm>
-            <a:off x="5989320" y="1417320"/>
-            <a:ext cx="5513832" cy="3657600"/>
+            <a:off x="5989320" y="1261872"/>
+            <a:ext cx="5513832" cy="3474720"/>
           </a:xfrm>
           <a:prstGeom prst="rect">
             <a:avLst/>
@@ -9500,7 +9500,7 @@
         </p:nvSpPr>
         <p:spPr>
           <a:xfrm>
-            <a:off x="6035040" y="5212080"/>
+            <a:off x="6035040" y="4983480"/>
             <a:ext cx="5394960" cy="228600"/>
           </a:xfrm>
           <a:prstGeom prst="rect">
@@ -9517,7 +9517,7 @@
               <a:buNone/>
             </a:pPr>
             <a:r>
-              <a:rPr lang="en-US" sz="950" b="1" dirty="0">
+              <a:rPr lang="en-US" sz="900" b="1" dirty="0">
                 <a:solidFill>
                   <a:srgbClr val="F3DF8A"/>
                 </a:solidFill>
@@ -9527,7 +9527,7 @@
               </a:rPr>
               <a:t>✦ Live Deobfuscation Workbench &amp; Cloud Threat Feed:</a:t>
             </a:r>
-            <a:endParaRPr lang="en-US" sz="950" dirty="0"/>
+            <a:endParaRPr lang="en-US" sz="900" dirty="0"/>
           </a:p>
         </p:txBody>
       </p:sp>
@@ -9539,8 +9539,8 @@
         </p:nvSpPr>
         <p:spPr>
           <a:xfrm>
-            <a:off x="6035040" y="5486400"/>
-            <a:ext cx="5394960" cy="640080"/>
+            <a:off x="6035040" y="5257800"/>
+            <a:ext cx="5394960" cy="594360"/>
           </a:xfrm>
           <a:prstGeom prst="rect">
             <a:avLst/>
@@ -9556,7 +9556,7 @@
               <a:buNone/>
             </a:pPr>
             <a:r>
-              <a:rPr lang="en-US" sz="800" dirty="0">
+              <a:rPr lang="en-US" sz="750" dirty="0">
                 <a:solidFill>
                   <a:srgbClr val="94A3B8"/>
                 </a:solidFill>
@@ -9566,7 +9566,7 @@
               </a:rPr>
               <a:t>Real-time Levenshtein distance matching + Turso Cloud audit trail with top-11 pagination.</a:t>
             </a:r>
-            <a:endParaRPr lang="en-US" sz="800" dirty="0"/>
+            <a:endParaRPr lang="en-US" sz="750" dirty="0"/>
           </a:p>
         </p:txBody>
       </p:sp>
@@ -9618,8 +9618,8 @@
         </p:blipFill>
         <p:spPr>
           <a:xfrm>
-            <a:off x="548640" y="320040"/>
-            <a:ext cx="594360" cy="594360"/>
+            <a:off x="548640" y="256032"/>
+            <a:ext cx="475488" cy="475488"/>
           </a:xfrm>
           <a:prstGeom prst="rect">
             <a:avLst/>
@@ -9634,8 +9634,8 @@
         </p:nvSpPr>
         <p:spPr>
           <a:xfrm>
-            <a:off x="1280160" y="320040"/>
-            <a:ext cx="9601200" cy="228600"/>
+            <a:off x="1143000" y="256032"/>
+            <a:ext cx="10424160" cy="182880"/>
           </a:xfrm>
           <a:prstGeom prst="rect">
             <a:avLst/>
@@ -9651,7 +9651,7 @@
               <a:buNone/>
             </a:pPr>
             <a:r>
-              <a:rPr lang="en-US" sz="900" b="1" dirty="0">
+              <a:rPr lang="en-US" sz="850" b="1" dirty="0">
                 <a:solidFill>
                   <a:srgbClr val="D4AF37"/>
                 </a:solidFill>
@@ -9661,7 +9661,7 @@
               </a:rPr>
               <a:t>🚀 HACKATHON ROUND 2 COMMITMENT • FUTURE ADVANCEMENTS</a:t>
             </a:r>
-            <a:endParaRPr lang="en-US" sz="900" dirty="0"/>
+            <a:endParaRPr lang="en-US" sz="850" dirty="0"/>
           </a:p>
         </p:txBody>
       </p:sp>
@@ -9673,8 +9673,8 @@
         </p:nvSpPr>
         <p:spPr>
           <a:xfrm>
-            <a:off x="1280160" y="594360"/>
-            <a:ext cx="10241280" cy="411480"/>
+            <a:off x="1143000" y="475488"/>
+            <a:ext cx="10424160" cy="365760"/>
           </a:xfrm>
           <a:prstGeom prst="rect">
             <a:avLst/>
@@ -9690,7 +9690,7 @@
               <a:buNone/>
             </a:pPr>
             <a:r>
-              <a:rPr lang="en-US" sz="1800" b="1" dirty="0">
+              <a:rPr lang="en-US" sz="1600" b="1" dirty="0">
                 <a:solidFill>
                   <a:srgbClr val="F8FAFC"/>
                 </a:solidFill>
@@ -9700,7 +9700,7 @@
               </a:rPr>
               <a:t>On-Device RAG &amp; Privacy-Preserving Self-Learning</a:t>
             </a:r>
-            <a:endParaRPr lang="en-US" sz="1800" dirty="0"/>
+            <a:endParaRPr lang="en-US" sz="1600" dirty="0"/>
           </a:p>
         </p:txBody>
       </p:sp>
@@ -9712,7 +9712,7 @@
         </p:nvSpPr>
         <p:spPr>
           <a:xfrm>
-            <a:off x="548640" y="1097280"/>
+            <a:off x="548640" y="960120"/>
             <a:ext cx="11091672" cy="0"/>
           </a:xfrm>
           <a:prstGeom prst="line">
@@ -9721,7 +9721,7 @@
           <a:noFill/>
           <a:ln w="12700">
             <a:solidFill>
-              <a:srgbClr val="20202C"/>
+              <a:srgbClr val="1C1C28"/>
             </a:solidFill>
             <a:prstDash val="solid"/>
           </a:ln>
@@ -9735,12 +9735,12 @@
         </p:nvSpPr>
         <p:spPr>
           <a:xfrm>
-            <a:off x="548640" y="1280160"/>
-            <a:ext cx="5394960" cy="5120640"/>
+            <a:off x="548640" y="1115568"/>
+            <a:ext cx="5394960" cy="4937760"/>
           </a:xfrm>
           <a:prstGeom prst="rect">
             <a:avLst>
-              <a:gd name="adj" fmla="val 893"/>
+              <a:gd name="adj" fmla="val 741"/>
             </a:avLst>
           </a:prstGeom>
           <a:solidFill>
@@ -9748,7 +9748,7 @@
           </a:solidFill>
           <a:ln w="12700">
             <a:solidFill>
-              <a:srgbClr val="222230"/>
+              <a:srgbClr val="20202E"/>
             </a:solidFill>
             <a:prstDash val="solid"/>
           </a:ln>
@@ -9762,8 +9762,8 @@
         </p:nvSpPr>
         <p:spPr>
           <a:xfrm>
-            <a:off x="777240" y="1508760"/>
-            <a:ext cx="4937760" cy="320040"/>
+            <a:off x="777240" y="1325880"/>
+            <a:ext cx="4937760" cy="274320"/>
           </a:xfrm>
           <a:prstGeom prst="rect">
             <a:avLst/>
@@ -9779,7 +9779,7 @@
               <a:buNone/>
             </a:pPr>
             <a:r>
-              <a:rPr lang="en-US" sz="1250" b="1" dirty="0">
+              <a:rPr lang="en-US" sz="1150" b="1" dirty="0">
                 <a:solidFill>
                   <a:srgbClr val="38BDF8"/>
                 </a:solidFill>
@@ -9789,7 +9789,7 @@
               </a:rPr>
               <a:t>🧠 1. Edge-Native RAG over Local Vector DB</a:t>
             </a:r>
-            <a:endParaRPr lang="en-US" sz="1250" dirty="0"/>
+            <a:endParaRPr lang="en-US" sz="1150" dirty="0"/>
           </a:p>
         </p:txBody>
       </p:sp>
@@ -9801,7 +9801,7 @@
         </p:nvSpPr>
         <p:spPr>
           <a:xfrm>
-            <a:off x="777240" y="1920240"/>
+            <a:off x="777240" y="1691640"/>
             <a:ext cx="4937760" cy="4206240"/>
           </a:xfrm>
           <a:prstGeom prst="rect">
@@ -9816,12 +9816,12 @@
           <a:p>
             <a:pPr indent="0" marL="0">
               <a:lnSpc>
-                <a:spcPts val="1400"/>
+                <a:spcPts val="1300"/>
               </a:lnSpc>
               <a:buNone/>
             </a:pPr>
             <a:r>
-              <a:rPr lang="en-US" sz="900" dirty="0">
+              <a:rPr lang="en-US" sz="850" dirty="0">
                 <a:solidFill>
                   <a:srgbClr val="94A3B8"/>
                 </a:solidFill>
@@ -9831,26 +9831,26 @@
               </a:rPr>
               <a:t>• On-Device Vector Embeddings: An ultra-compact local vector database (SQLite-VSS / local HNSW index) stores semantic embeddings of known scam tactics, fraudulent APK signatures, and vernacular evasion patterns.</a:t>
             </a:r>
-            <a:endParaRPr lang="en-US" sz="900" dirty="0"/>
+            <a:endParaRPr lang="en-US" sz="850" dirty="0"/>
           </a:p>
           <a:p>
             <a:pPr indent="0" marL="0">
               <a:lnSpc>
-                <a:spcPts val="1400"/>
+                <a:spcPts val="1300"/>
               </a:lnSpc>
               <a:buNone/>
             </a:pPr>
-            <a:endParaRPr lang="en-US" sz="900" dirty="0"/>
+            <a:endParaRPr lang="en-US" sz="850" dirty="0"/>
           </a:p>
           <a:p>
             <a:pPr indent="0" marL="0">
               <a:lnSpc>
-                <a:spcPts val="1400"/>
+                <a:spcPts val="1300"/>
               </a:lnSpc>
               <a:buNone/>
             </a:pPr>
             <a:r>
-              <a:rPr lang="en-US" sz="900" dirty="0">
+              <a:rPr lang="en-US" sz="850" dirty="0">
                 <a:solidFill>
                   <a:srgbClr val="94A3B8"/>
                 </a:solidFill>
@@ -9860,26 +9860,26 @@
               </a:rPr>
               <a:t>• Sub-10ms Cosine Similarity: When an SMS arrives, the app performs a localized vector similarity lookup completely offline.</a:t>
             </a:r>
-            <a:endParaRPr lang="en-US" sz="900" dirty="0"/>
+            <a:endParaRPr lang="en-US" sz="850" dirty="0"/>
           </a:p>
           <a:p>
             <a:pPr indent="0" marL="0">
               <a:lnSpc>
-                <a:spcPts val="1400"/>
+                <a:spcPts val="1300"/>
               </a:lnSpc>
               <a:buNone/>
             </a:pPr>
-            <a:endParaRPr lang="en-US" sz="900" dirty="0"/>
+            <a:endParaRPr lang="en-US" sz="850" dirty="0"/>
           </a:p>
           <a:p>
             <a:pPr indent="0" marL="0">
               <a:lnSpc>
-                <a:spcPts val="1400"/>
+                <a:spcPts val="1300"/>
               </a:lnSpc>
               <a:buNone/>
             </a:pPr>
             <a:r>
-              <a:rPr lang="en-US" sz="900" dirty="0">
+              <a:rPr lang="en-US" sz="850" dirty="0">
                 <a:solidFill>
                   <a:srgbClr val="94A3B8"/>
                 </a:solidFill>
@@ -9889,26 +9889,26 @@
               </a:rPr>
               <a:t>• Contextual Threat Augmentation: An on-device quantized Small Language Model (SLM) retrieves matching threat tactics and explains the exact scam modus operandi without touching the cloud.</a:t>
             </a:r>
-            <a:endParaRPr lang="en-US" sz="900" dirty="0"/>
+            <a:endParaRPr lang="en-US" sz="850" dirty="0"/>
           </a:p>
           <a:p>
             <a:pPr indent="0" marL="0">
               <a:lnSpc>
-                <a:spcPts val="1400"/>
+                <a:spcPts val="1300"/>
               </a:lnSpc>
               <a:buNone/>
             </a:pPr>
-            <a:endParaRPr lang="en-US" sz="900" dirty="0"/>
+            <a:endParaRPr lang="en-US" sz="850" dirty="0"/>
           </a:p>
           <a:p>
             <a:pPr indent="0" marL="0">
               <a:lnSpc>
-                <a:spcPts val="1400"/>
+                <a:spcPts val="1300"/>
               </a:lnSpc>
               <a:buNone/>
             </a:pPr>
             <a:r>
-              <a:rPr lang="en-US" sz="900" dirty="0">
+              <a:rPr lang="en-US" sz="850" dirty="0">
                 <a:solidFill>
                   <a:srgbClr val="94A3B8"/>
                 </a:solidFill>
@@ -9918,7 +9918,7 @@
               </a:rPr>
               <a:t>• 100% Offline Capability: Operates seamlessly in flight mode or remote rural areas with zero internet connectivity.</a:t>
             </a:r>
-            <a:endParaRPr lang="en-US" sz="900" dirty="0"/>
+            <a:endParaRPr lang="en-US" sz="850" dirty="0"/>
           </a:p>
         </p:txBody>
       </p:sp>
@@ -9930,12 +9930,12 @@
         </p:nvSpPr>
         <p:spPr>
           <a:xfrm>
-            <a:off x="6245352" y="1280160"/>
-            <a:ext cx="5394960" cy="5120640"/>
+            <a:off x="6245352" y="1115568"/>
+            <a:ext cx="5394960" cy="4937760"/>
           </a:xfrm>
           <a:prstGeom prst="rect">
             <a:avLst>
-              <a:gd name="adj" fmla="val 893"/>
+              <a:gd name="adj" fmla="val 741"/>
             </a:avLst>
           </a:prstGeom>
           <a:solidFill>
@@ -9943,7 +9943,7 @@
           </a:solidFill>
           <a:ln w="12700">
             <a:solidFill>
-              <a:srgbClr val="222230"/>
+              <a:srgbClr val="20202E"/>
             </a:solidFill>
             <a:prstDash val="solid"/>
           </a:ln>
@@ -9957,8 +9957,8 @@
         </p:nvSpPr>
         <p:spPr>
           <a:xfrm>
-            <a:off x="6473952" y="1508760"/>
-            <a:ext cx="4937760" cy="320040"/>
+            <a:off x="6473952" y="1325880"/>
+            <a:ext cx="4937760" cy="274320"/>
           </a:xfrm>
           <a:prstGeom prst="rect">
             <a:avLst/>
@@ -9974,7 +9974,7 @@
               <a:buNone/>
             </a:pPr>
             <a:r>
-              <a:rPr lang="en-US" sz="1250" b="1" dirty="0">
+              <a:rPr lang="en-US" sz="1150" b="1" dirty="0">
                 <a:solidFill>
                   <a:srgbClr val="10B981"/>
                 </a:solidFill>
@@ -9984,7 +9984,7 @@
               </a:rPr>
               <a:t>🔒 2. Privacy-First Federated Self-Learning</a:t>
             </a:r>
-            <a:endParaRPr lang="en-US" sz="1250" dirty="0"/>
+            <a:endParaRPr lang="en-US" sz="1150" dirty="0"/>
           </a:p>
         </p:txBody>
       </p:sp>
@@ -9996,7 +9996,7 @@
         </p:nvSpPr>
         <p:spPr>
           <a:xfrm>
-            <a:off x="6473952" y="1920240"/>
+            <a:off x="6473952" y="1691640"/>
             <a:ext cx="4937760" cy="4206240"/>
           </a:xfrm>
           <a:prstGeom prst="rect">
@@ -10011,12 +10011,12 @@
           <a:p>
             <a:pPr indent="0" marL="0">
               <a:lnSpc>
-                <a:spcPts val="1400"/>
+                <a:spcPts val="1300"/>
               </a:lnSpc>
               <a:buNone/>
             </a:pPr>
             <a:r>
-              <a:rPr lang="en-US" sz="900" dirty="0">
+              <a:rPr lang="en-US" sz="850" dirty="0">
                 <a:solidFill>
                   <a:srgbClr val="94A3B8"/>
                 </a:solidFill>
@@ -10026,26 +10026,26 @@
               </a:rPr>
               <a:t>• 100% DPDP Act 2023 Compliance: Personal SMS messages are never uploaded to any remote server, guaranteeing absolute citizen privacy.</a:t>
             </a:r>
-            <a:endParaRPr lang="en-US" sz="900" dirty="0"/>
+            <a:endParaRPr lang="en-US" sz="850" dirty="0"/>
           </a:p>
           <a:p>
             <a:pPr indent="0" marL="0">
               <a:lnSpc>
-                <a:spcPts val="1400"/>
+                <a:spcPts val="1300"/>
               </a:lnSpc>
               <a:buNone/>
             </a:pPr>
-            <a:endParaRPr lang="en-US" sz="900" dirty="0"/>
+            <a:endParaRPr lang="en-US" sz="850" dirty="0"/>
           </a:p>
           <a:p>
             <a:pPr indent="0" marL="0">
               <a:lnSpc>
-                <a:spcPts val="1400"/>
+                <a:spcPts val="1300"/>
               </a:lnSpc>
               <a:buNone/>
             </a:pPr>
             <a:r>
-              <a:rPr lang="en-US" sz="900" dirty="0">
+              <a:rPr lang="en-US" sz="850" dirty="0">
                 <a:solidFill>
                   <a:srgbClr val="94A3B8"/>
                 </a:solidFill>
@@ -10055,26 +10055,26 @@
               </a:rPr>
               <a:t>• Localized Dialect Adaptation: As users flag or verify emerging regional dialect SMS on their phones, the local model continuously adapts to user dialect habits.</a:t>
             </a:r>
-            <a:endParaRPr lang="en-US" sz="900" dirty="0"/>
+            <a:endParaRPr lang="en-US" sz="850" dirty="0"/>
           </a:p>
           <a:p>
             <a:pPr indent="0" marL="0">
               <a:lnSpc>
-                <a:spcPts val="1400"/>
+                <a:spcPts val="1300"/>
               </a:lnSpc>
               <a:buNone/>
             </a:pPr>
-            <a:endParaRPr lang="en-US" sz="900" dirty="0"/>
+            <a:endParaRPr lang="en-US" sz="850" dirty="0"/>
           </a:p>
           <a:p>
             <a:pPr indent="0" marL="0">
               <a:lnSpc>
-                <a:spcPts val="1400"/>
+                <a:spcPts val="1300"/>
               </a:lnSpc>
               <a:buNone/>
             </a:pPr>
             <a:r>
-              <a:rPr lang="en-US" sz="900" dirty="0">
+              <a:rPr lang="en-US" sz="850" dirty="0">
                 <a:solidFill>
                   <a:srgbClr val="94A3B8"/>
                 </a:solidFill>
@@ -10084,26 +10084,26 @@
               </a:rPr>
               <a:t>• Federated Weight Aggregation: Only encrypted mathematical gradient delta updates (not user text) are periodically synced across devices to improve the collective Indic vocabulary across India.</a:t>
             </a:r>
-            <a:endParaRPr lang="en-US" sz="900" dirty="0"/>
+            <a:endParaRPr lang="en-US" sz="850" dirty="0"/>
           </a:p>
           <a:p>
             <a:pPr indent="0" marL="0">
               <a:lnSpc>
-                <a:spcPts val="1400"/>
+                <a:spcPts val="1300"/>
               </a:lnSpc>
               <a:buNone/>
             </a:pPr>
-            <a:endParaRPr lang="en-US" sz="900" dirty="0"/>
+            <a:endParaRPr lang="en-US" sz="850" dirty="0"/>
           </a:p>
           <a:p>
             <a:pPr indent="0" marL="0">
               <a:lnSpc>
-                <a:spcPts val="1400"/>
+                <a:spcPts val="1300"/>
               </a:lnSpc>
               <a:buNone/>
             </a:pPr>
             <a:r>
-              <a:rPr lang="en-US" sz="900" dirty="0">
+              <a:rPr lang="en-US" sz="850" dirty="0">
                 <a:solidFill>
                   <a:srgbClr val="94A3B8"/>
                 </a:solidFill>
@@ -10113,7 +10113,7 @@
               </a:rPr>
               <a:t>• Hardware Secure Enclave: Executed strictly inside Apple Neural Engine / Android NNAPI.</a:t>
             </a:r>
-            <a:endParaRPr lang="en-US" sz="900" dirty="0"/>
+            <a:endParaRPr lang="en-US" sz="850" dirty="0"/>
           </a:p>
         </p:txBody>
       </p:sp>
@@ -10165,8 +10165,8 @@
         </p:blipFill>
         <p:spPr>
           <a:xfrm>
-            <a:off x="548640" y="320040"/>
-            <a:ext cx="594360" cy="594360"/>
+            <a:off x="548640" y="256032"/>
+            <a:ext cx="475488" cy="475488"/>
           </a:xfrm>
           <a:prstGeom prst="rect">
             <a:avLst/>
@@ -10181,8 +10181,8 @@
         </p:nvSpPr>
         <p:spPr>
           <a:xfrm>
-            <a:off x="1280160" y="320040"/>
-            <a:ext cx="9601200" cy="228600"/>
+            <a:off x="1143000" y="256032"/>
+            <a:ext cx="10424160" cy="182880"/>
           </a:xfrm>
           <a:prstGeom prst="rect">
             <a:avLst/>
@@ -10198,7 +10198,7 @@
               <a:buNone/>
             </a:pPr>
             <a:r>
-              <a:rPr lang="en-US" sz="900" b="1" dirty="0">
+              <a:rPr lang="en-US" sz="850" b="1" dirty="0">
                 <a:solidFill>
                   <a:srgbClr val="D4AF37"/>
                 </a:solidFill>
@@ -10208,7 +10208,7 @@
               </a:rPr>
               <a:t>🌐 IMPACT &amp; SCALING ROADMAP • COMMERCIALIZATION</a:t>
             </a:r>
-            <a:endParaRPr lang="en-US" sz="900" dirty="0"/>
+            <a:endParaRPr lang="en-US" sz="850" dirty="0"/>
           </a:p>
         </p:txBody>
       </p:sp>
@@ -10220,8 +10220,8 @@
         </p:nvSpPr>
         <p:spPr>
           <a:xfrm>
-            <a:off x="1280160" y="594360"/>
-            <a:ext cx="10241280" cy="411480"/>
+            <a:off x="1143000" y="475488"/>
+            <a:ext cx="10424160" cy="365760"/>
           </a:xfrm>
           <a:prstGeom prst="rect">
             <a:avLst/>
@@ -10237,7 +10237,7 @@
               <a:buNone/>
             </a:pPr>
             <a:r>
-              <a:rPr lang="en-US" sz="1800" b="1" dirty="0">
+              <a:rPr lang="en-US" sz="1600" b="1" dirty="0">
                 <a:solidFill>
                   <a:srgbClr val="F8FAFC"/>
                 </a:solidFill>
@@ -10247,7 +10247,7 @@
               </a:rPr>
               <a:t>Transformational Real-World Use Cases &amp; National Scale</a:t>
             </a:r>
-            <a:endParaRPr lang="en-US" sz="1800" dirty="0"/>
+            <a:endParaRPr lang="en-US" sz="1600" dirty="0"/>
           </a:p>
         </p:txBody>
       </p:sp>
@@ -10259,7 +10259,7 @@
         </p:nvSpPr>
         <p:spPr>
           <a:xfrm>
-            <a:off x="548640" y="1097280"/>
+            <a:off x="548640" y="960120"/>
             <a:ext cx="11091672" cy="0"/>
           </a:xfrm>
           <a:prstGeom prst="line">
@@ -10268,7 +10268,7 @@
           <a:noFill/>
           <a:ln w="12700">
             <a:solidFill>
-              <a:srgbClr val="20202C"/>
+              <a:srgbClr val="1C1C28"/>
             </a:solidFill>
             <a:prstDash val="solid"/>
           </a:ln>
@@ -10282,12 +10282,12 @@
         </p:nvSpPr>
         <p:spPr>
           <a:xfrm>
-            <a:off x="548640" y="1280160"/>
-            <a:ext cx="5468112" cy="1874520"/>
+            <a:off x="548640" y="1115568"/>
+            <a:ext cx="5468112" cy="1828800"/>
           </a:xfrm>
           <a:prstGeom prst="rect">
             <a:avLst>
-              <a:gd name="adj" fmla="val 2439"/>
+              <a:gd name="adj" fmla="val 2000"/>
             </a:avLst>
           </a:prstGeom>
           <a:solidFill>
@@ -10295,7 +10295,7 @@
           </a:solidFill>
           <a:ln w="12700">
             <a:solidFill>
-              <a:srgbClr val="222230"/>
+              <a:srgbClr val="20202E"/>
             </a:solidFill>
             <a:prstDash val="solid"/>
           </a:ln>
@@ -10309,8 +10309,8 @@
         </p:nvSpPr>
         <p:spPr>
           <a:xfrm>
-            <a:off x="731520" y="1463040"/>
-            <a:ext cx="5102352" cy="320040"/>
+            <a:off x="731520" y="1280160"/>
+            <a:ext cx="5102352" cy="292608"/>
           </a:xfrm>
           <a:prstGeom prst="rect">
             <a:avLst/>
@@ -10326,7 +10326,7 @@
               <a:buNone/>
             </a:pPr>
             <a:r>
-              <a:rPr lang="en-US" sz="1100" b="1" dirty="0">
+              <a:rPr lang="en-US" sz="1050" b="1" dirty="0">
                 <a:solidFill>
                   <a:srgbClr val="38BDF8"/>
                 </a:solidFill>
@@ -10336,7 +10336,7 @@
               </a:rPr>
               <a:t>👨‍👩‍👧 B2C: Senior Citizen Voice Shield</a:t>
             </a:r>
-            <a:endParaRPr lang="en-US" sz="1100" dirty="0"/>
+            <a:endParaRPr lang="en-US" sz="1050" dirty="0"/>
           </a:p>
         </p:txBody>
       </p:sp>
@@ -10348,7 +10348,7 @@
         </p:nvSpPr>
         <p:spPr>
           <a:xfrm>
-            <a:off x="731520" y="1828800"/>
+            <a:off x="731520" y="1618488"/>
             <a:ext cx="5102352" cy="1188720"/>
           </a:xfrm>
           <a:prstGeom prst="rect">
@@ -10363,12 +10363,12 @@
           <a:p>
             <a:pPr indent="0" marL="0">
               <a:lnSpc>
-                <a:spcPts val="1200"/>
+                <a:spcPts val="1100"/>
               </a:lnSpc>
               <a:buNone/>
             </a:pPr>
             <a:r>
-              <a:rPr lang="en-US" sz="850" dirty="0">
+              <a:rPr lang="en-US" sz="800" dirty="0">
                 <a:solidFill>
                   <a:srgbClr val="94A3B8"/>
                 </a:solidFill>
@@ -10378,7 +10378,7 @@
               </a:rPr>
               <a:t>Standalone mobile app with automated SMS quarantine &amp; regional voice alerts ("Yeh message dhokhadhadi hai") in Hindi, Tamil, Telugu, and Bengali for non-English literate elders.</a:t>
             </a:r>
-            <a:endParaRPr lang="en-US" sz="850" dirty="0"/>
+            <a:endParaRPr lang="en-US" sz="800" dirty="0"/>
           </a:p>
         </p:txBody>
       </p:sp>
@@ -10390,12 +10390,12 @@
         </p:nvSpPr>
         <p:spPr>
           <a:xfrm>
-            <a:off x="6172200" y="1280160"/>
-            <a:ext cx="5468112" cy="1874520"/>
+            <a:off x="6172200" y="1115568"/>
+            <a:ext cx="5468112" cy="1828800"/>
           </a:xfrm>
           <a:prstGeom prst="rect">
             <a:avLst>
-              <a:gd name="adj" fmla="val 2439"/>
+              <a:gd name="adj" fmla="val 2000"/>
             </a:avLst>
           </a:prstGeom>
           <a:solidFill>
@@ -10403,7 +10403,7 @@
           </a:solidFill>
           <a:ln w="12700">
             <a:solidFill>
-              <a:srgbClr val="222230"/>
+              <a:srgbClr val="20202E"/>
             </a:solidFill>
             <a:prstDash val="solid"/>
           </a:ln>
@@ -10417,8 +10417,8 @@
         </p:nvSpPr>
         <p:spPr>
           <a:xfrm>
-            <a:off x="6355080" y="1463040"/>
-            <a:ext cx="5102352" cy="320040"/>
+            <a:off x="6355080" y="1280160"/>
+            <a:ext cx="5102352" cy="292608"/>
           </a:xfrm>
           <a:prstGeom prst="rect">
             <a:avLst/>
@@ -10434,7 +10434,7 @@
               <a:buNone/>
             </a:pPr>
             <a:r>
-              <a:rPr lang="en-US" sz="1100" b="1" dirty="0">
+              <a:rPr lang="en-US" sz="1050" b="1" dirty="0">
                 <a:solidFill>
                   <a:srgbClr val="10B981"/>
                 </a:solidFill>
@@ -10444,7 +10444,7 @@
               </a:rPr>
               <a:t>🏦 B2B: Fintech &amp; Banking SDK</a:t>
             </a:r>
-            <a:endParaRPr lang="en-US" sz="1100" dirty="0"/>
+            <a:endParaRPr lang="en-US" sz="1050" dirty="0"/>
           </a:p>
         </p:txBody>
       </p:sp>
@@ -10456,7 +10456,7 @@
         </p:nvSpPr>
         <p:spPr>
           <a:xfrm>
-            <a:off x="6355080" y="1828800"/>
+            <a:off x="6355080" y="1618488"/>
             <a:ext cx="5102352" cy="1188720"/>
           </a:xfrm>
           <a:prstGeom prst="rect">
@@ -10471,12 +10471,12 @@
           <a:p>
             <a:pPr indent="0" marL="0">
               <a:lnSpc>
-                <a:spcPts val="1200"/>
+                <a:spcPts val="1100"/>
               </a:lnSpc>
               <a:buNone/>
             </a:pPr>
             <a:r>
-              <a:rPr lang="en-US" sz="850" dirty="0">
+              <a:rPr lang="en-US" sz="800" dirty="0">
                 <a:solidFill>
                   <a:srgbClr val="94A3B8"/>
                 </a:solidFill>
@@ -10486,7 +10486,7 @@
               </a:rPr>
               <a:t>Lightweight embeddable SDK for UPI apps (PhonePe, Paytm, Google Pay, SBI YONO) that intercepts fake OTP prompts and detects credential theft before payment execution.</a:t>
             </a:r>
-            <a:endParaRPr lang="en-US" sz="850" dirty="0"/>
+            <a:endParaRPr lang="en-US" sz="800" dirty="0"/>
           </a:p>
         </p:txBody>
       </p:sp>
@@ -10498,12 +10498,12 @@
         </p:nvSpPr>
         <p:spPr>
           <a:xfrm>
-            <a:off x="548640" y="3291840"/>
-            <a:ext cx="5468112" cy="1874520"/>
+            <a:off x="548640" y="3081528"/>
+            <a:ext cx="5468112" cy="1828800"/>
           </a:xfrm>
           <a:prstGeom prst="rect">
             <a:avLst>
-              <a:gd name="adj" fmla="val 2439"/>
+              <a:gd name="adj" fmla="val 2000"/>
             </a:avLst>
           </a:prstGeom>
           <a:solidFill>
@@ -10511,7 +10511,7 @@
           </a:solidFill>
           <a:ln w="12700">
             <a:solidFill>
-              <a:srgbClr val="222230"/>
+              <a:srgbClr val="20202E"/>
             </a:solidFill>
             <a:prstDash val="solid"/>
           </a:ln>
@@ -10525,8 +10525,8 @@
         </p:nvSpPr>
         <p:spPr>
           <a:xfrm>
-            <a:off x="731520" y="3474720"/>
-            <a:ext cx="5102352" cy="320040"/>
+            <a:off x="731520" y="3246120"/>
+            <a:ext cx="5102352" cy="292608"/>
           </a:xfrm>
           <a:prstGeom prst="rect">
             <a:avLst/>
@@ -10542,7 +10542,7 @@
               <a:buNone/>
             </a:pPr>
             <a:r>
-              <a:rPr lang="en-US" sz="1100" b="1" dirty="0">
+              <a:rPr lang="en-US" sz="1050" b="1" dirty="0">
                 <a:solidFill>
                   <a:srgbClr val="C084FC"/>
                 </a:solidFill>
@@ -10552,7 +10552,7 @@
               </a:rPr>
               <a:t>🏛️ B2G: Telecom Gateway Firewall</a:t>
             </a:r>
-            <a:endParaRPr lang="en-US" sz="1100" dirty="0"/>
+            <a:endParaRPr lang="en-US" sz="1050" dirty="0"/>
           </a:p>
         </p:txBody>
       </p:sp>
@@ -10564,7 +10564,7 @@
         </p:nvSpPr>
         <p:spPr>
           <a:xfrm>
-            <a:off x="731520" y="3840480"/>
+            <a:off x="731520" y="3584448"/>
             <a:ext cx="5102352" cy="1188720"/>
           </a:xfrm>
           <a:prstGeom prst="rect">
@@ -10579,12 +10579,12 @@
           <a:p>
             <a:pPr indent="0" marL="0">
               <a:lnSpc>
-                <a:spcPts val="1200"/>
+                <a:spcPts val="1100"/>
               </a:lnSpc>
               <a:buNone/>
             </a:pPr>
             <a:r>
-              <a:rPr lang="en-US" sz="850" dirty="0">
+              <a:rPr lang="en-US" sz="800" dirty="0">
                 <a:solidFill>
                   <a:srgbClr val="94A3B8"/>
                 </a:solidFill>
@@ -10594,7 +10594,7 @@
               </a:rPr>
               <a:t>Deployed directly at SMSC gateways (Airtel, Jio, Vi, TRAI DND) to perform deep-packet inspection and block smishing SMS in &lt;10ms before transmission across cell towers.</a:t>
             </a:r>
-            <a:endParaRPr lang="en-US" sz="850" dirty="0"/>
+            <a:endParaRPr lang="en-US" sz="800" dirty="0"/>
           </a:p>
         </p:txBody>
       </p:sp>
@@ -10606,12 +10606,12 @@
         </p:nvSpPr>
         <p:spPr>
           <a:xfrm>
-            <a:off x="6172200" y="3291840"/>
-            <a:ext cx="5468112" cy="1874520"/>
+            <a:off x="6172200" y="3081528"/>
+            <a:ext cx="5468112" cy="1828800"/>
           </a:xfrm>
           <a:prstGeom prst="rect">
             <a:avLst>
-              <a:gd name="adj" fmla="val 2439"/>
+              <a:gd name="adj" fmla="val 2000"/>
             </a:avLst>
           </a:prstGeom>
           <a:solidFill>
@@ -10619,7 +10619,7 @@
           </a:solidFill>
           <a:ln w="12700">
             <a:solidFill>
-              <a:srgbClr val="222230"/>
+              <a:srgbClr val="20202E"/>
             </a:solidFill>
             <a:prstDash val="solid"/>
           </a:ln>
@@ -10633,8 +10633,8 @@
         </p:nvSpPr>
         <p:spPr>
           <a:xfrm>
-            <a:off x="6355080" y="3474720"/>
-            <a:ext cx="5102352" cy="320040"/>
+            <a:off x="6355080" y="3246120"/>
+            <a:ext cx="5102352" cy="292608"/>
           </a:xfrm>
           <a:prstGeom prst="rect">
             <a:avLst/>
@@ -10650,7 +10650,7 @@
               <a:buNone/>
             </a:pPr>
             <a:r>
-              <a:rPr lang="en-US" sz="1100" b="1" dirty="0">
+              <a:rPr lang="en-US" sz="1050" b="1" dirty="0">
                 <a:solidFill>
                   <a:srgbClr val="D4AF37"/>
                 </a:solidFill>
@@ -10660,7 +10660,7 @@
               </a:rPr>
               <a:t>🚔 National Cyber Intelligence Bridge</a:t>
             </a:r>
-            <a:endParaRPr lang="en-US" sz="1100" dirty="0"/>
+            <a:endParaRPr lang="en-US" sz="1050" dirty="0"/>
           </a:p>
         </p:txBody>
       </p:sp>
@@ -10672,7 +10672,7 @@
         </p:nvSpPr>
         <p:spPr>
           <a:xfrm>
-            <a:off x="6355080" y="3840480"/>
+            <a:off x="6355080" y="3584448"/>
             <a:ext cx="5102352" cy="1188720"/>
           </a:xfrm>
           <a:prstGeom prst="rect">
@@ -10687,12 +10687,12 @@
           <a:p>
             <a:pPr indent="0" marL="0">
               <a:lnSpc>
-                <a:spcPts val="1200"/>
+                <a:spcPts val="1100"/>
               </a:lnSpc>
               <a:buNone/>
             </a:pPr>
             <a:r>
-              <a:rPr lang="en-US" sz="850" dirty="0">
+              <a:rPr lang="en-US" sz="800" dirty="0">
                 <a:solidFill>
                   <a:srgbClr val="94A3B8"/>
                 </a:solidFill>
@@ -10702,7 +10702,7 @@
               </a:rPr>
               <a:t>Automated real-time telemetry feed of scam phone numbers, fake APK URLs, and extortion UPI IDs shared directly with I4C (1930 Portal) to shut down scam call centers.</a:t>
             </a:r>
-            <a:endParaRPr lang="en-US" sz="850" dirty="0"/>
+            <a:endParaRPr lang="en-US" sz="800" dirty="0"/>
           </a:p>
         </p:txBody>
       </p:sp>
@@ -10714,12 +10714,12 @@
         </p:nvSpPr>
         <p:spPr>
           <a:xfrm>
-            <a:off x="548640" y="5349240"/>
-            <a:ext cx="11091672" cy="1051560"/>
+            <a:off x="548640" y="5212080"/>
+            <a:ext cx="11091672" cy="868680"/>
           </a:xfrm>
           <a:prstGeom prst="rect">
             <a:avLst>
-              <a:gd name="adj" fmla="val 4348"/>
+              <a:gd name="adj" fmla="val 4211"/>
             </a:avLst>
           </a:prstGeom>
           <a:solidFill>
@@ -10741,8 +10741,8 @@
         </p:nvSpPr>
         <p:spPr>
           <a:xfrm>
-            <a:off x="777240" y="5532120"/>
-            <a:ext cx="10607040" cy="685800"/>
+            <a:off x="777240" y="5349240"/>
+            <a:ext cx="10607040" cy="594360"/>
           </a:xfrm>
           <a:prstGeom prst="rect">
             <a:avLst/>
@@ -10758,7 +10758,7 @@
               <a:buNone/>
             </a:pPr>
             <a:r>
-              <a:rPr lang="en-US" sz="1000" b="1" dirty="0">
+              <a:rPr lang="en-US" sz="950" b="1" dirty="0">
                 <a:solidFill>
                   <a:srgbClr val="F3DF8A"/>
                 </a:solidFill>
@@ -10768,7 +10768,7 @@
               </a:rPr>
               <a:t>🎯 Quantified National Impact: 90%+ Reduction in vernacular smishing financial losses • Sub-45ms Zero Latency Overhead on legitimate banking OTPs • 100% Privacy Compliance under Indian DPDP Act 2023.</a:t>
             </a:r>
-            <a:endParaRPr lang="en-US" sz="1000" dirty="0"/>
+            <a:endParaRPr lang="en-US" sz="950" dirty="0"/>
           </a:p>
         </p:txBody>
       </p:sp>
